--- a/Week 1/CENG4100_Week01.pptx
+++ b/Week 1/CENG4100_Week01.pptx
@@ -4,6 +4,9 @@
   <p:sldMasterIdLst>
     <p:sldMasterId id="2147483648" r:id="rId1"/>
   </p:sldMasterIdLst>
+  <p:notesMasterIdLst>
+    <p:notesMasterId r:id="rId13"/>
+  </p:notesMasterIdLst>
   <p:sldIdLst>
     <p:sldId id="256" r:id="rId2"/>
     <p:sldId id="257" r:id="rId3"/>
@@ -17,9 +20,6 @@
     <p:sldId id="265" r:id="rId11"/>
     <p:sldId id="266" r:id="rId12"/>
   </p:sldIdLst>
-  <p:notesMasterIdLst>
-    <p:notesMasterId r:id="rId13"/>
-  </p:notesMasterIdLst>
   <p:sldSz cx="12192000" cy="6858000"/>
   <p:notesSz cx="6858000" cy="12192000"/>
   <p:defaultTextStyle>
@@ -114,6 +114,11 @@
       </a:defRPr>
     </a:lvl9pPr>
   </p:defaultTextStyle>
+  <p:extLst>
+    <p:ext uri="{EFAFB233-063F-42B5-8137-9DF3F51BA10A}">
+      <p15:sldGuideLst xmlns:p15="http://schemas.microsoft.com/office/powerpoint/2012/main"/>
+    </p:ext>
+  </p:extLst>
 </p:presentation>
 </file>
 
@@ -139,234 +144,10 @@
           <a:chExt cx="0" cy="0"/>
         </a:xfrm>
       </p:grpSpPr>
-      <p:sp>
-        <p:nvSpPr>
-          <p:cNvPr id="2" name="Header Placeholder 1"/>
-          <p:cNvSpPr>
-            <a:spLocks noGrp="1"/>
-          </p:cNvSpPr>
-          <p:nvPr>
-            <p:ph type="hdr" sz="quarter"/>
-          </p:nvPr>
-        </p:nvSpPr>
-        <p:spPr>
-          <a:xfrm>
-            <a:off x="0" y="0"/>
-            <a:ext cx="2971800" cy="458788"/>
-          </a:xfrm>
-          <a:prstGeom prst="rect">
-            <a:avLst/>
-          </a:prstGeom>
-        </p:spPr>
-        <p:txBody>
-          <a:bodyPr vert="horz" lIns="91440" tIns="45720" rIns="91440" bIns="45720" rtlCol="0"/>
-          <a:lstStyle>
-            <a:lvl1pPr algn="l">
-              <a:defRPr sz="1200"/>
-            </a:lvl1pPr>
-          </a:lstStyle>
-          <a:p>
-            <a:endParaRPr lang="en-US"/>
-          </a:p>
-        </p:txBody>
-      </p:sp>
-      <p:sp>
-        <p:nvSpPr>
-          <p:cNvPr id="3" name="Date Placeholder 2"/>
-          <p:cNvSpPr>
-            <a:spLocks noGrp="1"/>
-          </p:cNvSpPr>
-          <p:nvPr>
-            <p:ph type="dt" idx="1"/>
-          </p:nvPr>
-        </p:nvSpPr>
-        <p:spPr>
-          <a:xfrm>
-            <a:off x="3884613" y="0"/>
-            <a:ext cx="2971800" cy="458788"/>
-          </a:xfrm>
-          <a:prstGeom prst="rect">
-            <a:avLst/>
-          </a:prstGeom>
-        </p:spPr>
-        <p:txBody>
-          <a:bodyPr vert="horz" lIns="91440" tIns="45720" rIns="91440" bIns="45720" rtlCol="0"/>
-          <a:lstStyle>
-            <a:lvl1pPr algn="r">
-              <a:defRPr sz="1200"/>
-            </a:lvl1pPr>
-          </a:lstStyle>
-          <a:p>
-            <a:fld id="{5282F153-3F37-0F45-9E97-73ACFA13230C}" type="datetimeFigureOut">
-              <a:rPr lang="en-US"/>
-              <a:t>7/23/19</a:t>
-            </a:fld>
-            <a:endParaRPr lang="en-US"/>
-          </a:p>
-        </p:txBody>
-      </p:sp>
-      <p:sp>
-        <p:nvSpPr>
-          <p:cNvPr id="4" name="Slide Image Placeholder 3"/>
-          <p:cNvSpPr>
-            <a:spLocks noGrp="1" noRot="1" noChangeAspect="1"/>
-          </p:cNvSpPr>
-          <p:nvPr>
-            <p:ph type="sldImg" idx="2"/>
-          </p:nvPr>
-        </p:nvSpPr>
-        <p:spPr>
-          <a:xfrm>
-            <a:off x="685800" y="1143000"/>
-            <a:ext cx="5486400" cy="3086100"/>
-          </a:xfrm>
-          <a:prstGeom prst="rect">
-            <a:avLst/>
-          </a:prstGeom>
-          <a:noFill/>
-          <a:ln w="12700">
-            <a:solidFill>
-              <a:prstClr val="black"/>
-            </a:solidFill>
-          </a:ln>
-        </p:spPr>
-        <p:txBody>
-          <a:bodyPr vert="horz" lIns="91440" tIns="45720" rIns="91440" bIns="45720" rtlCol="0" anchor="ctr"/>
-          <a:lstStyle/>
-          <a:p>
-            <a:endParaRPr lang="en-US"/>
-          </a:p>
-        </p:txBody>
-      </p:sp>
-      <p:sp>
-        <p:nvSpPr>
-          <p:cNvPr id="5" name="Notes Placeholder 4"/>
-          <p:cNvSpPr>
-            <a:spLocks noGrp="1"/>
-          </p:cNvSpPr>
-          <p:nvPr>
-            <p:ph type="body" sz="quarter" idx="3"/>
-          </p:nvPr>
-        </p:nvSpPr>
-        <p:spPr>
-          <a:xfrm>
-            <a:off x="685800" y="4400550"/>
-            <a:ext cx="5486400" cy="3600450"/>
-          </a:xfrm>
-          <a:prstGeom prst="rect">
-            <a:avLst/>
-          </a:prstGeom>
-        </p:spPr>
-        <p:txBody>
-          <a:bodyPr vert="horz" lIns="91440" tIns="45720" rIns="91440" bIns="45720" rtlCol="0"/>
-          <a:lstStyle/>
-          <a:p>
-            <a:pPr lvl="0"/>
-            <a:r>
-              <a:rPr lang="en-US"/>
-              <a:t>Click to edit Master text styles</a:t>
-            </a:r>
-          </a:p>
-          <a:p>
-            <a:pPr lvl="1"/>
-            <a:r>
-              <a:rPr lang="en-US"/>
-              <a:t>Second level</a:t>
-            </a:r>
-          </a:p>
-          <a:p>
-            <a:pPr lvl="2"/>
-            <a:r>
-              <a:rPr lang="en-US"/>
-              <a:t>Third level</a:t>
-            </a:r>
-          </a:p>
-          <a:p>
-            <a:pPr lvl="3"/>
-            <a:r>
-              <a:rPr lang="en-US"/>
-              <a:t>Fourth level</a:t>
-            </a:r>
-          </a:p>
-          <a:p>
-            <a:pPr lvl="4"/>
-            <a:r>
-              <a:rPr lang="en-US"/>
-              <a:t>Fifth level</a:t>
-            </a:r>
-          </a:p>
-        </p:txBody>
-      </p:sp>
-      <p:sp>
-        <p:nvSpPr>
-          <p:cNvPr id="6" name="Footer Placeholder 5"/>
-          <p:cNvSpPr>
-            <a:spLocks noGrp="1"/>
-          </p:cNvSpPr>
-          <p:nvPr>
-            <p:ph type="ftr" sz="quarter" idx="4"/>
-          </p:nvPr>
-        </p:nvSpPr>
-        <p:spPr>
-          <a:xfrm>
-            <a:off x="0" y="8685213"/>
-            <a:ext cx="2971800" cy="458787"/>
-          </a:xfrm>
-          <a:prstGeom prst="rect">
-            <a:avLst/>
-          </a:prstGeom>
-        </p:spPr>
-        <p:txBody>
-          <a:bodyPr vert="horz" lIns="91440" tIns="45720" rIns="91440" bIns="45720" rtlCol="0" anchor="b"/>
-          <a:lstStyle>
-            <a:lvl1pPr algn="l">
-              <a:defRPr sz="1200"/>
-            </a:lvl1pPr>
-          </a:lstStyle>
-          <a:p>
-            <a:endParaRPr lang="en-US"/>
-          </a:p>
-        </p:txBody>
-      </p:sp>
-      <p:sp>
-        <p:nvSpPr>
-          <p:cNvPr id="7" name="Slide Number Placeholder 6"/>
-          <p:cNvSpPr>
-            <a:spLocks noGrp="1"/>
-          </p:cNvSpPr>
-          <p:nvPr>
-            <p:ph type="sldNum" sz="quarter" idx="5"/>
-          </p:nvPr>
-        </p:nvSpPr>
-        <p:spPr>
-          <a:xfrm>
-            <a:off x="3884613" y="8685213"/>
-            <a:ext cx="2971800" cy="458787"/>
-          </a:xfrm>
-          <a:prstGeom prst="rect">
-            <a:avLst/>
-          </a:prstGeom>
-        </p:spPr>
-        <p:txBody>
-          <a:bodyPr vert="horz" lIns="91440" tIns="45720" rIns="91440" bIns="45720" rtlCol="0" anchor="b"/>
-          <a:lstStyle>
-            <a:lvl1pPr algn="r">
-              <a:defRPr sz="1200"/>
-            </a:lvl1pPr>
-          </a:lstStyle>
-          <a:p>
-            <a:fld id="{CE5E9CC1-C706-0F49-92D6-E571CC5EEA8F}" type="slidenum">
-              <a:rPr lang="en-US"/>
-              <a:t>‹#›</a:t>
-            </a:fld>
-            <a:endParaRPr lang="en-US"/>
-          </a:p>
-        </p:txBody>
-      </p:sp>
     </p:spTree>
     <p:extLst>
       <p:ext uri="{BB962C8B-B14F-4D97-AF65-F5344CB8AC3E}">
-        <p14:creationId xmlns:p14="http://schemas.microsoft.com/office/powerpoint/2010/main" val="1024086991"/>
+        <p14:creationId xmlns:p14="http://schemas.microsoft.com/office/powerpoint/2010/main" val="4070758339"/>
       </p:ext>
     </p:extLst>
   </p:cSld>
@@ -510,10 +291,6 @@
           <a:bodyPr/>
           <a:lstStyle/>
           <a:p>
-            <a:r>
-              <a:rPr lang="en-US" dirty="0"/>
-              <a:t/>
-            </a:r>
             <a:endParaRPr lang="en-US" dirty="0"/>
           </a:p>
         </p:txBody>
@@ -598,10 +375,6 @@
           <a:bodyPr/>
           <a:lstStyle/>
           <a:p>
-            <a:r>
-              <a:rPr lang="en-US" dirty="0"/>
-              <a:t/>
-            </a:r>
             <a:endParaRPr lang="en-US" dirty="0"/>
           </a:p>
         </p:txBody>
@@ -686,10 +459,6 @@
           <a:bodyPr/>
           <a:lstStyle/>
           <a:p>
-            <a:r>
-              <a:rPr lang="en-US" dirty="0"/>
-              <a:t/>
-            </a:r>
             <a:endParaRPr lang="en-US" dirty="0"/>
           </a:p>
         </p:txBody>
@@ -774,10 +543,6 @@
           <a:bodyPr/>
           <a:lstStyle/>
           <a:p>
-            <a:r>
-              <a:rPr lang="en-US" dirty="0"/>
-              <a:t/>
-            </a:r>
             <a:endParaRPr lang="en-US" dirty="0"/>
           </a:p>
         </p:txBody>
@@ -862,10 +627,6 @@
           <a:bodyPr/>
           <a:lstStyle/>
           <a:p>
-            <a:r>
-              <a:rPr lang="en-US" dirty="0"/>
-              <a:t/>
-            </a:r>
             <a:endParaRPr lang="en-US" dirty="0"/>
           </a:p>
         </p:txBody>
@@ -950,10 +711,6 @@
           <a:bodyPr/>
           <a:lstStyle/>
           <a:p>
-            <a:r>
-              <a:rPr lang="en-US" dirty="0"/>
-              <a:t/>
-            </a:r>
             <a:endParaRPr lang="en-US" dirty="0"/>
           </a:p>
         </p:txBody>
@@ -1038,10 +795,6 @@
           <a:bodyPr/>
           <a:lstStyle/>
           <a:p>
-            <a:r>
-              <a:rPr lang="en-US" dirty="0"/>
-              <a:t/>
-            </a:r>
             <a:endParaRPr lang="en-US" dirty="0"/>
           </a:p>
         </p:txBody>
@@ -1126,10 +879,6 @@
           <a:bodyPr/>
           <a:lstStyle/>
           <a:p>
-            <a:r>
-              <a:rPr lang="en-US" dirty="0"/>
-              <a:t/>
-            </a:r>
             <a:endParaRPr lang="en-US" dirty="0"/>
           </a:p>
         </p:txBody>
@@ -1214,10 +963,6 @@
           <a:bodyPr/>
           <a:lstStyle/>
           <a:p>
-            <a:r>
-              <a:rPr lang="en-US" dirty="0"/>
-              <a:t/>
-            </a:r>
             <a:endParaRPr lang="en-US" dirty="0"/>
           </a:p>
         </p:txBody>
@@ -1302,10 +1047,6 @@
           <a:bodyPr/>
           <a:lstStyle/>
           <a:p>
-            <a:r>
-              <a:rPr lang="en-US" dirty="0"/>
-              <a:t/>
-            </a:r>
             <a:endParaRPr lang="en-US" dirty="0"/>
           </a:p>
         </p:txBody>
@@ -1390,10 +1131,6 @@
           <a:bodyPr/>
           <a:lstStyle/>
           <a:p>
-            <a:r>
-              <a:rPr lang="en-US" dirty="0"/>
-              <a:t/>
-            </a:r>
             <a:endParaRPr lang="en-US" dirty="0"/>
           </a:p>
         </p:txBody>
@@ -1467,6 +1204,11 @@
 <file path=ppt/slideMasters/slideMaster1.xml><?xml version="1.0" encoding="utf-8"?>
 <p:sldMaster xmlns:a="http://schemas.openxmlformats.org/drawingml/2006/main" xmlns:r="http://schemas.openxmlformats.org/officeDocument/2006/relationships" xmlns:p="http://schemas.openxmlformats.org/presentationml/2006/main">
   <p:cSld>
+    <p:bg>
+      <p:bgRef idx="1001">
+        <a:schemeClr val="bg1"/>
+      </p:bgRef>
+    </p:bg>
     <p:spTree>
       <p:nvGrpSpPr>
         <p:cNvPr id="1" name=""/>
@@ -1749,6 +1491,7 @@
         <a:solidFill>
           <a:srgbClr val="9E1B32"/>
         </a:solidFill>
+        <a:effectLst/>
       </p:bgPr>
     </p:bg>
     <p:spTree>
@@ -1786,11 +1529,11 @@
           <a:bodyPr wrap="square" rtlCol="0" anchor="ctr"/>
           <a:lstStyle/>
           <a:p>
-            <a:pPr algn="ctr" indent="0" marL="0">
-              <a:buNone/>
-            </a:pPr>
-            <a:r>
-              <a:rPr lang="en-US" sz="2000" b="1" spc="300" kern="0" dirty="0">
+            <a:pPr marL="0" indent="0" algn="ctr">
+              <a:buNone/>
+            </a:pPr>
+            <a:r>
+              <a:rPr lang="en-US" sz="2000" b="1" kern="0" spc="300" dirty="0">
                 <a:solidFill>
                   <a:srgbClr val="E7B8C2"/>
                 </a:solidFill>
@@ -1825,7 +1568,7 @@
           <a:bodyPr wrap="square" rtlCol="0" anchor="ctr"/>
           <a:lstStyle/>
           <a:p>
-            <a:pPr algn="ctr" indent="0" marL="0">
+            <a:pPr marL="0" indent="0" algn="ctr">
               <a:buNone/>
             </a:pPr>
             <a:r>
@@ -1862,6 +1605,13 @@
           </a:solidFill>
           <a:ln/>
         </p:spPr>
+        <p:txBody>
+          <a:bodyPr/>
+          <a:lstStyle/>
+          <a:p>
+            <a:endParaRPr lang="en-US"/>
+          </a:p>
+        </p:txBody>
       </p:sp>
       <p:sp>
         <p:nvSpPr>
@@ -1884,7 +1634,7 @@
           <a:bodyPr wrap="square" rtlCol="0" anchor="ctr"/>
           <a:lstStyle/>
           <a:p>
-            <a:pPr algn="ctr" indent="0" marL="0">
+            <a:pPr marL="0" indent="0" algn="ctr">
               <a:buNone/>
             </a:pPr>
             <a:r>
@@ -1923,7 +1673,7 @@
           <a:bodyPr wrap="square" rtlCol="0" anchor="ctr"/>
           <a:lstStyle/>
           <a:p>
-            <a:pPr algn="ctr" indent="0" marL="0">
+            <a:pPr marL="0" indent="0" algn="ctr">
               <a:buNone/>
             </a:pPr>
             <a:r>
@@ -1962,11 +1712,11 @@
           <a:bodyPr wrap="square" rtlCol="0" anchor="ctr"/>
           <a:lstStyle/>
           <a:p>
-            <a:pPr algn="ctr" indent="0" marL="0">
-              <a:buNone/>
-            </a:pPr>
-            <a:r>
-              <a:rPr lang="en-US" sz="2400" b="1" spc="400" kern="0" dirty="0">
+            <a:pPr marL="0" indent="0" algn="ctr">
+              <a:buNone/>
+            </a:pPr>
+            <a:r>
+              <a:rPr lang="en-US" sz="2400" b="1" kern="0" spc="400" dirty="0">
                 <a:solidFill>
                   <a:srgbClr val="FFFFFF"/>
                 </a:solidFill>
@@ -2001,11 +1751,11 @@
           <a:bodyPr wrap="square" rtlCol="0" anchor="ctr"/>
           <a:lstStyle/>
           <a:p>
-            <a:pPr algn="ctr" indent="0" marL="0">
-              <a:buNone/>
-            </a:pPr>
-            <a:r>
-              <a:rPr lang="en-US" sz="1300" spc="300" kern="0" dirty="0">
+            <a:pPr marL="0" indent="0" algn="ctr">
+              <a:buNone/>
+            </a:pPr>
+            <a:r>
+              <a:rPr lang="en-US" sz="1300" kern="0" spc="300" dirty="0">
                 <a:solidFill>
                   <a:srgbClr val="F3D9DF"/>
                 </a:solidFill>
@@ -2035,6 +1785,7 @@
         <a:solidFill>
           <a:srgbClr val="FFFFFF"/>
         </a:solidFill>
+        <a:effectLst/>
       </p:bgPr>
     </p:bg>
     <p:spTree>
@@ -2074,7 +1825,7 @@
           </a:bodyPr>
           <a:lstStyle/>
           <a:p>
-            <a:pPr algn="l" indent="0" marL="0">
+            <a:pPr marL="0" indent="0" algn="l">
               <a:buNone/>
             </a:pPr>
             <a:r>
@@ -2088,9 +1839,6 @@
               </a:rPr>
               <a:t>Reading Response #1</a:t>
             </a:r>
-            <a:pPr algn="l" indent="0" marL="0">
-              <a:buNone/>
-            </a:pPr>
             <a:r>
               <a:rPr lang="en-US" sz="3300" b="1" dirty="0">
                 <a:solidFill>
@@ -2102,9 +1850,6 @@
               </a:rPr>
               <a:t>   |   </a:t>
             </a:r>
-            <a:pPr algn="l" indent="0" marL="0">
-              <a:buNone/>
-            </a:pPr>
             <a:r>
               <a:rPr lang="en-US" sz="3300" b="1" dirty="0">
                 <a:solidFill>
@@ -2139,6 +1884,13 @@
           </a:solidFill>
           <a:ln/>
         </p:spPr>
+        <p:txBody>
+          <a:bodyPr/>
+          <a:lstStyle/>
+          <a:p>
+            <a:endParaRPr lang="en-US"/>
+          </a:p>
+        </p:txBody>
       </p:sp>
       <p:sp>
         <p:nvSpPr>
@@ -2161,7 +1913,7 @@
           <a:bodyPr wrap="square" lIns="0" tIns="0" rIns="0" bIns="0" rtlCol="0" anchor="t"/>
           <a:lstStyle/>
           <a:p>
-            <a:pPr algn="l" indent="0" marL="0">
+            <a:pPr marL="0" indent="0" algn="l">
               <a:buNone/>
             </a:pPr>
             <a:r>
@@ -2198,6 +1950,13 @@
           </a:solidFill>
           <a:ln/>
         </p:spPr>
+        <p:txBody>
+          <a:bodyPr/>
+          <a:lstStyle/>
+          <a:p>
+            <a:endParaRPr lang="en-US"/>
+          </a:p>
+        </p:txBody>
       </p:sp>
       <p:sp>
         <p:nvSpPr>
@@ -2218,6 +1977,13 @@
           </a:solidFill>
           <a:ln/>
         </p:spPr>
+        <p:txBody>
+          <a:bodyPr/>
+          <a:lstStyle/>
+          <a:p>
+            <a:endParaRPr lang="en-US"/>
+          </a:p>
+        </p:txBody>
       </p:sp>
       <p:sp>
         <p:nvSpPr>
@@ -2240,7 +2006,7 @@
           <a:bodyPr wrap="square" lIns="0" tIns="0" rIns="0" bIns="0" rtlCol="0" anchor="ctr"/>
           <a:lstStyle/>
           <a:p>
-            <a:pPr indent="0" marL="0">
+            <a:pPr marL="0" indent="0">
               <a:buNone/>
             </a:pPr>
             <a:r>
@@ -2279,7 +2045,7 @@
           <a:bodyPr wrap="square" lIns="0" tIns="0" rIns="0" bIns="0" rtlCol="0" anchor="t"/>
           <a:lstStyle/>
           <a:p>
-            <a:pPr algn="l" marL="165100" indent="-165100">
+            <a:pPr marL="165100" indent="-165100" algn="l">
               <a:spcAft>
                 <a:spcPts val="700"/>
               </a:spcAft>
@@ -2300,7 +2066,7 @@
             <a:endParaRPr lang="en-US" sz="1400" dirty="0"/>
           </a:p>
           <a:p>
-            <a:pPr algn="l" marL="165100" indent="-165100">
+            <a:pPr marL="165100" indent="-165100" algn="l">
               <a:spcAft>
                 <a:spcPts val="700"/>
               </a:spcAft>
@@ -2341,6 +2107,13 @@
           </a:solidFill>
           <a:ln/>
         </p:spPr>
+        <p:txBody>
+          <a:bodyPr/>
+          <a:lstStyle/>
+          <a:p>
+            <a:endParaRPr lang="en-US"/>
+          </a:p>
+        </p:txBody>
       </p:sp>
       <p:sp>
         <p:nvSpPr>
@@ -2361,6 +2134,13 @@
           </a:solidFill>
           <a:ln/>
         </p:spPr>
+        <p:txBody>
+          <a:bodyPr/>
+          <a:lstStyle/>
+          <a:p>
+            <a:endParaRPr lang="en-US"/>
+          </a:p>
+        </p:txBody>
       </p:sp>
       <p:sp>
         <p:nvSpPr>
@@ -2383,7 +2163,7 @@
           <a:bodyPr wrap="square" lIns="0" tIns="0" rIns="0" bIns="0" rtlCol="0" anchor="ctr"/>
           <a:lstStyle/>
           <a:p>
-            <a:pPr indent="0" marL="0">
+            <a:pPr marL="0" indent="0">
               <a:buNone/>
             </a:pPr>
             <a:r>
@@ -2422,7 +2202,7 @@
           <a:bodyPr wrap="square" lIns="0" tIns="0" rIns="0" bIns="0" rtlCol="0" anchor="t"/>
           <a:lstStyle/>
           <a:p>
-            <a:pPr algn="l" marL="165100" indent="-165100">
+            <a:pPr marL="165100" indent="-165100" algn="l">
               <a:spcAft>
                 <a:spcPts val="700"/>
               </a:spcAft>
@@ -2443,7 +2223,7 @@
             <a:endParaRPr lang="en-US" sz="1400" dirty="0"/>
           </a:p>
           <a:p>
-            <a:pPr algn="l" marL="165100" indent="-165100">
+            <a:pPr marL="165100" indent="-165100" algn="l">
               <a:spcAft>
                 <a:spcPts val="700"/>
               </a:spcAft>
@@ -2484,6 +2264,13 @@
           </a:solidFill>
           <a:ln/>
         </p:spPr>
+        <p:txBody>
+          <a:bodyPr/>
+          <a:lstStyle/>
+          <a:p>
+            <a:endParaRPr lang="en-US"/>
+          </a:p>
+        </p:txBody>
       </p:sp>
       <p:sp>
         <p:nvSpPr>
@@ -2504,6 +2291,13 @@
           </a:solidFill>
           <a:ln/>
         </p:spPr>
+        <p:txBody>
+          <a:bodyPr/>
+          <a:lstStyle/>
+          <a:p>
+            <a:endParaRPr lang="en-US"/>
+          </a:p>
+        </p:txBody>
       </p:sp>
       <p:sp>
         <p:nvSpPr>
@@ -2526,7 +2320,7 @@
           <a:bodyPr wrap="square" lIns="0" tIns="0" rIns="0" bIns="0" rtlCol="0" anchor="ctr"/>
           <a:lstStyle/>
           <a:p>
-            <a:pPr indent="0" marL="0">
+            <a:pPr marL="0" indent="0">
               <a:buNone/>
             </a:pPr>
             <a:r>
@@ -2565,7 +2359,7 @@
           <a:bodyPr wrap="square" lIns="0" tIns="0" rIns="0" bIns="0" rtlCol="0" anchor="t"/>
           <a:lstStyle/>
           <a:p>
-            <a:pPr algn="l" marL="165100" indent="-165100">
+            <a:pPr marL="165100" indent="-165100" algn="l">
               <a:spcAft>
                 <a:spcPts val="700"/>
               </a:spcAft>
@@ -2586,7 +2380,7 @@
             <a:endParaRPr lang="en-US" sz="1400" dirty="0"/>
           </a:p>
           <a:p>
-            <a:pPr algn="l" marL="165100" indent="-165100">
+            <a:pPr marL="165100" indent="-165100" algn="l">
               <a:spcAft>
                 <a:spcPts val="700"/>
               </a:spcAft>
@@ -2610,45 +2404,6 @@
       </p:sp>
       <p:sp>
         <p:nvSpPr>
-          <p:cNvPr id="17" name="Text 15"/>
-          <p:cNvSpPr/>
-          <p:nvPr/>
-        </p:nvSpPr>
-        <p:spPr>
-          <a:xfrm>
-            <a:off x="566928" y="5806440"/>
-            <a:ext cx="11057839" cy="457200"/>
-          </a:xfrm>
-          <a:prstGeom prst="rect">
-            <a:avLst/>
-          </a:prstGeom>
-          <a:noFill/>
-          <a:ln/>
-        </p:spPr>
-        <p:txBody>
-          <a:bodyPr wrap="square" lIns="0" tIns="0" rIns="0" bIns="0" rtlCol="0" anchor="ctr"/>
-          <a:lstStyle/>
-          <a:p>
-            <a:pPr algn="l" indent="0" marL="0">
-              <a:buNone/>
-            </a:pPr>
-            <a:r>
-              <a:rPr lang="en-US" sz="1500" i="1" dirty="0">
-                <a:solidFill>
-                  <a:srgbClr val="9E1B32"/>
-                </a:solidFill>
-                <a:latin typeface="Tw Cen MT" pitchFamily="34" charset="0"/>
-                <a:ea typeface="Tw Cen MT" pitchFamily="34" charset="-122"/>
-                <a:cs typeface="Tw Cen MT" pitchFamily="34" charset="-120"/>
-              </a:rPr>
-              <a:t>Answer in your own words. Cite the section, not the sentence.</a:t>
-            </a:r>
-            <a:endParaRPr lang="en-US" sz="1500" dirty="0"/>
-          </a:p>
-        </p:txBody>
-      </p:sp>
-      <p:sp>
-        <p:nvSpPr>
           <p:cNvPr id="18" name="Shape 16"/>
           <p:cNvSpPr/>
           <p:nvPr/>
@@ -2666,6 +2421,13 @@
           </a:solidFill>
           <a:ln/>
         </p:spPr>
+        <p:txBody>
+          <a:bodyPr/>
+          <a:lstStyle/>
+          <a:p>
+            <a:endParaRPr lang="en-US"/>
+          </a:p>
+        </p:txBody>
       </p:sp>
       <p:sp>
         <p:nvSpPr>
@@ -2688,7 +2450,7 @@
           <a:bodyPr wrap="square" rtlCol="0" anchor="ctr"/>
           <a:lstStyle/>
           <a:p>
-            <a:pPr algn="ctr" indent="0" marL="0">
+            <a:pPr marL="0" indent="0" algn="ctr">
               <a:buNone/>
             </a:pPr>
             <a:r>
@@ -2727,7 +2489,7 @@
           <a:bodyPr wrap="square" rtlCol="0" anchor="ctr"/>
           <a:lstStyle/>
           <a:p>
-            <a:pPr algn="r" indent="0" marL="0">
+            <a:pPr marL="0" indent="0" algn="r">
               <a:buNone/>
             </a:pPr>
             <a:r>
@@ -2761,6 +2523,7 @@
         <a:solidFill>
           <a:srgbClr val="FFFFFF"/>
         </a:solidFill>
+        <a:effectLst/>
       </p:bgPr>
     </p:bg>
     <p:spTree>
@@ -2800,7 +2563,7 @@
           </a:bodyPr>
           <a:lstStyle/>
           <a:p>
-            <a:pPr algn="l" indent="0" marL="0">
+            <a:pPr marL="0" indent="0" algn="l">
               <a:buNone/>
             </a:pPr>
             <a:r>
@@ -2814,9 +2577,6 @@
               </a:rPr>
               <a:t>Week 1 Reflection</a:t>
             </a:r>
-            <a:pPr algn="l" indent="0" marL="0">
-              <a:buNone/>
-            </a:pPr>
             <a:r>
               <a:rPr lang="en-US" sz="3300" b="1" dirty="0">
                 <a:solidFill>
@@ -2828,9 +2588,6 @@
               </a:rPr>
               <a:t>   |   </a:t>
             </a:r>
-            <a:pPr algn="l" indent="0" marL="0">
-              <a:buNone/>
-            </a:pPr>
             <a:r>
               <a:rPr lang="en-US" sz="3300" b="1" dirty="0">
                 <a:solidFill>
@@ -2865,6 +2622,13 @@
           </a:solidFill>
           <a:ln/>
         </p:spPr>
+        <p:txBody>
+          <a:bodyPr/>
+          <a:lstStyle/>
+          <a:p>
+            <a:endParaRPr lang="en-US"/>
+          </a:p>
+        </p:txBody>
       </p:sp>
       <p:sp>
         <p:nvSpPr>
@@ -2887,7 +2651,7 @@
           <a:bodyPr wrap="square" lIns="0" tIns="0" rIns="0" bIns="0" rtlCol="0" anchor="t"/>
           <a:lstStyle/>
           <a:p>
-            <a:pPr algn="l" indent="0" marL="0">
+            <a:pPr marL="0" indent="0" algn="l">
               <a:buNone/>
             </a:pPr>
             <a:r>
@@ -2907,16 +2671,16 @@
       </p:sp>
       <p:sp>
         <p:nvSpPr>
-          <p:cNvPr id="5" name="Shape 3"/>
-          <p:cNvSpPr/>
-          <p:nvPr/>
-        </p:nvSpPr>
-        <p:spPr>
-          <a:xfrm>
-            <a:off x="566928" y="1892808"/>
-            <a:ext cx="457200" cy="457200"/>
-          </a:xfrm>
-          <a:prstGeom prst="ellipse">
+          <p:cNvPr id="18" name="Shape 16"/>
+          <p:cNvSpPr/>
+          <p:nvPr/>
+        </p:nvSpPr>
+        <p:spPr>
+          <a:xfrm>
+            <a:off x="0" y="6382512"/>
+            <a:ext cx="475488" cy="475488"/>
+          </a:xfrm>
+          <a:prstGeom prst="rect">
             <a:avLst/>
           </a:prstGeom>
           <a:solidFill>
@@ -2924,17 +2688,24 @@
           </a:solidFill>
           <a:ln/>
         </p:spPr>
-      </p:sp>
-      <p:sp>
-        <p:nvSpPr>
-          <p:cNvPr id="6" name="Text 4"/>
-          <p:cNvSpPr/>
-          <p:nvPr/>
-        </p:nvSpPr>
-        <p:spPr>
-          <a:xfrm>
-            <a:off x="566928" y="1892808"/>
-            <a:ext cx="457200" cy="457200"/>
+        <p:txBody>
+          <a:bodyPr/>
+          <a:lstStyle/>
+          <a:p>
+            <a:endParaRPr lang="en-US"/>
+          </a:p>
+        </p:txBody>
+      </p:sp>
+      <p:sp>
+        <p:nvSpPr>
+          <p:cNvPr id="19" name="Text 17"/>
+          <p:cNvSpPr/>
+          <p:nvPr/>
+        </p:nvSpPr>
+        <p:spPr>
+          <a:xfrm>
+            <a:off x="0" y="6382512"/>
+            <a:ext cx="475488" cy="475488"/>
           </a:xfrm>
           <a:prstGeom prst="rect">
             <a:avLst/>
@@ -2946,11 +2717,11 @@
           <a:bodyPr wrap="square" rtlCol="0" anchor="ctr"/>
           <a:lstStyle/>
           <a:p>
-            <a:pPr algn="ctr" indent="0" marL="0">
-              <a:buNone/>
-            </a:pPr>
-            <a:r>
-              <a:rPr lang="en-US" sz="2000" b="1" dirty="0">
+            <a:pPr marL="0" indent="0" algn="ctr">
+              <a:buNone/>
+            </a:pPr>
+            <a:r>
+              <a:rPr lang="en-US" sz="2200" b="1" dirty="0">
                 <a:solidFill>
                   <a:srgbClr val="FFFFFF"/>
                 </a:solidFill>
@@ -2958,517 +2729,6 @@
                 <a:ea typeface="Tw Cen MT Condensed Extra Bold" pitchFamily="34" charset="-122"/>
                 <a:cs typeface="Tw Cen MT Condensed Extra Bold" pitchFamily="34" charset="-120"/>
               </a:rPr>
-              <a:t>1</a:t>
-            </a:r>
-            <a:endParaRPr lang="en-US" sz="2000" dirty="0"/>
-          </a:p>
-        </p:txBody>
-      </p:sp>
-      <p:sp>
-        <p:nvSpPr>
-          <p:cNvPr id="7" name="Text 5"/>
-          <p:cNvSpPr/>
-          <p:nvPr/>
-        </p:nvSpPr>
-        <p:spPr>
-          <a:xfrm>
-            <a:off x="1225296" y="1856232"/>
-            <a:ext cx="10222992" cy="502920"/>
-          </a:xfrm>
-          <a:prstGeom prst="rect">
-            <a:avLst/>
-          </a:prstGeom>
-          <a:noFill/>
-          <a:ln/>
-        </p:spPr>
-        <p:txBody>
-          <a:bodyPr wrap="square" lIns="0" tIns="0" rIns="0" bIns="0" rtlCol="0" anchor="t"/>
-          <a:lstStyle/>
-          <a:p>
-            <a:pPr algn="l" indent="0" marL="0">
-              <a:lnSpc>
-                <a:spcPct val="100000"/>
-              </a:lnSpc>
-              <a:buNone/>
-            </a:pPr>
-            <a:r>
-              <a:rPr lang="en-US" sz="1500" b="1" dirty="0">
-                <a:solidFill>
-                  <a:srgbClr val="1A1A1A"/>
-                </a:solidFill>
-                <a:latin typeface="Tw Cen MT" pitchFamily="34" charset="0"/>
-                <a:ea typeface="Tw Cen MT" pitchFamily="34" charset="-122"/>
-                <a:cs typeface="Tw Cen MT" pitchFamily="34" charset="-120"/>
-              </a:rPr>
-              <a:t>In your own words:</a:t>
-            </a:r>
-            <a:pPr algn="l" indent="0" marL="0">
-              <a:lnSpc>
-                <a:spcPct val="100000"/>
-              </a:lnSpc>
-              <a:buNone/>
-            </a:pPr>
-            <a:r>
-              <a:rPr lang="en-US" sz="1500" dirty="0">
-                <a:solidFill>
-                  <a:srgbClr val="595959"/>
-                </a:solidFill>
-                <a:latin typeface="Tw Cen MT" pitchFamily="34" charset="0"/>
-                <a:ea typeface="Tw Cen MT" pitchFamily="34" charset="-122"/>
-                <a:cs typeface="Tw Cen MT" pitchFamily="34" charset="-120"/>
-              </a:rPr>
-              <a:t>  what does it mean that the base core is 'single-cycle'?</a:t>
-            </a:r>
-            <a:endParaRPr lang="en-US" sz="1500" dirty="0"/>
-          </a:p>
-        </p:txBody>
-      </p:sp>
-      <p:sp>
-        <p:nvSpPr>
-          <p:cNvPr id="8" name="Shape 6"/>
-          <p:cNvSpPr/>
-          <p:nvPr/>
-        </p:nvSpPr>
-        <p:spPr>
-          <a:xfrm>
-            <a:off x="566928" y="2523744"/>
-            <a:ext cx="457200" cy="457200"/>
-          </a:xfrm>
-          <a:prstGeom prst="ellipse">
-            <a:avLst/>
-          </a:prstGeom>
-          <a:solidFill>
-            <a:srgbClr val="9E1B32"/>
-          </a:solidFill>
-          <a:ln/>
-        </p:spPr>
-      </p:sp>
-      <p:sp>
-        <p:nvSpPr>
-          <p:cNvPr id="9" name="Text 7"/>
-          <p:cNvSpPr/>
-          <p:nvPr/>
-        </p:nvSpPr>
-        <p:spPr>
-          <a:xfrm>
-            <a:off x="566928" y="2523744"/>
-            <a:ext cx="457200" cy="457200"/>
-          </a:xfrm>
-          <a:prstGeom prst="rect">
-            <a:avLst/>
-          </a:prstGeom>
-          <a:noFill/>
-          <a:ln/>
-        </p:spPr>
-        <p:txBody>
-          <a:bodyPr wrap="square" rtlCol="0" anchor="ctr"/>
-          <a:lstStyle/>
-          <a:p>
-            <a:pPr algn="ctr" indent="0" marL="0">
-              <a:buNone/>
-            </a:pPr>
-            <a:r>
-              <a:rPr lang="en-US" sz="2000" b="1" dirty="0">
-                <a:solidFill>
-                  <a:srgbClr val="FFFFFF"/>
-                </a:solidFill>
-                <a:latin typeface="Tw Cen MT Condensed Extra Bold" pitchFamily="34" charset="0"/>
-                <a:ea typeface="Tw Cen MT Condensed Extra Bold" pitchFamily="34" charset="-122"/>
-                <a:cs typeface="Tw Cen MT Condensed Extra Bold" pitchFamily="34" charset="-120"/>
-              </a:rPr>
-              <a:t>2</a:t>
-            </a:r>
-            <a:endParaRPr lang="en-US" sz="2000" dirty="0"/>
-          </a:p>
-        </p:txBody>
-      </p:sp>
-      <p:sp>
-        <p:nvSpPr>
-          <p:cNvPr id="10" name="Text 8"/>
-          <p:cNvSpPr/>
-          <p:nvPr/>
-        </p:nvSpPr>
-        <p:spPr>
-          <a:xfrm>
-            <a:off x="1225296" y="2487168"/>
-            <a:ext cx="10222992" cy="502920"/>
-          </a:xfrm>
-          <a:prstGeom prst="rect">
-            <a:avLst/>
-          </a:prstGeom>
-          <a:noFill/>
-          <a:ln/>
-        </p:spPr>
-        <p:txBody>
-          <a:bodyPr wrap="square" lIns="0" tIns="0" rIns="0" bIns="0" rtlCol="0" anchor="t"/>
-          <a:lstStyle/>
-          <a:p>
-            <a:pPr algn="l" indent="0" marL="0">
-              <a:lnSpc>
-                <a:spcPct val="100000"/>
-              </a:lnSpc>
-              <a:buNone/>
-            </a:pPr>
-            <a:r>
-              <a:rPr lang="en-US" sz="1500" b="1" dirty="0">
-                <a:solidFill>
-                  <a:srgbClr val="1A1A1A"/>
-                </a:solidFill>
-                <a:latin typeface="Tw Cen MT" pitchFamily="34" charset="0"/>
-                <a:ea typeface="Tw Cen MT" pitchFamily="34" charset="-122"/>
-                <a:cs typeface="Tw Cen MT" pitchFamily="34" charset="-120"/>
-              </a:rPr>
-              <a:t>Draw the datapath.</a:t>
-            </a:r>
-            <a:pPr algn="l" indent="0" marL="0">
-              <a:lnSpc>
-                <a:spcPct val="100000"/>
-              </a:lnSpc>
-              <a:buNone/>
-            </a:pPr>
-            <a:r>
-              <a:rPr lang="en-US" sz="1500" dirty="0">
-                <a:solidFill>
-                  <a:srgbClr val="595959"/>
-                </a:solidFill>
-                <a:latin typeface="Tw Cen MT" pitchFamily="34" charset="0"/>
-                <a:ea typeface="Tw Cen MT" pitchFamily="34" charset="-122"/>
-                <a:cs typeface="Tw Cen MT" pitchFamily="34" charset="-120"/>
-              </a:rPr>
-              <a:t>  From memory, sketch the five blocks and the signals connecting them.</a:t>
-            </a:r>
-            <a:endParaRPr lang="en-US" sz="1500" dirty="0"/>
-          </a:p>
-        </p:txBody>
-      </p:sp>
-      <p:sp>
-        <p:nvSpPr>
-          <p:cNvPr id="11" name="Shape 9"/>
-          <p:cNvSpPr/>
-          <p:nvPr/>
-        </p:nvSpPr>
-        <p:spPr>
-          <a:xfrm>
-            <a:off x="566928" y="3154680"/>
-            <a:ext cx="457200" cy="457200"/>
-          </a:xfrm>
-          <a:prstGeom prst="ellipse">
-            <a:avLst/>
-          </a:prstGeom>
-          <a:solidFill>
-            <a:srgbClr val="9E1B32"/>
-          </a:solidFill>
-          <a:ln/>
-        </p:spPr>
-      </p:sp>
-      <p:sp>
-        <p:nvSpPr>
-          <p:cNvPr id="12" name="Text 10"/>
-          <p:cNvSpPr/>
-          <p:nvPr/>
-        </p:nvSpPr>
-        <p:spPr>
-          <a:xfrm>
-            <a:off x="566928" y="3154680"/>
-            <a:ext cx="457200" cy="457200"/>
-          </a:xfrm>
-          <a:prstGeom prst="rect">
-            <a:avLst/>
-          </a:prstGeom>
-          <a:noFill/>
-          <a:ln/>
-        </p:spPr>
-        <p:txBody>
-          <a:bodyPr wrap="square" rtlCol="0" anchor="ctr"/>
-          <a:lstStyle/>
-          <a:p>
-            <a:pPr algn="ctr" indent="0" marL="0">
-              <a:buNone/>
-            </a:pPr>
-            <a:r>
-              <a:rPr lang="en-US" sz="2000" b="1" dirty="0">
-                <a:solidFill>
-                  <a:srgbClr val="FFFFFF"/>
-                </a:solidFill>
-                <a:latin typeface="Tw Cen MT Condensed Extra Bold" pitchFamily="34" charset="0"/>
-                <a:ea typeface="Tw Cen MT Condensed Extra Bold" pitchFamily="34" charset="-122"/>
-                <a:cs typeface="Tw Cen MT Condensed Extra Bold" pitchFamily="34" charset="-120"/>
-              </a:rPr>
-              <a:t>3</a:t>
-            </a:r>
-            <a:endParaRPr lang="en-US" sz="2000" dirty="0"/>
-          </a:p>
-        </p:txBody>
-      </p:sp>
-      <p:sp>
-        <p:nvSpPr>
-          <p:cNvPr id="13" name="Text 11"/>
-          <p:cNvSpPr/>
-          <p:nvPr/>
-        </p:nvSpPr>
-        <p:spPr>
-          <a:xfrm>
-            <a:off x="1225296" y="3118104"/>
-            <a:ext cx="10222992" cy="502920"/>
-          </a:xfrm>
-          <a:prstGeom prst="rect">
-            <a:avLst/>
-          </a:prstGeom>
-          <a:noFill/>
-          <a:ln/>
-        </p:spPr>
-        <p:txBody>
-          <a:bodyPr wrap="square" lIns="0" tIns="0" rIns="0" bIns="0" rtlCol="0" anchor="t"/>
-          <a:lstStyle/>
-          <a:p>
-            <a:pPr algn="l" indent="0" marL="0">
-              <a:lnSpc>
-                <a:spcPct val="100000"/>
-              </a:lnSpc>
-              <a:buNone/>
-            </a:pPr>
-            <a:r>
-              <a:rPr lang="en-US" sz="1500" b="1" dirty="0">
-                <a:solidFill>
-                  <a:srgbClr val="1A1A1A"/>
-                </a:solidFill>
-                <a:latin typeface="Tw Cen MT" pitchFamily="34" charset="0"/>
-                <a:ea typeface="Tw Cen MT" pitchFamily="34" charset="-122"/>
-                <a:cs typeface="Tw Cen MT" pitchFamily="34" charset="-120"/>
-              </a:rPr>
-              <a:t>Toolchain check:</a:t>
-            </a:r>
-            <a:pPr algn="l" indent="0" marL="0">
-              <a:lnSpc>
-                <a:spcPct val="100000"/>
-              </a:lnSpc>
-              <a:buNone/>
-            </a:pPr>
-            <a:r>
-              <a:rPr lang="en-US" sz="1500" dirty="0">
-                <a:solidFill>
-                  <a:srgbClr val="595959"/>
-                </a:solidFill>
-                <a:latin typeface="Tw Cen MT" pitchFamily="34" charset="0"/>
-                <a:ea typeface="Tw Cen MT" pitchFamily="34" charset="-122"/>
-                <a:cs typeface="Tw Cen MT" pitchFamily="34" charset="-120"/>
-              </a:rPr>
-              <a:t>  list every step from Verilog source to a running board — in order.</a:t>
-            </a:r>
-            <a:endParaRPr lang="en-US" sz="1500" dirty="0"/>
-          </a:p>
-        </p:txBody>
-      </p:sp>
-      <p:sp>
-        <p:nvSpPr>
-          <p:cNvPr id="14" name="Shape 12"/>
-          <p:cNvSpPr/>
-          <p:nvPr/>
-        </p:nvSpPr>
-        <p:spPr>
-          <a:xfrm>
-            <a:off x="566928" y="3785616"/>
-            <a:ext cx="457200" cy="457200"/>
-          </a:xfrm>
-          <a:prstGeom prst="ellipse">
-            <a:avLst/>
-          </a:prstGeom>
-          <a:solidFill>
-            <a:srgbClr val="9E1B32"/>
-          </a:solidFill>
-          <a:ln/>
-        </p:spPr>
-      </p:sp>
-      <p:sp>
-        <p:nvSpPr>
-          <p:cNvPr id="15" name="Text 13"/>
-          <p:cNvSpPr/>
-          <p:nvPr/>
-        </p:nvSpPr>
-        <p:spPr>
-          <a:xfrm>
-            <a:off x="566928" y="3785616"/>
-            <a:ext cx="457200" cy="457200"/>
-          </a:xfrm>
-          <a:prstGeom prst="rect">
-            <a:avLst/>
-          </a:prstGeom>
-          <a:noFill/>
-          <a:ln/>
-        </p:spPr>
-        <p:txBody>
-          <a:bodyPr wrap="square" rtlCol="0" anchor="ctr"/>
-          <a:lstStyle/>
-          <a:p>
-            <a:pPr algn="ctr" indent="0" marL="0">
-              <a:buNone/>
-            </a:pPr>
-            <a:r>
-              <a:rPr lang="en-US" sz="2000" b="1" dirty="0">
-                <a:solidFill>
-                  <a:srgbClr val="FFFFFF"/>
-                </a:solidFill>
-                <a:latin typeface="Tw Cen MT Condensed Extra Bold" pitchFamily="34" charset="0"/>
-                <a:ea typeface="Tw Cen MT Condensed Extra Bold" pitchFamily="34" charset="-122"/>
-                <a:cs typeface="Tw Cen MT Condensed Extra Bold" pitchFamily="34" charset="-120"/>
-              </a:rPr>
-              <a:t>4</a:t>
-            </a:r>
-            <a:endParaRPr lang="en-US" sz="2000" dirty="0"/>
-          </a:p>
-        </p:txBody>
-      </p:sp>
-      <p:sp>
-        <p:nvSpPr>
-          <p:cNvPr id="16" name="Text 14"/>
-          <p:cNvSpPr/>
-          <p:nvPr/>
-        </p:nvSpPr>
-        <p:spPr>
-          <a:xfrm>
-            <a:off x="1225296" y="3749040"/>
-            <a:ext cx="10222992" cy="502920"/>
-          </a:xfrm>
-          <a:prstGeom prst="rect">
-            <a:avLst/>
-          </a:prstGeom>
-          <a:noFill/>
-          <a:ln/>
-        </p:spPr>
-        <p:txBody>
-          <a:bodyPr wrap="square" lIns="0" tIns="0" rIns="0" bIns="0" rtlCol="0" anchor="t"/>
-          <a:lstStyle/>
-          <a:p>
-            <a:pPr algn="l" indent="0" marL="0">
-              <a:lnSpc>
-                <a:spcPct val="100000"/>
-              </a:lnSpc>
-              <a:buNone/>
-            </a:pPr>
-            <a:r>
-              <a:rPr lang="en-US" sz="1500" b="1" dirty="0">
-                <a:solidFill>
-                  <a:srgbClr val="1A1A1A"/>
-                </a:solidFill>
-                <a:latin typeface="Tw Cen MT" pitchFamily="34" charset="0"/>
-                <a:ea typeface="Tw Cen MT" pitchFamily="34" charset="-122"/>
-                <a:cs typeface="Tw Cen MT" pitchFamily="34" charset="-120"/>
-              </a:rPr>
-              <a:t>One question:</a:t>
-            </a:r>
-            <a:pPr algn="l" indent="0" marL="0">
-              <a:lnSpc>
-                <a:spcPct val="100000"/>
-              </a:lnSpc>
-              <a:buNone/>
-            </a:pPr>
-            <a:r>
-              <a:rPr lang="en-US" sz="1500" dirty="0">
-                <a:solidFill>
-                  <a:srgbClr val="595959"/>
-                </a:solidFill>
-                <a:latin typeface="Tw Cen MT" pitchFamily="34" charset="0"/>
-                <a:ea typeface="Tw Cen MT" pitchFamily="34" charset="-122"/>
-                <a:cs typeface="Tw Cen MT" pitchFamily="34" charset="-120"/>
-              </a:rPr>
-              <a:t>  what part of the RTL made the least sense? Bring it to office hours.</a:t>
-            </a:r>
-            <a:endParaRPr lang="en-US" sz="1500" dirty="0"/>
-          </a:p>
-        </p:txBody>
-      </p:sp>
-      <p:sp>
-        <p:nvSpPr>
-          <p:cNvPr id="17" name="Text 15"/>
-          <p:cNvSpPr/>
-          <p:nvPr/>
-        </p:nvSpPr>
-        <p:spPr>
-          <a:xfrm>
-            <a:off x="566928" y="5989320"/>
-            <a:ext cx="11057839" cy="457200"/>
-          </a:xfrm>
-          <a:prstGeom prst="rect">
-            <a:avLst/>
-          </a:prstGeom>
-          <a:noFill/>
-          <a:ln/>
-        </p:spPr>
-        <p:txBody>
-          <a:bodyPr wrap="square" lIns="0" tIns="0" rIns="0" bIns="0" rtlCol="0" anchor="ctr"/>
-          <a:lstStyle/>
-          <a:p>
-            <a:pPr algn="l" indent="0" marL="0">
-              <a:buNone/>
-            </a:pPr>
-            <a:r>
-              <a:rPr lang="en-US" sz="1500" i="1" dirty="0">
-                <a:solidFill>
-                  <a:srgbClr val="9E1B32"/>
-                </a:solidFill>
-                <a:latin typeface="Tw Cen MT" pitchFamily="34" charset="0"/>
-                <a:ea typeface="Tw Cen MT" pitchFamily="34" charset="-122"/>
-                <a:cs typeface="Tw Cen MT" pitchFamily="34" charset="-120"/>
-              </a:rPr>
-              <a:t>Next week  →  Measure it: cycles, Fmax, and utilization — the baseline you'll beat all semester.</a:t>
-            </a:r>
-            <a:endParaRPr lang="en-US" sz="1500" dirty="0"/>
-          </a:p>
-        </p:txBody>
-      </p:sp>
-      <p:sp>
-        <p:nvSpPr>
-          <p:cNvPr id="18" name="Shape 16"/>
-          <p:cNvSpPr/>
-          <p:nvPr/>
-        </p:nvSpPr>
-        <p:spPr>
-          <a:xfrm>
-            <a:off x="0" y="6382512"/>
-            <a:ext cx="475488" cy="475488"/>
-          </a:xfrm>
-          <a:prstGeom prst="rect">
-            <a:avLst/>
-          </a:prstGeom>
-          <a:solidFill>
-            <a:srgbClr val="9E1B32"/>
-          </a:solidFill>
-          <a:ln/>
-        </p:spPr>
-      </p:sp>
-      <p:sp>
-        <p:nvSpPr>
-          <p:cNvPr id="19" name="Text 17"/>
-          <p:cNvSpPr/>
-          <p:nvPr/>
-        </p:nvSpPr>
-        <p:spPr>
-          <a:xfrm>
-            <a:off x="0" y="6382512"/>
-            <a:ext cx="475488" cy="475488"/>
-          </a:xfrm>
-          <a:prstGeom prst="rect">
-            <a:avLst/>
-          </a:prstGeom>
-          <a:noFill/>
-          <a:ln/>
-        </p:spPr>
-        <p:txBody>
-          <a:bodyPr wrap="square" rtlCol="0" anchor="ctr"/>
-          <a:lstStyle/>
-          <a:p>
-            <a:pPr algn="ctr" indent="0" marL="0">
-              <a:buNone/>
-            </a:pPr>
-            <a:r>
-              <a:rPr lang="en-US" sz="2200" b="1" dirty="0">
-                <a:solidFill>
-                  <a:srgbClr val="FFFFFF"/>
-                </a:solidFill>
-                <a:latin typeface="Tw Cen MT Condensed Extra Bold" pitchFamily="34" charset="0"/>
-                <a:ea typeface="Tw Cen MT Condensed Extra Bold" pitchFamily="34" charset="-122"/>
-                <a:cs typeface="Tw Cen MT Condensed Extra Bold" pitchFamily="34" charset="-120"/>
-              </a:rPr>
               <a:t>D</a:t>
             </a:r>
             <a:endParaRPr lang="en-US" sz="2200" dirty="0"/>
@@ -3496,7 +2756,7 @@
           <a:bodyPr wrap="square" rtlCol="0" anchor="ctr"/>
           <a:lstStyle/>
           <a:p>
-            <a:pPr algn="r" indent="0" marL="0">
+            <a:pPr marL="0" indent="0" algn="r">
               <a:buNone/>
             </a:pPr>
             <a:r>
@@ -3530,6 +2790,7 @@
         <a:solidFill>
           <a:srgbClr val="FFFFFF"/>
         </a:solidFill>
+        <a:effectLst/>
       </p:bgPr>
     </p:bg>
     <p:spTree>
@@ -3569,7 +2830,7 @@
           </a:bodyPr>
           <a:lstStyle/>
           <a:p>
-            <a:pPr algn="l" indent="0" marL="0">
+            <a:pPr marL="0" indent="0" algn="l">
               <a:buNone/>
             </a:pPr>
             <a:r>
@@ -3583,9 +2844,6 @@
               </a:rPr>
               <a:t>This Week</a:t>
             </a:r>
-            <a:pPr algn="l" indent="0" marL="0">
-              <a:buNone/>
-            </a:pPr>
             <a:r>
               <a:rPr lang="en-US" sz="3300" b="1" dirty="0">
                 <a:solidFill>
@@ -3597,9 +2855,6 @@
               </a:rPr>
               <a:t>   |   </a:t>
             </a:r>
-            <a:pPr algn="l" indent="0" marL="0">
-              <a:buNone/>
-            </a:pPr>
             <a:r>
               <a:rPr lang="en-US" sz="3300" b="1" dirty="0">
                 <a:solidFill>
@@ -3634,6 +2889,13 @@
           </a:solidFill>
           <a:ln/>
         </p:spPr>
+        <p:txBody>
+          <a:bodyPr/>
+          <a:lstStyle/>
+          <a:p>
+            <a:endParaRPr lang="en-US"/>
+          </a:p>
+        </p:txBody>
       </p:sp>
       <p:sp>
         <p:nvSpPr>
@@ -3656,7 +2918,7 @@
           <a:bodyPr wrap="square" lIns="0" tIns="0" rIns="0" bIns="0" rtlCol="0" anchor="t"/>
           <a:lstStyle/>
           <a:p>
-            <a:pPr algn="l" indent="0" marL="0">
+            <a:pPr marL="0" indent="0" algn="l">
               <a:buNone/>
             </a:pPr>
             <a:r>
@@ -3693,13 +2955,20 @@
           </a:solidFill>
           <a:ln/>
           <a:effectLst>
-            <a:outerShdw sx="100000" sy="100000" kx="0" ky="0" algn="bl" rotWithShape="0" blurRad="63500" dist="25400" dir="5400000">
+            <a:outerShdw blurRad="63500" dist="25400" dir="5400000" algn="bl" rotWithShape="0">
               <a:srgbClr val="BFBFBF">
                 <a:alpha val="35000"/>
               </a:srgbClr>
             </a:outerShdw>
           </a:effectLst>
         </p:spPr>
+        <p:txBody>
+          <a:bodyPr/>
+          <a:lstStyle/>
+          <a:p>
+            <a:endParaRPr lang="en-US"/>
+          </a:p>
+        </p:txBody>
       </p:sp>
       <p:sp>
         <p:nvSpPr>
@@ -3720,6 +2989,13 @@
           </a:solidFill>
           <a:ln/>
         </p:spPr>
+        <p:txBody>
+          <a:bodyPr/>
+          <a:lstStyle/>
+          <a:p>
+            <a:endParaRPr lang="en-US"/>
+          </a:p>
+        </p:txBody>
       </p:sp>
       <p:sp>
         <p:nvSpPr>
@@ -3742,7 +3018,7 @@
           <a:bodyPr wrap="square" lIns="0" tIns="0" rIns="0" bIns="0" rtlCol="0" anchor="t"/>
           <a:lstStyle/>
           <a:p>
-            <a:pPr algn="l" indent="0" marL="0">
+            <a:pPr marL="0" indent="0" algn="l">
               <a:buNone/>
             </a:pPr>
             <a:r>
@@ -3781,7 +3057,7 @@
           <a:bodyPr wrap="square" lIns="0" tIns="0" rIns="0" bIns="0" rtlCol="0" anchor="t"/>
           <a:lstStyle/>
           <a:p>
-            <a:pPr algn="l" indent="0" marL="0">
+            <a:pPr marL="0" indent="0" algn="l">
               <a:lnSpc>
                 <a:spcPct val="102000"/>
               </a:lnSpc>
@@ -3801,7 +3077,7 @@
             <a:endParaRPr lang="en-US" sz="1450" dirty="0"/>
           </a:p>
           <a:p>
-            <a:pPr algn="l" indent="0" marL="0">
+            <a:pPr marL="0" indent="0" algn="l">
               <a:lnSpc>
                 <a:spcPct val="102000"/>
               </a:lnSpc>
@@ -3810,7 +3086,7 @@
             <a:endParaRPr lang="en-US" sz="1450" dirty="0"/>
           </a:p>
           <a:p>
-            <a:pPr algn="l" indent="0" marL="0">
+            <a:pPr marL="0" indent="0" algn="l">
               <a:lnSpc>
                 <a:spcPct val="102000"/>
               </a:lnSpc>
@@ -3850,13 +3126,20 @@
           </a:solidFill>
           <a:ln/>
           <a:effectLst>
-            <a:outerShdw sx="100000" sy="100000" kx="0" ky="0" algn="bl" rotWithShape="0" blurRad="63500" dist="25400" dir="5400000">
+            <a:outerShdw blurRad="63500" dist="25400" dir="5400000" algn="bl" rotWithShape="0">
               <a:srgbClr val="BFBFBF">
                 <a:alpha val="35000"/>
               </a:srgbClr>
             </a:outerShdw>
           </a:effectLst>
         </p:spPr>
+        <p:txBody>
+          <a:bodyPr/>
+          <a:lstStyle/>
+          <a:p>
+            <a:endParaRPr lang="en-US"/>
+          </a:p>
+        </p:txBody>
       </p:sp>
       <p:sp>
         <p:nvSpPr>
@@ -3877,6 +3160,13 @@
           </a:solidFill>
           <a:ln/>
         </p:spPr>
+        <p:txBody>
+          <a:bodyPr/>
+          <a:lstStyle/>
+          <a:p>
+            <a:endParaRPr lang="en-US"/>
+          </a:p>
+        </p:txBody>
       </p:sp>
       <p:sp>
         <p:nvSpPr>
@@ -3899,7 +3189,7 @@
           <a:bodyPr wrap="square" lIns="0" tIns="0" rIns="0" bIns="0" rtlCol="0" anchor="t"/>
           <a:lstStyle/>
           <a:p>
-            <a:pPr algn="l" indent="0" marL="0">
+            <a:pPr marL="0" indent="0" algn="l">
               <a:buNone/>
             </a:pPr>
             <a:r>
@@ -3911,7 +3201,7 @@
                 <a:ea typeface="Tw Cen MT Condensed Extra Bold" pitchFamily="34" charset="-122"/>
                 <a:cs typeface="Tw Cen MT Condensed Extra Bold" pitchFamily="34" charset="-120"/>
               </a:rPr>
-              <a:t>Lab · M0</a:t>
+              <a:t>Lab</a:t>
             </a:r>
             <a:endParaRPr lang="en-US" sz="1900" dirty="0"/>
           </a:p>
@@ -3938,7 +3228,7 @@
           <a:bodyPr wrap="square" lIns="0" tIns="0" rIns="0" bIns="0" rtlCol="0" anchor="t"/>
           <a:lstStyle/>
           <a:p>
-            <a:pPr algn="l" indent="0" marL="0">
+            <a:pPr marL="0" indent="0" algn="l">
               <a:lnSpc>
                 <a:spcPct val="102000"/>
               </a:lnSpc>
@@ -3978,13 +3268,20 @@
           </a:solidFill>
           <a:ln/>
           <a:effectLst>
-            <a:outerShdw sx="100000" sy="100000" kx="0" ky="0" algn="bl" rotWithShape="0" blurRad="63500" dist="25400" dir="5400000">
+            <a:outerShdw blurRad="63500" dist="25400" dir="5400000" algn="bl" rotWithShape="0">
               <a:srgbClr val="BFBFBF">
                 <a:alpha val="35000"/>
               </a:srgbClr>
             </a:outerShdw>
           </a:effectLst>
         </p:spPr>
+        <p:txBody>
+          <a:bodyPr/>
+          <a:lstStyle/>
+          <a:p>
+            <a:endParaRPr lang="en-US"/>
+          </a:p>
+        </p:txBody>
       </p:sp>
       <p:sp>
         <p:nvSpPr>
@@ -4005,6 +3302,13 @@
           </a:solidFill>
           <a:ln/>
         </p:spPr>
+        <p:txBody>
+          <a:bodyPr/>
+          <a:lstStyle/>
+          <a:p>
+            <a:endParaRPr lang="en-US"/>
+          </a:p>
+        </p:txBody>
       </p:sp>
       <p:sp>
         <p:nvSpPr>
@@ -4027,7 +3331,7 @@
           <a:bodyPr wrap="square" lIns="0" tIns="0" rIns="0" bIns="0" rtlCol="0" anchor="t"/>
           <a:lstStyle/>
           <a:p>
-            <a:pPr algn="l" indent="0" marL="0">
+            <a:pPr marL="0" indent="0" algn="l">
               <a:buNone/>
             </a:pPr>
             <a:r>
@@ -4066,7 +3370,7 @@
           <a:bodyPr wrap="square" lIns="0" tIns="0" rIns="0" bIns="0" rtlCol="0" anchor="t"/>
           <a:lstStyle/>
           <a:p>
-            <a:pPr algn="l" indent="0" marL="0">
+            <a:pPr marL="0" indent="0" algn="l">
               <a:lnSpc>
                 <a:spcPct val="102000"/>
               </a:lnSpc>
@@ -4081,7 +3385,7 @@
                 <a:ea typeface="Tw Cen MT" pitchFamily="34" charset="-122"/>
                 <a:cs typeface="Tw Cen MT" pitchFamily="34" charset="-120"/>
               </a:rPr>
-              <a:t>A running demo bitstream on your board + a one-page RTL map in your design notebook. Reading response #1 posted on Canvas.</a:t>
+              <a:t>A running demo bitstream on your board + a one-page RTL map in your design notebook. </a:t>
             </a:r>
             <a:endParaRPr lang="en-US" sz="1450" dirty="0"/>
           </a:p>
@@ -4108,7 +3412,7 @@
           <a:bodyPr wrap="square" lIns="0" tIns="0" rIns="0" bIns="0" rtlCol="0" anchor="ctr"/>
           <a:lstStyle/>
           <a:p>
-            <a:pPr algn="l" indent="0" marL="0">
+            <a:pPr marL="0" indent="0" algn="l">
               <a:buNone/>
             </a:pPr>
             <a:r>
@@ -4145,6 +3449,13 @@
           </a:solidFill>
           <a:ln/>
         </p:spPr>
+        <p:txBody>
+          <a:bodyPr/>
+          <a:lstStyle/>
+          <a:p>
+            <a:endParaRPr lang="en-US"/>
+          </a:p>
+        </p:txBody>
       </p:sp>
       <p:sp>
         <p:nvSpPr>
@@ -4167,7 +3478,7 @@
           <a:bodyPr wrap="square" rtlCol="0" anchor="ctr"/>
           <a:lstStyle/>
           <a:p>
-            <a:pPr algn="ctr" indent="0" marL="0">
+            <a:pPr marL="0" indent="0" algn="ctr">
               <a:buNone/>
             </a:pPr>
             <a:r>
@@ -4206,7 +3517,7 @@
           <a:bodyPr wrap="square" rtlCol="0" anchor="ctr"/>
           <a:lstStyle/>
           <a:p>
-            <a:pPr algn="r" indent="0" marL="0">
+            <a:pPr marL="0" indent="0" algn="r">
               <a:buNone/>
             </a:pPr>
             <a:r>
@@ -4240,6 +3551,7 @@
         <a:solidFill>
           <a:srgbClr val="FFFFFF"/>
         </a:solidFill>
+        <a:effectLst/>
       </p:bgPr>
     </p:bg>
     <p:spTree>
@@ -4279,7 +3591,7 @@
           </a:bodyPr>
           <a:lstStyle/>
           <a:p>
-            <a:pPr algn="l" indent="0" marL="0">
+            <a:pPr marL="0" indent="0" algn="l">
               <a:buNone/>
             </a:pPr>
             <a:r>
@@ -4293,9 +3605,6 @@
               </a:rPr>
               <a:t>Levels of Abstraction</a:t>
             </a:r>
-            <a:pPr algn="l" indent="0" marL="0">
-              <a:buNone/>
-            </a:pPr>
             <a:r>
               <a:rPr lang="en-US" sz="3300" b="1" dirty="0">
                 <a:solidFill>
@@ -4307,9 +3616,6 @@
               </a:rPr>
               <a:t>   |   </a:t>
             </a:r>
-            <a:pPr algn="l" indent="0" marL="0">
-              <a:buNone/>
-            </a:pPr>
             <a:r>
               <a:rPr lang="en-US" sz="3300" b="1" dirty="0">
                 <a:solidFill>
@@ -4344,6 +3650,13 @@
           </a:solidFill>
           <a:ln/>
         </p:spPr>
+        <p:txBody>
+          <a:bodyPr/>
+          <a:lstStyle/>
+          <a:p>
+            <a:endParaRPr lang="en-US"/>
+          </a:p>
+        </p:txBody>
       </p:sp>
       <p:sp>
         <p:nvSpPr>
@@ -4366,7 +3679,7 @@
           <a:bodyPr wrap="square" lIns="0" tIns="0" rIns="0" bIns="0" rtlCol="0" anchor="t"/>
           <a:lstStyle/>
           <a:p>
-            <a:pPr algn="l" indent="0" marL="0">
+            <a:pPr marL="0" indent="0" algn="l">
               <a:buNone/>
             </a:pPr>
             <a:r>
@@ -4403,6 +3716,13 @@
           </a:solidFill>
           <a:ln/>
         </p:spPr>
+        <p:txBody>
+          <a:bodyPr/>
+          <a:lstStyle/>
+          <a:p>
+            <a:endParaRPr lang="en-US"/>
+          </a:p>
+        </p:txBody>
       </p:sp>
       <p:sp>
         <p:nvSpPr>
@@ -4423,6 +3743,13 @@
           </a:solidFill>
           <a:ln/>
         </p:spPr>
+        <p:txBody>
+          <a:bodyPr/>
+          <a:lstStyle/>
+          <a:p>
+            <a:endParaRPr lang="en-US"/>
+          </a:p>
+        </p:txBody>
       </p:sp>
       <p:sp>
         <p:nvSpPr>
@@ -4443,6 +3770,13 @@
           </a:solidFill>
           <a:ln/>
         </p:spPr>
+        <p:txBody>
+          <a:bodyPr/>
+          <a:lstStyle/>
+          <a:p>
+            <a:endParaRPr lang="en-US"/>
+          </a:p>
+        </p:txBody>
       </p:sp>
       <p:sp>
         <p:nvSpPr>
@@ -4465,7 +3799,7 @@
           <a:bodyPr wrap="square" rtlCol="0" anchor="ctr"/>
           <a:lstStyle/>
           <a:p>
-            <a:pPr algn="ctr" indent="0" marL="0">
+            <a:pPr marL="0" indent="0" algn="ctr">
               <a:buNone/>
             </a:pPr>
             <a:r>
@@ -4504,7 +3838,7 @@
           <a:bodyPr wrap="square" lIns="0" tIns="0" rIns="0" bIns="0" rtlCol="0" anchor="t"/>
           <a:lstStyle/>
           <a:p>
-            <a:pPr algn="ctr" indent="0" marL="0">
+            <a:pPr marL="0" indent="0" algn="ctr">
               <a:buNone/>
             </a:pPr>
             <a:r>
@@ -4543,7 +3877,7 @@
           <a:bodyPr wrap="square" lIns="0" tIns="0" rIns="0" bIns="0" rtlCol="0" anchor="t"/>
           <a:lstStyle/>
           <a:p>
-            <a:pPr algn="ctr" indent="0" marL="0">
+            <a:pPr marL="0" indent="0" algn="ctr">
               <a:lnSpc>
                 <a:spcPct val="100000"/>
               </a:lnSpc>
@@ -4583,6 +3917,13 @@
           </a:solidFill>
           <a:ln/>
         </p:spPr>
+        <p:txBody>
+          <a:bodyPr/>
+          <a:lstStyle/>
+          <a:p>
+            <a:endParaRPr lang="en-US"/>
+          </a:p>
+        </p:txBody>
       </p:sp>
       <p:sp>
         <p:nvSpPr>
@@ -4603,6 +3944,13 @@
           </a:solidFill>
           <a:ln/>
         </p:spPr>
+        <p:txBody>
+          <a:bodyPr/>
+          <a:lstStyle/>
+          <a:p>
+            <a:endParaRPr lang="en-US"/>
+          </a:p>
+        </p:txBody>
       </p:sp>
       <p:sp>
         <p:nvSpPr>
@@ -4623,6 +3971,13 @@
           </a:solidFill>
           <a:ln/>
         </p:spPr>
+        <p:txBody>
+          <a:bodyPr/>
+          <a:lstStyle/>
+          <a:p>
+            <a:endParaRPr lang="en-US"/>
+          </a:p>
+        </p:txBody>
       </p:sp>
       <p:sp>
         <p:nvSpPr>
@@ -4645,7 +4000,7 @@
           <a:bodyPr wrap="square" rtlCol="0" anchor="ctr"/>
           <a:lstStyle/>
           <a:p>
-            <a:pPr algn="ctr" indent="0" marL="0">
+            <a:pPr marL="0" indent="0" algn="ctr">
               <a:buNone/>
             </a:pPr>
             <a:r>
@@ -4684,7 +4039,7 @@
           <a:bodyPr wrap="square" lIns="0" tIns="0" rIns="0" bIns="0" rtlCol="0" anchor="t"/>
           <a:lstStyle/>
           <a:p>
-            <a:pPr algn="ctr" indent="0" marL="0">
+            <a:pPr marL="0" indent="0" algn="ctr">
               <a:buNone/>
             </a:pPr>
             <a:r>
@@ -4723,7 +4078,7 @@
           <a:bodyPr wrap="square" lIns="0" tIns="0" rIns="0" bIns="0" rtlCol="0" anchor="t"/>
           <a:lstStyle/>
           <a:p>
-            <a:pPr algn="ctr" indent="0" marL="0">
+            <a:pPr marL="0" indent="0" algn="ctr">
               <a:lnSpc>
                 <a:spcPct val="100000"/>
               </a:lnSpc>
@@ -4763,6 +4118,13 @@
           </a:solidFill>
           <a:ln/>
         </p:spPr>
+        <p:txBody>
+          <a:bodyPr/>
+          <a:lstStyle/>
+          <a:p>
+            <a:endParaRPr lang="en-US"/>
+          </a:p>
+        </p:txBody>
       </p:sp>
       <p:sp>
         <p:nvSpPr>
@@ -4783,6 +4145,13 @@
           </a:solidFill>
           <a:ln/>
         </p:spPr>
+        <p:txBody>
+          <a:bodyPr/>
+          <a:lstStyle/>
+          <a:p>
+            <a:endParaRPr lang="en-US"/>
+          </a:p>
+        </p:txBody>
       </p:sp>
       <p:sp>
         <p:nvSpPr>
@@ -4803,6 +4172,13 @@
           </a:solidFill>
           <a:ln/>
         </p:spPr>
+        <p:txBody>
+          <a:bodyPr/>
+          <a:lstStyle/>
+          <a:p>
+            <a:endParaRPr lang="en-US"/>
+          </a:p>
+        </p:txBody>
       </p:sp>
       <p:sp>
         <p:nvSpPr>
@@ -4825,7 +4201,7 @@
           <a:bodyPr wrap="square" rtlCol="0" anchor="ctr"/>
           <a:lstStyle/>
           <a:p>
-            <a:pPr algn="ctr" indent="0" marL="0">
+            <a:pPr marL="0" indent="0" algn="ctr">
               <a:buNone/>
             </a:pPr>
             <a:r>
@@ -4864,7 +4240,7 @@
           <a:bodyPr wrap="square" lIns="0" tIns="0" rIns="0" bIns="0" rtlCol="0" anchor="t"/>
           <a:lstStyle/>
           <a:p>
-            <a:pPr algn="ctr" indent="0" marL="0">
+            <a:pPr marL="0" indent="0" algn="ctr">
               <a:buNone/>
             </a:pPr>
             <a:r>
@@ -4903,7 +4279,7 @@
           <a:bodyPr wrap="square" lIns="0" tIns="0" rIns="0" bIns="0" rtlCol="0" anchor="t"/>
           <a:lstStyle/>
           <a:p>
-            <a:pPr algn="ctr" indent="0" marL="0">
+            <a:pPr marL="0" indent="0" algn="ctr">
               <a:lnSpc>
                 <a:spcPct val="100000"/>
               </a:lnSpc>
@@ -4943,6 +4319,13 @@
           </a:solidFill>
           <a:ln/>
         </p:spPr>
+        <p:txBody>
+          <a:bodyPr/>
+          <a:lstStyle/>
+          <a:p>
+            <a:endParaRPr lang="en-US"/>
+          </a:p>
+        </p:txBody>
       </p:sp>
       <p:sp>
         <p:nvSpPr>
@@ -4963,6 +4346,13 @@
           </a:solidFill>
           <a:ln/>
         </p:spPr>
+        <p:txBody>
+          <a:bodyPr/>
+          <a:lstStyle/>
+          <a:p>
+            <a:endParaRPr lang="en-US"/>
+          </a:p>
+        </p:txBody>
       </p:sp>
       <p:sp>
         <p:nvSpPr>
@@ -4983,6 +4373,13 @@
           </a:solidFill>
           <a:ln/>
         </p:spPr>
+        <p:txBody>
+          <a:bodyPr/>
+          <a:lstStyle/>
+          <a:p>
+            <a:endParaRPr lang="en-US"/>
+          </a:p>
+        </p:txBody>
       </p:sp>
       <p:sp>
         <p:nvSpPr>
@@ -5005,7 +4402,7 @@
           <a:bodyPr wrap="square" rtlCol="0" anchor="ctr"/>
           <a:lstStyle/>
           <a:p>
-            <a:pPr algn="ctr" indent="0" marL="0">
+            <a:pPr marL="0" indent="0" algn="ctr">
               <a:buNone/>
             </a:pPr>
             <a:r>
@@ -5044,7 +4441,7 @@
           <a:bodyPr wrap="square" lIns="0" tIns="0" rIns="0" bIns="0" rtlCol="0" anchor="t"/>
           <a:lstStyle/>
           <a:p>
-            <a:pPr algn="ctr" indent="0" marL="0">
+            <a:pPr marL="0" indent="0" algn="ctr">
               <a:buNone/>
             </a:pPr>
             <a:r>
@@ -5083,7 +4480,7 @@
           <a:bodyPr wrap="square" lIns="0" tIns="0" rIns="0" bIns="0" rtlCol="0" anchor="t"/>
           <a:lstStyle/>
           <a:p>
-            <a:pPr algn="ctr" indent="0" marL="0">
+            <a:pPr marL="0" indent="0" algn="ctr">
               <a:lnSpc>
                 <a:spcPct val="100000"/>
               </a:lnSpc>
@@ -5123,6 +4520,13 @@
           </a:solidFill>
           <a:ln/>
         </p:spPr>
+        <p:txBody>
+          <a:bodyPr/>
+          <a:lstStyle/>
+          <a:p>
+            <a:endParaRPr lang="en-US"/>
+          </a:p>
+        </p:txBody>
       </p:sp>
       <p:sp>
         <p:nvSpPr>
@@ -5143,6 +4547,13 @@
           </a:solidFill>
           <a:ln/>
         </p:spPr>
+        <p:txBody>
+          <a:bodyPr/>
+          <a:lstStyle/>
+          <a:p>
+            <a:endParaRPr lang="en-US"/>
+          </a:p>
+        </p:txBody>
       </p:sp>
       <p:sp>
         <p:nvSpPr>
@@ -5163,6 +4574,13 @@
           </a:solidFill>
           <a:ln/>
         </p:spPr>
+        <p:txBody>
+          <a:bodyPr/>
+          <a:lstStyle/>
+          <a:p>
+            <a:endParaRPr lang="en-US"/>
+          </a:p>
+        </p:txBody>
       </p:sp>
       <p:sp>
         <p:nvSpPr>
@@ -5185,7 +4603,7 @@
           <a:bodyPr wrap="square" rtlCol="0" anchor="ctr"/>
           <a:lstStyle/>
           <a:p>
-            <a:pPr algn="ctr" indent="0" marL="0">
+            <a:pPr marL="0" indent="0" algn="ctr">
               <a:buNone/>
             </a:pPr>
             <a:r>
@@ -5224,7 +4642,7 @@
           <a:bodyPr wrap="square" lIns="0" tIns="0" rIns="0" bIns="0" rtlCol="0" anchor="t"/>
           <a:lstStyle/>
           <a:p>
-            <a:pPr algn="ctr" indent="0" marL="0">
+            <a:pPr marL="0" indent="0" algn="ctr">
               <a:buNone/>
             </a:pPr>
             <a:r>
@@ -5263,7 +4681,7 @@
           <a:bodyPr wrap="square" lIns="0" tIns="0" rIns="0" bIns="0" rtlCol="0" anchor="t"/>
           <a:lstStyle/>
           <a:p>
-            <a:pPr algn="ctr" indent="0" marL="0">
+            <a:pPr marL="0" indent="0" algn="ctr">
               <a:lnSpc>
                 <a:spcPct val="100000"/>
               </a:lnSpc>
@@ -5305,7 +4723,7 @@
           <a:bodyPr wrap="square" lIns="0" tIns="0" rIns="0" bIns="0" rtlCol="0" anchor="ctr"/>
           <a:lstStyle/>
           <a:p>
-            <a:pPr algn="l" indent="0" marL="0">
+            <a:pPr marL="0" indent="0" algn="l">
               <a:buNone/>
             </a:pPr>
             <a:r>
@@ -5342,6 +4760,13 @@
           </a:solidFill>
           <a:ln/>
         </p:spPr>
+        <p:txBody>
+          <a:bodyPr/>
+          <a:lstStyle/>
+          <a:p>
+            <a:endParaRPr lang="en-US"/>
+          </a:p>
+        </p:txBody>
       </p:sp>
       <p:sp>
         <p:nvSpPr>
@@ -5364,7 +4789,7 @@
           <a:bodyPr wrap="square" rtlCol="0" anchor="ctr"/>
           <a:lstStyle/>
           <a:p>
-            <a:pPr algn="ctr" indent="0" marL="0">
+            <a:pPr marL="0" indent="0" algn="ctr">
               <a:buNone/>
             </a:pPr>
             <a:r>
@@ -5403,7 +4828,7 @@
           <a:bodyPr wrap="square" rtlCol="0" anchor="ctr"/>
           <a:lstStyle/>
           <a:p>
-            <a:pPr algn="r" indent="0" marL="0">
+            <a:pPr marL="0" indent="0" algn="r">
               <a:buNone/>
             </a:pPr>
             <a:r>
@@ -5437,6 +4862,7 @@
         <a:solidFill>
           <a:srgbClr val="FFFFFF"/>
         </a:solidFill>
+        <a:effectLst/>
       </p:bgPr>
     </p:bg>
     <p:spTree>
@@ -5476,7 +4902,7 @@
           </a:bodyPr>
           <a:lstStyle/>
           <a:p>
-            <a:pPr algn="l" indent="0" marL="0">
+            <a:pPr marL="0" indent="0" algn="l">
               <a:buNone/>
             </a:pPr>
             <a:r>
@@ -5490,9 +4916,6 @@
               </a:rPr>
               <a:t>The Toolchain</a:t>
             </a:r>
-            <a:pPr algn="l" indent="0" marL="0">
-              <a:buNone/>
-            </a:pPr>
             <a:r>
               <a:rPr lang="en-US" sz="3300" b="1" dirty="0">
                 <a:solidFill>
@@ -5504,9 +4927,6 @@
               </a:rPr>
               <a:t>   |   </a:t>
             </a:r>
-            <a:pPr algn="l" indent="0" marL="0">
-              <a:buNone/>
-            </a:pPr>
             <a:r>
               <a:rPr lang="en-US" sz="3300" b="1" dirty="0">
                 <a:solidFill>
@@ -5541,6 +4961,13 @@
           </a:solidFill>
           <a:ln/>
         </p:spPr>
+        <p:txBody>
+          <a:bodyPr/>
+          <a:lstStyle/>
+          <a:p>
+            <a:endParaRPr lang="en-US"/>
+          </a:p>
+        </p:txBody>
       </p:sp>
       <p:sp>
         <p:nvSpPr>
@@ -5563,7 +4990,7 @@
           <a:bodyPr wrap="square" lIns="0" tIns="0" rIns="0" bIns="0" rtlCol="0" anchor="t"/>
           <a:lstStyle/>
           <a:p>
-            <a:pPr algn="l" indent="0" marL="0">
+            <a:pPr marL="0" indent="0" algn="l">
               <a:buNone/>
             </a:pPr>
             <a:r>
@@ -5602,7 +5029,7 @@
           <a:bodyPr wrap="square" lIns="0" tIns="0" rIns="0" bIns="0" rtlCol="0" anchor="ctr"/>
           <a:lstStyle/>
           <a:p>
-            <a:pPr indent="0" marL="0">
+            <a:pPr marL="0" indent="0">
               <a:buNone/>
             </a:pPr>
             <a:r>
@@ -5639,6 +5066,13 @@
           </a:solidFill>
           <a:ln/>
         </p:spPr>
+        <p:txBody>
+          <a:bodyPr/>
+          <a:lstStyle/>
+          <a:p>
+            <a:endParaRPr lang="en-US"/>
+          </a:p>
+        </p:txBody>
       </p:sp>
       <p:sp>
         <p:nvSpPr>
@@ -5661,7 +5095,7 @@
           <a:bodyPr wrap="square" rtlCol="0" anchor="ctr"/>
           <a:lstStyle/>
           <a:p>
-            <a:pPr algn="ctr" indent="0" marL="0">
+            <a:pPr marL="0" indent="0" algn="ctr">
               <a:buNone/>
             </a:pPr>
             <a:r>
@@ -5700,7 +5134,7 @@
           <a:bodyPr wrap="square" lIns="0" tIns="0" rIns="0" bIns="0" rtlCol="0" anchor="t"/>
           <a:lstStyle/>
           <a:p>
-            <a:pPr algn="l" indent="0" marL="0">
+            <a:pPr marL="0" indent="0" algn="l">
               <a:lnSpc>
                 <a:spcPct val="100000"/>
               </a:lnSpc>
@@ -5717,22 +5151,263 @@
               </a:rPr>
               <a:t>Install Vivado.</a:t>
             </a:r>
-            <a:pPr algn="l" indent="0" marL="0">
+            <a:r>
+              <a:rPr lang="en-US" sz="1500" dirty="0">
+                <a:solidFill>
+                  <a:srgbClr val="595959"/>
+                </a:solidFill>
+                <a:latin typeface="Tw Cen MT" pitchFamily="34" charset="0"/>
+                <a:ea typeface="Tw Cen MT" pitchFamily="34" charset="-122"/>
+                <a:cs typeface="Tw Cen MT" pitchFamily="34" charset="-120"/>
+              </a:rPr>
+              <a:t>  Free Standard edition; add the Artix-7 (7-series) device family.</a:t>
+            </a:r>
+            <a:endParaRPr lang="en-US" sz="1500" dirty="0"/>
+          </a:p>
+        </p:txBody>
+      </p:sp>
+      <p:sp>
+        <p:nvSpPr>
+          <p:cNvPr id="9" name="Shape 7"/>
+          <p:cNvSpPr/>
+          <p:nvPr/>
+        </p:nvSpPr>
+        <p:spPr>
+          <a:xfrm>
+            <a:off x="566928" y="3154680"/>
+            <a:ext cx="457200" cy="457200"/>
+          </a:xfrm>
+          <a:prstGeom prst="ellipse">
+            <a:avLst/>
+          </a:prstGeom>
+          <a:solidFill>
+            <a:srgbClr val="9E1B32"/>
+          </a:solidFill>
+          <a:ln/>
+        </p:spPr>
+        <p:txBody>
+          <a:bodyPr/>
+          <a:lstStyle/>
+          <a:p>
+            <a:endParaRPr lang="en-US"/>
+          </a:p>
+        </p:txBody>
+      </p:sp>
+      <p:sp>
+        <p:nvSpPr>
+          <p:cNvPr id="10" name="Text 8"/>
+          <p:cNvSpPr/>
+          <p:nvPr/>
+        </p:nvSpPr>
+        <p:spPr>
+          <a:xfrm>
+            <a:off x="566928" y="3154680"/>
+            <a:ext cx="457200" cy="457200"/>
+          </a:xfrm>
+          <a:prstGeom prst="rect">
+            <a:avLst/>
+          </a:prstGeom>
+          <a:noFill/>
+          <a:ln/>
+        </p:spPr>
+        <p:txBody>
+          <a:bodyPr wrap="square" rtlCol="0" anchor="ctr"/>
+          <a:lstStyle/>
+          <a:p>
+            <a:pPr marL="0" indent="0" algn="ctr">
+              <a:buNone/>
+            </a:pPr>
+            <a:r>
+              <a:rPr lang="en-US" sz="2000" b="1" dirty="0">
+                <a:solidFill>
+                  <a:srgbClr val="FFFFFF"/>
+                </a:solidFill>
+                <a:latin typeface="Tw Cen MT Condensed Extra Bold" pitchFamily="34" charset="0"/>
+                <a:ea typeface="Tw Cen MT Condensed Extra Bold" pitchFamily="34" charset="-122"/>
+                <a:cs typeface="Tw Cen MT Condensed Extra Bold" pitchFamily="34" charset="-120"/>
+              </a:rPr>
+              <a:t>2</a:t>
+            </a:r>
+            <a:endParaRPr lang="en-US" sz="2000" dirty="0"/>
+          </a:p>
+        </p:txBody>
+      </p:sp>
+      <p:sp>
+        <p:nvSpPr>
+          <p:cNvPr id="11" name="Text 9"/>
+          <p:cNvSpPr/>
+          <p:nvPr/>
+        </p:nvSpPr>
+        <p:spPr>
+          <a:xfrm>
+            <a:off x="1225296" y="3118104"/>
+            <a:ext cx="5468112" cy="658368"/>
+          </a:xfrm>
+          <a:prstGeom prst="rect">
+            <a:avLst/>
+          </a:prstGeom>
+          <a:noFill/>
+          <a:ln/>
+        </p:spPr>
+        <p:txBody>
+          <a:bodyPr wrap="square" lIns="0" tIns="0" rIns="0" bIns="0" rtlCol="0" anchor="t"/>
+          <a:lstStyle/>
+          <a:p>
+            <a:r>
+              <a:rPr lang="en-US" sz="1500" b="1" dirty="0">
+                <a:solidFill>
+                  <a:srgbClr val="1A1A1A"/>
+                </a:solidFill>
+                <a:latin typeface="Tw Cen MT" pitchFamily="34" charset="0"/>
+                <a:ea typeface="Tw Cen MT" pitchFamily="34" charset="-122"/>
+                <a:cs typeface="Tw Cen MT" pitchFamily="34" charset="-120"/>
+              </a:rPr>
+              <a:t>Open the base core.</a:t>
+            </a:r>
+            <a:r>
+              <a:rPr lang="en-US" sz="1500" dirty="0">
+                <a:solidFill>
+                  <a:srgbClr val="595959"/>
+                </a:solidFill>
+                <a:latin typeface="Tw Cen MT" pitchFamily="34" charset="0"/>
+                <a:ea typeface="Tw Cen MT" pitchFamily="34" charset="-122"/>
+                <a:cs typeface="Tw Cen MT" pitchFamily="34" charset="-120"/>
+              </a:rPr>
+              <a:t>  Load the provided project; set the Basys 3 </a:t>
+            </a:r>
+            <a:r>
+              <a:rPr lang="en-US" sz="1600" dirty="0"/>
+              <a:t>xc7a35tcpg236-1</a:t>
+            </a:r>
+            <a:r>
+              <a:rPr lang="en-US" sz="1500" dirty="0">
+                <a:solidFill>
+                  <a:srgbClr val="595959"/>
+                </a:solidFill>
+                <a:latin typeface="Tw Cen MT" pitchFamily="34" charset="0"/>
+                <a:ea typeface="Tw Cen MT" pitchFamily="34" charset="-122"/>
+                <a:cs typeface="Tw Cen MT" pitchFamily="34" charset="-120"/>
+              </a:rPr>
+              <a:t> as the target part.</a:t>
+            </a:r>
+            <a:endParaRPr lang="en-US" sz="1500" dirty="0"/>
+          </a:p>
+        </p:txBody>
+      </p:sp>
+      <p:sp>
+        <p:nvSpPr>
+          <p:cNvPr id="12" name="Shape 10"/>
+          <p:cNvSpPr/>
+          <p:nvPr/>
+        </p:nvSpPr>
+        <p:spPr>
+          <a:xfrm>
+            <a:off x="566928" y="3959352"/>
+            <a:ext cx="457200" cy="457200"/>
+          </a:xfrm>
+          <a:prstGeom prst="ellipse">
+            <a:avLst/>
+          </a:prstGeom>
+          <a:solidFill>
+            <a:srgbClr val="9E1B32"/>
+          </a:solidFill>
+          <a:ln/>
+        </p:spPr>
+        <p:txBody>
+          <a:bodyPr/>
+          <a:lstStyle/>
+          <a:p>
+            <a:endParaRPr lang="en-US"/>
+          </a:p>
+        </p:txBody>
+      </p:sp>
+      <p:sp>
+        <p:nvSpPr>
+          <p:cNvPr id="13" name="Text 11"/>
+          <p:cNvSpPr/>
+          <p:nvPr/>
+        </p:nvSpPr>
+        <p:spPr>
+          <a:xfrm>
+            <a:off x="566928" y="3959352"/>
+            <a:ext cx="457200" cy="457200"/>
+          </a:xfrm>
+          <a:prstGeom prst="rect">
+            <a:avLst/>
+          </a:prstGeom>
+          <a:noFill/>
+          <a:ln/>
+        </p:spPr>
+        <p:txBody>
+          <a:bodyPr wrap="square" rtlCol="0" anchor="ctr"/>
+          <a:lstStyle/>
+          <a:p>
+            <a:pPr marL="0" indent="0" algn="ctr">
+              <a:buNone/>
+            </a:pPr>
+            <a:r>
+              <a:rPr lang="en-US" sz="2000" b="1" dirty="0">
+                <a:solidFill>
+                  <a:srgbClr val="FFFFFF"/>
+                </a:solidFill>
+                <a:latin typeface="Tw Cen MT Condensed Extra Bold" pitchFamily="34" charset="0"/>
+                <a:ea typeface="Tw Cen MT Condensed Extra Bold" pitchFamily="34" charset="-122"/>
+                <a:cs typeface="Tw Cen MT Condensed Extra Bold" pitchFamily="34" charset="-120"/>
+              </a:rPr>
+              <a:t>3</a:t>
+            </a:r>
+            <a:endParaRPr lang="en-US" sz="2000" dirty="0"/>
+          </a:p>
+        </p:txBody>
+      </p:sp>
+      <p:sp>
+        <p:nvSpPr>
+          <p:cNvPr id="14" name="Text 12"/>
+          <p:cNvSpPr/>
+          <p:nvPr/>
+        </p:nvSpPr>
+        <p:spPr>
+          <a:xfrm>
+            <a:off x="1225296" y="3922776"/>
+            <a:ext cx="5468112" cy="658368"/>
+          </a:xfrm>
+          <a:prstGeom prst="rect">
+            <a:avLst/>
+          </a:prstGeom>
+          <a:noFill/>
+          <a:ln/>
+        </p:spPr>
+        <p:txBody>
+          <a:bodyPr wrap="square" lIns="0" tIns="0" rIns="0" bIns="0" rtlCol="0" anchor="t"/>
+          <a:lstStyle/>
+          <a:p>
+            <a:pPr marL="0" indent="0" algn="l">
               <a:lnSpc>
                 <a:spcPct val="100000"/>
               </a:lnSpc>
               <a:buNone/>
             </a:pPr>
             <a:r>
-              <a:rPr lang="en-US" sz="1500" dirty="0">
-                <a:solidFill>
-                  <a:srgbClr val="595959"/>
+              <a:rPr lang="en-US" sz="1500" b="1" dirty="0">
+                <a:solidFill>
+                  <a:srgbClr val="1A1A1A"/>
                 </a:solidFill>
                 <a:latin typeface="Tw Cen MT" pitchFamily="34" charset="0"/>
                 <a:ea typeface="Tw Cen MT" pitchFamily="34" charset="-122"/>
                 <a:cs typeface="Tw Cen MT" pitchFamily="34" charset="-120"/>
               </a:rPr>
-              <a:t>  Free Standard edition; add the Artix-7 (7-series) device family.</a:t>
+              <a:t>Synthesize &amp; implement.</a:t>
+            </a:r>
+            <a:r>
+              <a:rPr lang="en-US" sz="1500" dirty="0">
+                <a:solidFill>
+                  <a:srgbClr val="595959"/>
+                </a:solidFill>
+                <a:latin typeface="Tw Cen MT" pitchFamily="34" charset="0"/>
+                <a:ea typeface="Tw Cen MT" pitchFamily="34" charset="-122"/>
+                <a:cs typeface="Tw Cen MT" pitchFamily="34" charset="-120"/>
+              </a:rPr>
+              <a:t>  Run synthesis → implementation → generate bitstream.</a:t>
             </a:r>
             <a:endParaRPr lang="en-US" sz="1500" dirty="0"/>
           </a:p>
@@ -5740,13 +5415,13 @@
       </p:sp>
       <p:sp>
         <p:nvSpPr>
-          <p:cNvPr id="9" name="Shape 7"/>
-          <p:cNvSpPr/>
-          <p:nvPr/>
-        </p:nvSpPr>
-        <p:spPr>
-          <a:xfrm>
-            <a:off x="566928" y="3154680"/>
+          <p:cNvPr id="15" name="Shape 13"/>
+          <p:cNvSpPr/>
+          <p:nvPr/>
+        </p:nvSpPr>
+        <p:spPr>
+          <a:xfrm>
+            <a:off x="566928" y="4764024"/>
             <a:ext cx="457200" cy="457200"/>
           </a:xfrm>
           <a:prstGeom prst="ellipse">
@@ -5757,16 +5432,23 @@
           </a:solidFill>
           <a:ln/>
         </p:spPr>
-      </p:sp>
-      <p:sp>
-        <p:nvSpPr>
-          <p:cNvPr id="10" name="Text 8"/>
-          <p:cNvSpPr/>
-          <p:nvPr/>
-        </p:nvSpPr>
-        <p:spPr>
-          <a:xfrm>
-            <a:off x="566928" y="3154680"/>
+        <p:txBody>
+          <a:bodyPr/>
+          <a:lstStyle/>
+          <a:p>
+            <a:endParaRPr lang="en-US"/>
+          </a:p>
+        </p:txBody>
+      </p:sp>
+      <p:sp>
+        <p:nvSpPr>
+          <p:cNvPr id="16" name="Text 14"/>
+          <p:cNvSpPr/>
+          <p:nvPr/>
+        </p:nvSpPr>
+        <p:spPr>
+          <a:xfrm>
+            <a:off x="566928" y="4764024"/>
             <a:ext cx="457200" cy="457200"/>
           </a:xfrm>
           <a:prstGeom prst="rect">
@@ -5779,7 +5461,7 @@
           <a:bodyPr wrap="square" rtlCol="0" anchor="ctr"/>
           <a:lstStyle/>
           <a:p>
-            <a:pPr algn="ctr" indent="0" marL="0">
+            <a:pPr marL="0" indent="0" algn="ctr">
               <a:buNone/>
             </a:pPr>
             <a:r>
@@ -5791,7 +5473,7 @@
                 <a:ea typeface="Tw Cen MT Condensed Extra Bold" pitchFamily="34" charset="-122"/>
                 <a:cs typeface="Tw Cen MT Condensed Extra Bold" pitchFamily="34" charset="-120"/>
               </a:rPr>
-              <a:t>2</a:t>
+              <a:t>4</a:t>
             </a:r>
             <a:endParaRPr lang="en-US" sz="2000" dirty="0"/>
           </a:p>
@@ -5799,13 +5481,13 @@
       </p:sp>
       <p:sp>
         <p:nvSpPr>
-          <p:cNvPr id="11" name="Text 9"/>
-          <p:cNvSpPr/>
-          <p:nvPr/>
-        </p:nvSpPr>
-        <p:spPr>
-          <a:xfrm>
-            <a:off x="1225296" y="3118104"/>
+          <p:cNvPr id="17" name="Text 15"/>
+          <p:cNvSpPr/>
+          <p:nvPr/>
+        </p:nvSpPr>
+        <p:spPr>
+          <a:xfrm>
+            <a:off x="1225296" y="4727448"/>
             <a:ext cx="5468112" cy="658368"/>
           </a:xfrm>
           <a:prstGeom prst="rect">
@@ -5818,7 +5500,7 @@
           <a:bodyPr wrap="square" lIns="0" tIns="0" rIns="0" bIns="0" rtlCol="0" anchor="t"/>
           <a:lstStyle/>
           <a:p>
-            <a:pPr algn="l" indent="0" marL="0">
+            <a:pPr marL="0" indent="0" algn="l">
               <a:lnSpc>
                 <a:spcPct val="100000"/>
               </a:lnSpc>
@@ -5833,14 +5515,8 @@
                 <a:ea typeface="Tw Cen MT" pitchFamily="34" charset="-122"/>
                 <a:cs typeface="Tw Cen MT" pitchFamily="34" charset="-120"/>
               </a:rPr>
-              <a:t>Open the base core.</a:t>
-            </a:r>
-            <a:pPr algn="l" indent="0" marL="0">
-              <a:lnSpc>
-                <a:spcPct val="100000"/>
-              </a:lnSpc>
-              <a:buNone/>
-            </a:pPr>
+              <a:t>Program the board.</a:t>
+            </a:r>
             <a:r>
               <a:rPr lang="en-US" sz="1500" dirty="0">
                 <a:solidFill>
@@ -5850,7 +5526,7 @@
                 <a:ea typeface="Tw Cen MT" pitchFamily="34" charset="-122"/>
                 <a:cs typeface="Tw Cen MT" pitchFamily="34" charset="-120"/>
               </a:rPr>
-              <a:t>  Load the provided project; set the Basys 3 XC7A35T as the target part.</a:t>
+              <a:t>  Open Hardware Manager, connect over USB-JTAG, program the device.</a:t>
             </a:r>
             <a:endParaRPr lang="en-US" sz="1500" dirty="0"/>
           </a:p>
@@ -5858,16 +5534,43 @@
       </p:sp>
       <p:sp>
         <p:nvSpPr>
-          <p:cNvPr id="12" name="Shape 10"/>
-          <p:cNvSpPr/>
-          <p:nvPr/>
-        </p:nvSpPr>
-        <p:spPr>
-          <a:xfrm>
-            <a:off x="566928" y="3959352"/>
-            <a:ext cx="457200" cy="457200"/>
-          </a:xfrm>
-          <a:prstGeom prst="ellipse">
+          <p:cNvPr id="18" name="Shape 16"/>
+          <p:cNvSpPr/>
+          <p:nvPr/>
+        </p:nvSpPr>
+        <p:spPr>
+          <a:xfrm>
+            <a:off x="6903720" y="1892808"/>
+            <a:ext cx="4718304" cy="3063240"/>
+          </a:xfrm>
+          <a:prstGeom prst="rect">
+            <a:avLst/>
+          </a:prstGeom>
+          <a:solidFill>
+            <a:srgbClr val="F8E8EC"/>
+          </a:solidFill>
+          <a:ln/>
+        </p:spPr>
+        <p:txBody>
+          <a:bodyPr/>
+          <a:lstStyle/>
+          <a:p>
+            <a:endParaRPr lang="en-US"/>
+          </a:p>
+        </p:txBody>
+      </p:sp>
+      <p:sp>
+        <p:nvSpPr>
+          <p:cNvPr id="19" name="Shape 17"/>
+          <p:cNvSpPr/>
+          <p:nvPr/>
+        </p:nvSpPr>
+        <p:spPr>
+          <a:xfrm>
+            <a:off x="6903720" y="1892808"/>
+            <a:ext cx="4718304" cy="82296"/>
+          </a:xfrm>
+          <a:prstGeom prst="rect">
             <a:avLst/>
           </a:prstGeom>
           <a:solidFill>
@@ -5875,297 +5578,49 @@
           </a:solidFill>
           <a:ln/>
         </p:spPr>
-      </p:sp>
-      <p:sp>
-        <p:nvSpPr>
-          <p:cNvPr id="13" name="Text 11"/>
-          <p:cNvSpPr/>
-          <p:nvPr/>
-        </p:nvSpPr>
-        <p:spPr>
-          <a:xfrm>
-            <a:off x="566928" y="3959352"/>
-            <a:ext cx="457200" cy="457200"/>
-          </a:xfrm>
-          <a:prstGeom prst="rect">
-            <a:avLst/>
-          </a:prstGeom>
-          <a:noFill/>
-          <a:ln/>
-        </p:spPr>
-        <p:txBody>
-          <a:bodyPr wrap="square" rtlCol="0" anchor="ctr"/>
-          <a:lstStyle/>
-          <a:p>
-            <a:pPr algn="ctr" indent="0" marL="0">
-              <a:buNone/>
-            </a:pPr>
-            <a:r>
-              <a:rPr lang="en-US" sz="2000" b="1" dirty="0">
-                <a:solidFill>
-                  <a:srgbClr val="FFFFFF"/>
+        <p:txBody>
+          <a:bodyPr/>
+          <a:lstStyle/>
+          <a:p>
+            <a:endParaRPr lang="en-US"/>
+          </a:p>
+        </p:txBody>
+      </p:sp>
+      <p:sp>
+        <p:nvSpPr>
+          <p:cNvPr id="20" name="Text 18"/>
+          <p:cNvSpPr/>
+          <p:nvPr/>
+        </p:nvSpPr>
+        <p:spPr>
+          <a:xfrm>
+            <a:off x="7104888" y="2093976"/>
+            <a:ext cx="4315968" cy="457200"/>
+          </a:xfrm>
+          <a:prstGeom prst="rect">
+            <a:avLst/>
+          </a:prstGeom>
+          <a:noFill/>
+          <a:ln/>
+        </p:spPr>
+        <p:txBody>
+          <a:bodyPr wrap="square" lIns="0" tIns="0" rIns="0" bIns="0" rtlCol="0" anchor="ctr"/>
+          <a:lstStyle/>
+          <a:p>
+            <a:r>
+              <a:rPr lang="en-US" sz="1800" b="1" dirty="0">
+                <a:solidFill>
+                  <a:srgbClr val="9E1B32"/>
                 </a:solidFill>
                 <a:latin typeface="Tw Cen MT Condensed Extra Bold" pitchFamily="34" charset="0"/>
                 <a:ea typeface="Tw Cen MT Condensed Extra Bold" pitchFamily="34" charset="-122"/>
                 <a:cs typeface="Tw Cen MT Condensed Extra Bold" pitchFamily="34" charset="-120"/>
               </a:rPr>
-              <a:t>3</a:t>
-            </a:r>
-            <a:endParaRPr lang="en-US" sz="2000" dirty="0"/>
-          </a:p>
-        </p:txBody>
-      </p:sp>
-      <p:sp>
-        <p:nvSpPr>
-          <p:cNvPr id="14" name="Text 12"/>
-          <p:cNvSpPr/>
-          <p:nvPr/>
-        </p:nvSpPr>
-        <p:spPr>
-          <a:xfrm>
-            <a:off x="1225296" y="3922776"/>
-            <a:ext cx="5468112" cy="658368"/>
-          </a:xfrm>
-          <a:prstGeom prst="rect">
-            <a:avLst/>
-          </a:prstGeom>
-          <a:noFill/>
-          <a:ln/>
-        </p:spPr>
-        <p:txBody>
-          <a:bodyPr wrap="square" lIns="0" tIns="0" rIns="0" bIns="0" rtlCol="0" anchor="t"/>
-          <a:lstStyle/>
-          <a:p>
-            <a:pPr algn="l" indent="0" marL="0">
-              <a:lnSpc>
-                <a:spcPct val="100000"/>
-              </a:lnSpc>
-              <a:buNone/>
-            </a:pPr>
-            <a:r>
-              <a:rPr lang="en-US" sz="1500" b="1" dirty="0">
-                <a:solidFill>
-                  <a:srgbClr val="1A1A1A"/>
-                </a:solidFill>
-                <a:latin typeface="Tw Cen MT" pitchFamily="34" charset="0"/>
-                <a:ea typeface="Tw Cen MT" pitchFamily="34" charset="-122"/>
-                <a:cs typeface="Tw Cen MT" pitchFamily="34" charset="-120"/>
-              </a:rPr>
-              <a:t>Synthesize &amp; implement.</a:t>
-            </a:r>
-            <a:pPr algn="l" indent="0" marL="0">
-              <a:lnSpc>
-                <a:spcPct val="100000"/>
-              </a:lnSpc>
-              <a:buNone/>
-            </a:pPr>
-            <a:r>
-              <a:rPr lang="en-US" sz="1500" dirty="0">
-                <a:solidFill>
-                  <a:srgbClr val="595959"/>
-                </a:solidFill>
-                <a:latin typeface="Tw Cen MT" pitchFamily="34" charset="0"/>
-                <a:ea typeface="Tw Cen MT" pitchFamily="34" charset="-122"/>
-                <a:cs typeface="Tw Cen MT" pitchFamily="34" charset="-120"/>
-              </a:rPr>
-              <a:t>  Run synthesis → implementation → generate bitstream.</a:t>
-            </a:r>
-            <a:endParaRPr lang="en-US" sz="1500" dirty="0"/>
-          </a:p>
-        </p:txBody>
-      </p:sp>
-      <p:sp>
-        <p:nvSpPr>
-          <p:cNvPr id="15" name="Shape 13"/>
-          <p:cNvSpPr/>
-          <p:nvPr/>
-        </p:nvSpPr>
-        <p:spPr>
-          <a:xfrm>
-            <a:off x="566928" y="4764024"/>
-            <a:ext cx="457200" cy="457200"/>
-          </a:xfrm>
-          <a:prstGeom prst="ellipse">
-            <a:avLst/>
-          </a:prstGeom>
-          <a:solidFill>
-            <a:srgbClr val="9E1B32"/>
-          </a:solidFill>
-          <a:ln/>
-        </p:spPr>
-      </p:sp>
-      <p:sp>
-        <p:nvSpPr>
-          <p:cNvPr id="16" name="Text 14"/>
-          <p:cNvSpPr/>
-          <p:nvPr/>
-        </p:nvSpPr>
-        <p:spPr>
-          <a:xfrm>
-            <a:off x="566928" y="4764024"/>
-            <a:ext cx="457200" cy="457200"/>
-          </a:xfrm>
-          <a:prstGeom prst="rect">
-            <a:avLst/>
-          </a:prstGeom>
-          <a:noFill/>
-          <a:ln/>
-        </p:spPr>
-        <p:txBody>
-          <a:bodyPr wrap="square" rtlCol="0" anchor="ctr"/>
-          <a:lstStyle/>
-          <a:p>
-            <a:pPr algn="ctr" indent="0" marL="0">
-              <a:buNone/>
-            </a:pPr>
-            <a:r>
-              <a:rPr lang="en-US" sz="2000" b="1" dirty="0">
-                <a:solidFill>
-                  <a:srgbClr val="FFFFFF"/>
-                </a:solidFill>
-                <a:latin typeface="Tw Cen MT Condensed Extra Bold" pitchFamily="34" charset="0"/>
-                <a:ea typeface="Tw Cen MT Condensed Extra Bold" pitchFamily="34" charset="-122"/>
-                <a:cs typeface="Tw Cen MT Condensed Extra Bold" pitchFamily="34" charset="-120"/>
-              </a:rPr>
-              <a:t>4</a:t>
-            </a:r>
-            <a:endParaRPr lang="en-US" sz="2000" dirty="0"/>
-          </a:p>
-        </p:txBody>
-      </p:sp>
-      <p:sp>
-        <p:nvSpPr>
-          <p:cNvPr id="17" name="Text 15"/>
-          <p:cNvSpPr/>
-          <p:nvPr/>
-        </p:nvSpPr>
-        <p:spPr>
-          <a:xfrm>
-            <a:off x="1225296" y="4727448"/>
-            <a:ext cx="5468112" cy="658368"/>
-          </a:xfrm>
-          <a:prstGeom prst="rect">
-            <a:avLst/>
-          </a:prstGeom>
-          <a:noFill/>
-          <a:ln/>
-        </p:spPr>
-        <p:txBody>
-          <a:bodyPr wrap="square" lIns="0" tIns="0" rIns="0" bIns="0" rtlCol="0" anchor="t"/>
-          <a:lstStyle/>
-          <a:p>
-            <a:pPr algn="l" indent="0" marL="0">
-              <a:lnSpc>
-                <a:spcPct val="100000"/>
-              </a:lnSpc>
-              <a:buNone/>
-            </a:pPr>
-            <a:r>
-              <a:rPr lang="en-US" sz="1500" b="1" dirty="0">
-                <a:solidFill>
-                  <a:srgbClr val="1A1A1A"/>
-                </a:solidFill>
-                <a:latin typeface="Tw Cen MT" pitchFamily="34" charset="0"/>
-                <a:ea typeface="Tw Cen MT" pitchFamily="34" charset="-122"/>
-                <a:cs typeface="Tw Cen MT" pitchFamily="34" charset="-120"/>
-              </a:rPr>
-              <a:t>Program the board.</a:t>
-            </a:r>
-            <a:pPr algn="l" indent="0" marL="0">
-              <a:lnSpc>
-                <a:spcPct val="100000"/>
-              </a:lnSpc>
-              <a:buNone/>
-            </a:pPr>
-            <a:r>
-              <a:rPr lang="en-US" sz="1500" dirty="0">
-                <a:solidFill>
-                  <a:srgbClr val="595959"/>
-                </a:solidFill>
-                <a:latin typeface="Tw Cen MT" pitchFamily="34" charset="0"/>
-                <a:ea typeface="Tw Cen MT" pitchFamily="34" charset="-122"/>
-                <a:cs typeface="Tw Cen MT" pitchFamily="34" charset="-120"/>
-              </a:rPr>
-              <a:t>  Open Hardware Manager, connect over USB-JTAG, program the device.</a:t>
-            </a:r>
-            <a:endParaRPr lang="en-US" sz="1500" dirty="0"/>
-          </a:p>
-        </p:txBody>
-      </p:sp>
-      <p:sp>
-        <p:nvSpPr>
-          <p:cNvPr id="18" name="Shape 16"/>
-          <p:cNvSpPr/>
-          <p:nvPr/>
-        </p:nvSpPr>
-        <p:spPr>
-          <a:xfrm>
-            <a:off x="6903720" y="1892808"/>
-            <a:ext cx="4718304" cy="3063240"/>
-          </a:xfrm>
-          <a:prstGeom prst="rect">
-            <a:avLst/>
-          </a:prstGeom>
-          <a:solidFill>
-            <a:srgbClr val="F8E8EC"/>
-          </a:solidFill>
-          <a:ln/>
-        </p:spPr>
-      </p:sp>
-      <p:sp>
-        <p:nvSpPr>
-          <p:cNvPr id="19" name="Shape 17"/>
-          <p:cNvSpPr/>
-          <p:nvPr/>
-        </p:nvSpPr>
-        <p:spPr>
-          <a:xfrm>
-            <a:off x="6903720" y="1892808"/>
-            <a:ext cx="4718304" cy="82296"/>
-          </a:xfrm>
-          <a:prstGeom prst="rect">
-            <a:avLst/>
-          </a:prstGeom>
-          <a:solidFill>
-            <a:srgbClr val="9E1B32"/>
-          </a:solidFill>
-          <a:ln/>
-        </p:spPr>
-      </p:sp>
-      <p:sp>
-        <p:nvSpPr>
-          <p:cNvPr id="20" name="Text 18"/>
-          <p:cNvSpPr/>
-          <p:nvPr/>
-        </p:nvSpPr>
-        <p:spPr>
-          <a:xfrm>
-            <a:off x="7104888" y="2093976"/>
-            <a:ext cx="4315968" cy="457200"/>
-          </a:xfrm>
-          <a:prstGeom prst="rect">
-            <a:avLst/>
-          </a:prstGeom>
-          <a:noFill/>
-          <a:ln/>
-        </p:spPr>
-        <p:txBody>
-          <a:bodyPr wrap="square" lIns="0" tIns="0" rIns="0" bIns="0" rtlCol="0" anchor="ctr"/>
-          <a:lstStyle/>
-          <a:p>
-            <a:pPr indent="0" marL="0">
-              <a:buNone/>
-            </a:pPr>
-            <a:r>
-              <a:rPr lang="en-US" sz="1800" b="1" dirty="0">
-                <a:solidFill>
-                  <a:srgbClr val="9E1B32"/>
-                </a:solidFill>
-                <a:latin typeface="Tw Cen MT Condensed Extra Bold" pitchFamily="34" charset="0"/>
-                <a:ea typeface="Tw Cen MT Condensed Extra Bold" pitchFamily="34" charset="-122"/>
-                <a:cs typeface="Tw Cen MT Condensed Extra Bold" pitchFamily="34" charset="-120"/>
-              </a:rPr>
-              <a:t>BASYS 3 · ARTIX-7 XC7A35T</a:t>
+              <a:t>BASYS 3 · ARTIX-7 </a:t>
+            </a:r>
+            <a:r>
+              <a:rPr lang="en-US" dirty="0"/>
+              <a:t>xc7a35tcpg236-1</a:t>
             </a:r>
             <a:endParaRPr lang="en-US" sz="1800" dirty="0"/>
           </a:p>
@@ -6192,7 +5647,7 @@
           <a:bodyPr wrap="square" lIns="0" tIns="0" rIns="0" bIns="0" rtlCol="0" anchor="t"/>
           <a:lstStyle/>
           <a:p>
-            <a:pPr algn="l" marL="177800" indent="-177800">
+            <a:pPr marL="177800" indent="-177800" algn="l">
               <a:spcAft>
                 <a:spcPts val="800"/>
               </a:spcAft>
@@ -6213,7 +5668,7 @@
             <a:endParaRPr lang="en-US" sz="1450" dirty="0"/>
           </a:p>
           <a:p>
-            <a:pPr algn="l" marL="177800" indent="-177800">
+            <a:pPr marL="177800" indent="-177800" algn="l">
               <a:spcAft>
                 <a:spcPts val="800"/>
               </a:spcAft>
@@ -6234,7 +5689,7 @@
             <a:endParaRPr lang="en-US" sz="1450" dirty="0"/>
           </a:p>
           <a:p>
-            <a:pPr algn="l" marL="177800" indent="-177800">
+            <a:pPr marL="177800" indent="-177800" algn="l">
               <a:spcAft>
                 <a:spcPts val="800"/>
               </a:spcAft>
@@ -6255,7 +5710,7 @@
             <a:endParaRPr lang="en-US" sz="1450" dirty="0"/>
           </a:p>
           <a:p>
-            <a:pPr algn="l" marL="177800" indent="-177800">
+            <a:pPr marL="177800" indent="-177800" algn="l">
               <a:spcAft>
                 <a:spcPts val="800"/>
               </a:spcAft>
@@ -6271,7 +5726,7 @@
                 <a:ea typeface="Tw Cen MT" pitchFamily="34" charset="-122"/>
                 <a:cs typeface="Tw Cen MT" pitchFamily="34" charset="-120"/>
               </a:rPr>
-              <a:t>USB-JTAG programming · USB-UART bridge · 3 Pmods</a:t>
+              <a:t>USB-JTAG programming · USB-UART bridge · 4 Pmods</a:t>
             </a:r>
             <a:endParaRPr lang="en-US" sz="1450" dirty="0"/>
           </a:p>
@@ -6298,7 +5753,7 @@
           <a:bodyPr wrap="square" lIns="0" tIns="0" rIns="0" bIns="0" rtlCol="0" anchor="ctr"/>
           <a:lstStyle/>
           <a:p>
-            <a:pPr algn="l" indent="0" marL="0">
+            <a:pPr marL="0" indent="0" algn="l">
               <a:buNone/>
             </a:pPr>
             <a:r>
@@ -6335,6 +5790,13 @@
           </a:solidFill>
           <a:ln/>
         </p:spPr>
+        <p:txBody>
+          <a:bodyPr/>
+          <a:lstStyle/>
+          <a:p>
+            <a:endParaRPr lang="en-US"/>
+          </a:p>
+        </p:txBody>
       </p:sp>
       <p:sp>
         <p:nvSpPr>
@@ -6357,7 +5819,7 @@
           <a:bodyPr wrap="square" rtlCol="0" anchor="ctr"/>
           <a:lstStyle/>
           <a:p>
-            <a:pPr algn="ctr" indent="0" marL="0">
+            <a:pPr marL="0" indent="0" algn="ctr">
               <a:buNone/>
             </a:pPr>
             <a:r>
@@ -6396,7 +5858,7 @@
           <a:bodyPr wrap="square" rtlCol="0" anchor="ctr"/>
           <a:lstStyle/>
           <a:p>
-            <a:pPr algn="r" indent="0" marL="0">
+            <a:pPr marL="0" indent="0" algn="r">
               <a:buNone/>
             </a:pPr>
             <a:r>
@@ -6430,6 +5892,7 @@
         <a:solidFill>
           <a:srgbClr val="FFFFFF"/>
         </a:solidFill>
+        <a:effectLst/>
       </p:bgPr>
     </p:bg>
     <p:spTree>
@@ -6467,7 +5930,7 @@
           <a:bodyPr wrap="square" rtlCol="0" anchor="ctr"/>
           <a:lstStyle/>
           <a:p>
-            <a:pPr algn="l" indent="0" marL="0">
+            <a:pPr marL="0" indent="0" algn="l">
               <a:buNone/>
             </a:pPr>
             <a:r>
@@ -6504,6 +5967,13 @@
           </a:solidFill>
           <a:ln/>
         </p:spPr>
+        <p:txBody>
+          <a:bodyPr/>
+          <a:lstStyle/>
+          <a:p>
+            <a:endParaRPr lang="en-US"/>
+          </a:p>
+        </p:txBody>
       </p:sp>
       <p:sp>
         <p:nvSpPr>
@@ -6526,7 +5996,7 @@
           <a:bodyPr wrap="square" rtlCol="0" anchor="ctr"/>
           <a:lstStyle/>
           <a:p>
-            <a:pPr algn="l" indent="0" marL="0">
+            <a:pPr marL="0" indent="0" algn="l">
               <a:buNone/>
             </a:pPr>
             <a:r>
@@ -6563,6 +6033,13 @@
           </a:solidFill>
           <a:ln/>
         </p:spPr>
+        <p:txBody>
+          <a:bodyPr/>
+          <a:lstStyle/>
+          <a:p>
+            <a:endParaRPr lang="en-US"/>
+          </a:p>
+        </p:txBody>
       </p:sp>
       <p:sp>
         <p:nvSpPr>
@@ -6585,7 +6062,7 @@
           <a:bodyPr wrap="square" rtlCol="0" anchor="ctr"/>
           <a:lstStyle/>
           <a:p>
-            <a:pPr algn="ctr" indent="0" marL="0">
+            <a:pPr marL="0" indent="0" algn="ctr">
               <a:buNone/>
             </a:pPr>
             <a:r>
@@ -6624,7 +6101,7 @@
           <a:bodyPr wrap="square" rtlCol="0" anchor="ctr"/>
           <a:lstStyle/>
           <a:p>
-            <a:pPr algn="r" indent="0" marL="0">
+            <a:pPr marL="0" indent="0" algn="r">
               <a:buNone/>
             </a:pPr>
             <a:r>
@@ -6658,6 +6135,7 @@
         <a:solidFill>
           <a:srgbClr val="FFFFFF"/>
         </a:solidFill>
+        <a:effectLst/>
       </p:bgPr>
     </p:bg>
     <p:spTree>
@@ -6697,7 +6175,7 @@
           </a:bodyPr>
           <a:lstStyle/>
           <a:p>
-            <a:pPr algn="l" indent="0" marL="0">
+            <a:pPr marL="0" indent="0" algn="l">
               <a:buNone/>
             </a:pPr>
             <a:r>
@@ -6711,9 +6189,6 @@
               </a:rPr>
               <a:t>The Base Core</a:t>
             </a:r>
-            <a:pPr algn="l" indent="0" marL="0">
-              <a:buNone/>
-            </a:pPr>
             <a:r>
               <a:rPr lang="en-US" sz="3300" b="1" dirty="0">
                 <a:solidFill>
@@ -6725,9 +6200,6 @@
               </a:rPr>
               <a:t>   |   </a:t>
             </a:r>
-            <a:pPr algn="l" indent="0" marL="0">
-              <a:buNone/>
-            </a:pPr>
             <a:r>
               <a:rPr lang="en-US" sz="3300" b="1" dirty="0">
                 <a:solidFill>
@@ -6762,6 +6234,13 @@
           </a:solidFill>
           <a:ln/>
         </p:spPr>
+        <p:txBody>
+          <a:bodyPr/>
+          <a:lstStyle/>
+          <a:p>
+            <a:endParaRPr lang="en-US"/>
+          </a:p>
+        </p:txBody>
       </p:sp>
       <p:sp>
         <p:nvSpPr>
@@ -6784,7 +6263,7 @@
           <a:bodyPr wrap="square" lIns="0" tIns="0" rIns="0" bIns="0" rtlCol="0" anchor="t"/>
           <a:lstStyle/>
           <a:p>
-            <a:pPr algn="l" indent="0" marL="0">
+            <a:pPr marL="0" indent="0" algn="l">
               <a:buNone/>
             </a:pPr>
             <a:r>
@@ -6821,6 +6300,13 @@
           </a:solidFill>
           <a:ln/>
         </p:spPr>
+        <p:txBody>
+          <a:bodyPr/>
+          <a:lstStyle/>
+          <a:p>
+            <a:endParaRPr lang="en-US"/>
+          </a:p>
+        </p:txBody>
       </p:sp>
       <p:sp>
         <p:nvSpPr>
@@ -6841,6 +6327,13 @@
           </a:solidFill>
           <a:ln/>
         </p:spPr>
+        <p:txBody>
+          <a:bodyPr/>
+          <a:lstStyle/>
+          <a:p>
+            <a:endParaRPr lang="en-US"/>
+          </a:p>
+        </p:txBody>
       </p:sp>
       <p:sp>
         <p:nvSpPr>
@@ -6863,7 +6356,7 @@
           <a:bodyPr wrap="square" lIns="0" tIns="0" rIns="0" bIns="0" rtlCol="0" anchor="ctr"/>
           <a:lstStyle/>
           <a:p>
-            <a:pPr indent="0" marL="0">
+            <a:pPr marL="0" indent="0">
               <a:buNone/>
             </a:pPr>
             <a:r>
@@ -6902,7 +6395,7 @@
           <a:bodyPr wrap="square" lIns="0" tIns="0" rIns="0" bIns="0" rtlCol="0" anchor="t"/>
           <a:lstStyle/>
           <a:p>
-            <a:pPr algn="l" marL="165100" indent="-165100">
+            <a:pPr marL="165100" indent="-165100" algn="l">
               <a:spcAft>
                 <a:spcPts val="700"/>
               </a:spcAft>
@@ -6923,7 +6416,7 @@
             <a:endParaRPr lang="en-US" sz="1400" dirty="0"/>
           </a:p>
           <a:p>
-            <a:pPr algn="l" marL="165100" indent="-165100">
+            <a:pPr marL="165100" indent="-165100" algn="l">
               <a:spcAft>
                 <a:spcPts val="700"/>
               </a:spcAft>
@@ -6944,7 +6437,7 @@
             <a:endParaRPr lang="en-US" sz="1400" dirty="0"/>
           </a:p>
           <a:p>
-            <a:pPr algn="l" marL="165100" indent="-165100">
+            <a:pPr marL="165100" indent="-165100" algn="l">
               <a:spcAft>
                 <a:spcPts val="700"/>
               </a:spcAft>
@@ -6985,6 +6478,13 @@
           </a:solidFill>
           <a:ln/>
         </p:spPr>
+        <p:txBody>
+          <a:bodyPr/>
+          <a:lstStyle/>
+          <a:p>
+            <a:endParaRPr lang="en-US"/>
+          </a:p>
+        </p:txBody>
       </p:sp>
       <p:sp>
         <p:nvSpPr>
@@ -7005,6 +6505,13 @@
           </a:solidFill>
           <a:ln/>
         </p:spPr>
+        <p:txBody>
+          <a:bodyPr/>
+          <a:lstStyle/>
+          <a:p>
+            <a:endParaRPr lang="en-US"/>
+          </a:p>
+        </p:txBody>
       </p:sp>
       <p:sp>
         <p:nvSpPr>
@@ -7027,7 +6534,7 @@
           <a:bodyPr wrap="square" lIns="0" tIns="0" rIns="0" bIns="0" rtlCol="0" anchor="ctr"/>
           <a:lstStyle/>
           <a:p>
-            <a:pPr indent="0" marL="0">
+            <a:pPr marL="0" indent="0">
               <a:buNone/>
             </a:pPr>
             <a:r>
@@ -7066,7 +6573,7 @@
           <a:bodyPr wrap="square" lIns="0" tIns="0" rIns="0" bIns="0" rtlCol="0" anchor="t"/>
           <a:lstStyle/>
           <a:p>
-            <a:pPr algn="l" marL="165100" indent="-165100">
+            <a:pPr marL="165100" indent="-165100" algn="l">
               <a:spcAft>
                 <a:spcPts val="700"/>
               </a:spcAft>
@@ -7087,7 +6594,7 @@
             <a:endParaRPr lang="en-US" sz="1400" dirty="0"/>
           </a:p>
           <a:p>
-            <a:pPr algn="l" marL="165100" indent="-165100">
+            <a:pPr marL="165100" indent="-165100" algn="l">
               <a:spcAft>
                 <a:spcPts val="700"/>
               </a:spcAft>
@@ -7108,7 +6615,7 @@
             <a:endParaRPr lang="en-US" sz="1400" dirty="0"/>
           </a:p>
           <a:p>
-            <a:pPr algn="l" marL="165100" indent="-165100">
+            <a:pPr marL="165100" indent="-165100" algn="l">
               <a:spcAft>
                 <a:spcPts val="700"/>
               </a:spcAft>
@@ -7149,6 +6656,13 @@
           </a:solidFill>
           <a:ln/>
         </p:spPr>
+        <p:txBody>
+          <a:bodyPr/>
+          <a:lstStyle/>
+          <a:p>
+            <a:endParaRPr lang="en-US"/>
+          </a:p>
+        </p:txBody>
       </p:sp>
       <p:sp>
         <p:nvSpPr>
@@ -7169,6 +6683,13 @@
           </a:solidFill>
           <a:ln/>
         </p:spPr>
+        <p:txBody>
+          <a:bodyPr/>
+          <a:lstStyle/>
+          <a:p>
+            <a:endParaRPr lang="en-US"/>
+          </a:p>
+        </p:txBody>
       </p:sp>
       <p:sp>
         <p:nvSpPr>
@@ -7191,7 +6712,7 @@
           <a:bodyPr wrap="square" lIns="0" tIns="0" rIns="0" bIns="0" rtlCol="0" anchor="ctr"/>
           <a:lstStyle/>
           <a:p>
-            <a:pPr indent="0" marL="0">
+            <a:pPr marL="0" indent="0">
               <a:buNone/>
             </a:pPr>
             <a:r>
@@ -7230,7 +6751,7 @@
           <a:bodyPr wrap="square" lIns="0" tIns="0" rIns="0" bIns="0" rtlCol="0" anchor="t"/>
           <a:lstStyle/>
           <a:p>
-            <a:pPr algn="l" marL="165100" indent="-165100">
+            <a:pPr marL="165100" indent="-165100" algn="l">
               <a:spcAft>
                 <a:spcPts val="700"/>
               </a:spcAft>
@@ -7251,7 +6772,7 @@
             <a:endParaRPr lang="en-US" sz="1400" dirty="0"/>
           </a:p>
           <a:p>
-            <a:pPr algn="l" marL="165100" indent="-165100">
+            <a:pPr marL="165100" indent="-165100" algn="l">
               <a:spcAft>
                 <a:spcPts val="700"/>
               </a:spcAft>
@@ -7272,7 +6793,7 @@
             <a:endParaRPr lang="en-US" sz="1400" dirty="0"/>
           </a:p>
           <a:p>
-            <a:pPr algn="l" marL="165100" indent="-165100">
+            <a:pPr marL="165100" indent="-165100" algn="l">
               <a:spcAft>
                 <a:spcPts val="700"/>
               </a:spcAft>
@@ -7313,6 +6834,13 @@
           </a:solidFill>
           <a:ln/>
         </p:spPr>
+        <p:txBody>
+          <a:bodyPr/>
+          <a:lstStyle/>
+          <a:p>
+            <a:endParaRPr lang="en-US"/>
+          </a:p>
+        </p:txBody>
       </p:sp>
       <p:sp>
         <p:nvSpPr>
@@ -7333,6 +6861,13 @@
           </a:solidFill>
           <a:ln/>
         </p:spPr>
+        <p:txBody>
+          <a:bodyPr/>
+          <a:lstStyle/>
+          <a:p>
+            <a:endParaRPr lang="en-US"/>
+          </a:p>
+        </p:txBody>
       </p:sp>
       <p:sp>
         <p:nvSpPr>
@@ -7355,7 +6890,7 @@
           <a:bodyPr wrap="square" lIns="0" tIns="0" rIns="0" bIns="0" rtlCol="0" anchor="ctr"/>
           <a:lstStyle/>
           <a:p>
-            <a:pPr indent="0" marL="0">
+            <a:pPr marL="0" indent="0">
               <a:buNone/>
             </a:pPr>
             <a:r>
@@ -7394,7 +6929,7 @@
           <a:bodyPr wrap="square" lIns="0" tIns="0" rIns="0" bIns="0" rtlCol="0" anchor="t"/>
           <a:lstStyle/>
           <a:p>
-            <a:pPr algn="l" marL="165100" indent="-165100">
+            <a:pPr marL="165100" indent="-165100" algn="l">
               <a:spcAft>
                 <a:spcPts val="700"/>
               </a:spcAft>
@@ -7415,7 +6950,7 @@
             <a:endParaRPr lang="en-US" sz="1400" dirty="0"/>
           </a:p>
           <a:p>
-            <a:pPr algn="l" marL="165100" indent="-165100">
+            <a:pPr marL="165100" indent="-165100" algn="l">
               <a:spcAft>
                 <a:spcPts val="700"/>
               </a:spcAft>
@@ -7436,7 +6971,7 @@
             <a:endParaRPr lang="en-US" sz="1400" dirty="0"/>
           </a:p>
           <a:p>
-            <a:pPr algn="l" marL="165100" indent="-165100">
+            <a:pPr marL="165100" indent="-165100" algn="l">
               <a:spcAft>
                 <a:spcPts val="700"/>
               </a:spcAft>
@@ -7482,13 +7017,20 @@
             <a:prstDash val="solid"/>
           </a:ln>
           <a:effectLst>
-            <a:outerShdw sx="100000" sy="100000" kx="0" ky="0" algn="bl" rotWithShape="0" blurRad="63500" dist="25400" dir="5400000">
+            <a:outerShdw blurRad="63500" dist="25400" dir="5400000" algn="bl" rotWithShape="0">
               <a:srgbClr val="BFBFBF">
                 <a:alpha val="30000"/>
               </a:srgbClr>
             </a:outerShdw>
           </a:effectLst>
         </p:spPr>
+        <p:txBody>
+          <a:bodyPr/>
+          <a:lstStyle/>
+          <a:p>
+            <a:endParaRPr lang="en-US"/>
+          </a:p>
+        </p:txBody>
       </p:sp>
       <p:sp>
         <p:nvSpPr>
@@ -7509,6 +7051,13 @@
           </a:solidFill>
           <a:ln/>
         </p:spPr>
+        <p:txBody>
+          <a:bodyPr/>
+          <a:lstStyle/>
+          <a:p>
+            <a:endParaRPr lang="en-US"/>
+          </a:p>
+        </p:txBody>
       </p:sp>
       <p:sp>
         <p:nvSpPr>
@@ -7529,6 +7078,13 @@
           </a:solidFill>
           <a:ln/>
         </p:spPr>
+        <p:txBody>
+          <a:bodyPr/>
+          <a:lstStyle/>
+          <a:p>
+            <a:endParaRPr lang="en-US"/>
+          </a:p>
+        </p:txBody>
       </p:sp>
       <p:sp>
         <p:nvSpPr>
@@ -7551,7 +7107,7 @@
           <a:bodyPr wrap="square" lIns="0" tIns="0" rIns="0" bIns="0" rtlCol="0" anchor="ctr"/>
           <a:lstStyle/>
           <a:p>
-            <a:pPr indent="0" marL="0">
+            <a:pPr marL="0" indent="0">
               <a:buNone/>
             </a:pPr>
             <a:r>
@@ -7590,7 +7146,7 @@
           <a:bodyPr wrap="square" lIns="0" tIns="0" rIns="0" bIns="0" rtlCol="0" anchor="ctr"/>
           <a:lstStyle/>
           <a:p>
-            <a:pPr algn="r" indent="0" marL="0">
+            <a:pPr marL="0" indent="0" algn="r">
               <a:buNone/>
             </a:pPr>
             <a:r>
@@ -7629,7 +7185,7 @@
           <a:bodyPr wrap="square" lIns="0" tIns="0" rIns="0" bIns="0" rtlCol="0" anchor="ctr"/>
           <a:lstStyle/>
           <a:p>
-            <a:pPr algn="l" indent="0" marL="0">
+            <a:pPr marL="0" indent="0" algn="l">
               <a:buNone/>
             </a:pPr>
             <a:r>
@@ -7643,9 +7199,6 @@
               </a:rPr>
               <a:t>module</a:t>
             </a:r>
-            <a:pPr algn="l" indent="0" marL="0">
-              <a:buNone/>
-            </a:pPr>
             <a:r>
               <a:rPr lang="en-US" sz="1100" dirty="0">
                 <a:solidFill>
@@ -7655,25 +7208,19 @@
                 <a:ea typeface="Courier New" pitchFamily="34" charset="-122"/>
                 <a:cs typeface="Courier New" pitchFamily="34" charset="-120"/>
               </a:rPr>
-              <a:t> </a:t>
-            </a:r>
-            <a:pPr algn="l" indent="0" marL="0">
-              <a:buNone/>
-            </a:pPr>
+              <a:t> rv_top(</a:t>
+            </a:r>
             <a:r>
               <a:rPr lang="en-US" sz="1100" dirty="0">
                 <a:solidFill>
-                  <a:srgbClr val="1A1A1A"/>
+                  <a:srgbClr val="1A56DB"/>
                 </a:solidFill>
                 <a:latin typeface="Courier New" pitchFamily="34" charset="0"/>
                 <a:ea typeface="Courier New" pitchFamily="34" charset="-122"/>
                 <a:cs typeface="Courier New" pitchFamily="34" charset="-120"/>
               </a:rPr>
-              <a:t>rv_top</a:t>
-            </a:r>
-            <a:pPr algn="l" indent="0" marL="0">
-              <a:buNone/>
-            </a:pPr>
+              <a:t>input</a:t>
+            </a:r>
             <a:r>
               <a:rPr lang="en-US" sz="1100" dirty="0">
                 <a:solidFill>
@@ -7683,11 +7230,8 @@
                 <a:ea typeface="Courier New" pitchFamily="34" charset="-122"/>
                 <a:cs typeface="Courier New" pitchFamily="34" charset="-120"/>
               </a:rPr>
-              <a:t>(</a:t>
-            </a:r>
-            <a:pPr algn="l" indent="0" marL="0">
-              <a:buNone/>
-            </a:pPr>
+              <a:t> clk, </a:t>
+            </a:r>
             <a:r>
               <a:rPr lang="en-US" sz="1100" dirty="0">
                 <a:solidFill>
@@ -7699,9 +7243,6 @@
               </a:rPr>
               <a:t>input</a:t>
             </a:r>
-            <a:pPr algn="l" indent="0" marL="0">
-              <a:buNone/>
-            </a:pPr>
             <a:r>
               <a:rPr lang="en-US" sz="1100" dirty="0">
                 <a:solidFill>
@@ -7711,23 +7252,73 @@
                 <a:ea typeface="Courier New" pitchFamily="34" charset="-122"/>
                 <a:cs typeface="Courier New" pitchFamily="34" charset="-120"/>
               </a:rPr>
-              <a:t> </a:t>
-            </a:r>
-            <a:pPr algn="l" indent="0" marL="0">
+              <a:t> rst,</a:t>
+            </a:r>
+            <a:endParaRPr lang="en-US" sz="1100" dirty="0"/>
+          </a:p>
+        </p:txBody>
+      </p:sp>
+      <p:sp>
+        <p:nvSpPr>
+          <p:cNvPr id="27" name="Text 25"/>
+          <p:cNvSpPr/>
+          <p:nvPr/>
+        </p:nvSpPr>
+        <p:spPr>
+          <a:xfrm>
+            <a:off x="621792" y="5070348"/>
+            <a:ext cx="310896" cy="214884"/>
+          </a:xfrm>
+          <a:prstGeom prst="rect">
+            <a:avLst/>
+          </a:prstGeom>
+          <a:noFill/>
+          <a:ln/>
+        </p:spPr>
+        <p:txBody>
+          <a:bodyPr wrap="square" lIns="0" tIns="0" rIns="0" bIns="0" rtlCol="0" anchor="ctr"/>
+          <a:lstStyle/>
+          <a:p>
+            <a:pPr marL="0" indent="0" algn="r">
               <a:buNone/>
             </a:pPr>
             <a:r>
               <a:rPr lang="en-US" sz="1100" dirty="0">
                 <a:solidFill>
-                  <a:srgbClr val="1A1A1A"/>
+                  <a:srgbClr val="9AA0A6"/>
                 </a:solidFill>
                 <a:latin typeface="Courier New" pitchFamily="34" charset="0"/>
                 <a:ea typeface="Courier New" pitchFamily="34" charset="-122"/>
                 <a:cs typeface="Courier New" pitchFamily="34" charset="-120"/>
               </a:rPr>
-              <a:t>clk</a:t>
-            </a:r>
-            <a:pPr algn="l" indent="0" marL="0">
+              <a:t>2</a:t>
+            </a:r>
+            <a:endParaRPr lang="en-US" sz="1100" dirty="0"/>
+          </a:p>
+        </p:txBody>
+      </p:sp>
+      <p:sp>
+        <p:nvSpPr>
+          <p:cNvPr id="28" name="Text 26"/>
+          <p:cNvSpPr/>
+          <p:nvPr/>
+        </p:nvSpPr>
+        <p:spPr>
+          <a:xfrm>
+            <a:off x="1042416" y="5070348"/>
+            <a:ext cx="10472623" cy="214884"/>
+          </a:xfrm>
+          <a:prstGeom prst="rect">
+            <a:avLst/>
+          </a:prstGeom>
+          <a:noFill/>
+          <a:ln/>
+        </p:spPr>
+        <p:txBody>
+          <a:bodyPr wrap="square" lIns="0" tIns="0" rIns="0" bIns="0" rtlCol="0" anchor="ctr"/>
+          <a:lstStyle/>
+          <a:p>
+            <a:pPr marL="0" indent="0" algn="l">
               <a:buNone/>
             </a:pPr>
             <a:r>
@@ -7739,11 +7330,8 @@
                 <a:ea typeface="Courier New" pitchFamily="34" charset="-122"/>
                 <a:cs typeface="Courier New" pitchFamily="34" charset="-120"/>
               </a:rPr>
-              <a:t>, </a:t>
-            </a:r>
-            <a:pPr algn="l" indent="0" marL="0">
-              <a:buNone/>
-            </a:pPr>
+              <a:t>              </a:t>
+            </a:r>
             <a:r>
               <a:rPr lang="en-US" sz="1100" dirty="0">
                 <a:solidFill>
@@ -7753,11 +7341,8 @@
                 <a:ea typeface="Courier New" pitchFamily="34" charset="-122"/>
                 <a:cs typeface="Courier New" pitchFamily="34" charset="-120"/>
               </a:rPr>
-              <a:t>input</a:t>
-            </a:r>
-            <a:pPr algn="l" indent="0" marL="0">
-              <a:buNone/>
-            </a:pPr>
+              <a:t>output</a:t>
+            </a:r>
             <a:r>
               <a:rPr lang="en-US" sz="1100" dirty="0">
                 <a:solidFill>
@@ -7767,23 +7352,73 @@
                 <a:ea typeface="Courier New" pitchFamily="34" charset="-122"/>
                 <a:cs typeface="Courier New" pitchFamily="34" charset="-120"/>
               </a:rPr>
-              <a:t> </a:t>
-            </a:r>
-            <a:pPr algn="l" indent="0" marL="0">
+              <a:t> [15:0] led);</a:t>
+            </a:r>
+            <a:endParaRPr lang="en-US" sz="1100" dirty="0"/>
+          </a:p>
+        </p:txBody>
+      </p:sp>
+      <p:sp>
+        <p:nvSpPr>
+          <p:cNvPr id="29" name="Text 27"/>
+          <p:cNvSpPr/>
+          <p:nvPr/>
+        </p:nvSpPr>
+        <p:spPr>
+          <a:xfrm>
+            <a:off x="621792" y="5285232"/>
+            <a:ext cx="310896" cy="214884"/>
+          </a:xfrm>
+          <a:prstGeom prst="rect">
+            <a:avLst/>
+          </a:prstGeom>
+          <a:noFill/>
+          <a:ln/>
+        </p:spPr>
+        <p:txBody>
+          <a:bodyPr wrap="square" lIns="0" tIns="0" rIns="0" bIns="0" rtlCol="0" anchor="ctr"/>
+          <a:lstStyle/>
+          <a:p>
+            <a:pPr marL="0" indent="0" algn="r">
               <a:buNone/>
             </a:pPr>
             <a:r>
               <a:rPr lang="en-US" sz="1100" dirty="0">
                 <a:solidFill>
-                  <a:srgbClr val="1A1A1A"/>
+                  <a:srgbClr val="9AA0A6"/>
                 </a:solidFill>
                 <a:latin typeface="Courier New" pitchFamily="34" charset="0"/>
                 <a:ea typeface="Courier New" pitchFamily="34" charset="-122"/>
                 <a:cs typeface="Courier New" pitchFamily="34" charset="-120"/>
               </a:rPr>
-              <a:t>rst</a:t>
-            </a:r>
-            <a:pPr algn="l" indent="0" marL="0">
+              <a:t>3</a:t>
+            </a:r>
+            <a:endParaRPr lang="en-US" sz="1100" dirty="0"/>
+          </a:p>
+        </p:txBody>
+      </p:sp>
+      <p:sp>
+        <p:nvSpPr>
+          <p:cNvPr id="30" name="Text 28"/>
+          <p:cNvSpPr/>
+          <p:nvPr/>
+        </p:nvSpPr>
+        <p:spPr>
+          <a:xfrm>
+            <a:off x="1042416" y="5285232"/>
+            <a:ext cx="10472623" cy="214884"/>
+          </a:xfrm>
+          <a:prstGeom prst="rect">
+            <a:avLst/>
+          </a:prstGeom>
+          <a:noFill/>
+          <a:ln/>
+        </p:spPr>
+        <p:txBody>
+          <a:bodyPr wrap="square" lIns="0" tIns="0" rIns="0" bIns="0" rtlCol="0" anchor="ctr"/>
+          <a:lstStyle/>
+          <a:p>
+            <a:pPr marL="0" indent="0" algn="l">
               <a:buNone/>
             </a:pPr>
             <a:r>
@@ -7795,75 +7430,19 @@
                 <a:ea typeface="Courier New" pitchFamily="34" charset="-122"/>
                 <a:cs typeface="Courier New" pitchFamily="34" charset="-120"/>
               </a:rPr>
-              <a:t>,</a:t>
-            </a:r>
-            <a:endParaRPr lang="en-US" sz="1100" dirty="0"/>
-          </a:p>
-        </p:txBody>
-      </p:sp>
-      <p:sp>
-        <p:nvSpPr>
-          <p:cNvPr id="27" name="Text 25"/>
-          <p:cNvSpPr/>
-          <p:nvPr/>
-        </p:nvSpPr>
-        <p:spPr>
-          <a:xfrm>
-            <a:off x="621792" y="5070348"/>
-            <a:ext cx="310896" cy="214884"/>
-          </a:xfrm>
-          <a:prstGeom prst="rect">
-            <a:avLst/>
-          </a:prstGeom>
-          <a:noFill/>
-          <a:ln/>
-        </p:spPr>
-        <p:txBody>
-          <a:bodyPr wrap="square" lIns="0" tIns="0" rIns="0" bIns="0" rtlCol="0" anchor="ctr"/>
-          <a:lstStyle/>
-          <a:p>
-            <a:pPr algn="r" indent="0" marL="0">
-              <a:buNone/>
-            </a:pPr>
+              <a:t>  </a:t>
+            </a:r>
             <a:r>
               <a:rPr lang="en-US" sz="1100" dirty="0">
                 <a:solidFill>
-                  <a:srgbClr val="9AA0A6"/>
+                  <a:srgbClr val="1A56DB"/>
                 </a:solidFill>
                 <a:latin typeface="Courier New" pitchFamily="34" charset="0"/>
                 <a:ea typeface="Courier New" pitchFamily="34" charset="-122"/>
                 <a:cs typeface="Courier New" pitchFamily="34" charset="-120"/>
               </a:rPr>
-              <a:t>2</a:t>
-            </a:r>
-            <a:endParaRPr lang="en-US" sz="1100" dirty="0"/>
-          </a:p>
-        </p:txBody>
-      </p:sp>
-      <p:sp>
-        <p:nvSpPr>
-          <p:cNvPr id="28" name="Text 26"/>
-          <p:cNvSpPr/>
-          <p:nvPr/>
-        </p:nvSpPr>
-        <p:spPr>
-          <a:xfrm>
-            <a:off x="1042416" y="5070348"/>
-            <a:ext cx="10472623" cy="214884"/>
-          </a:xfrm>
-          <a:prstGeom prst="rect">
-            <a:avLst/>
-          </a:prstGeom>
-          <a:noFill/>
-          <a:ln/>
-        </p:spPr>
-        <p:txBody>
-          <a:bodyPr wrap="square" lIns="0" tIns="0" rIns="0" bIns="0" rtlCol="0" anchor="ctr"/>
-          <a:lstStyle/>
-          <a:p>
-            <a:pPr algn="l" indent="0" marL="0">
-              <a:buNone/>
-            </a:pPr>
+              <a:t>wire</a:t>
+            </a:r>
             <a:r>
               <a:rPr lang="en-US" sz="1100" dirty="0">
                 <a:solidFill>
@@ -7873,23 +7452,73 @@
                 <a:ea typeface="Courier New" pitchFamily="34" charset="-122"/>
                 <a:cs typeface="Courier New" pitchFamily="34" charset="-120"/>
               </a:rPr>
-              <a:t>              </a:t>
-            </a:r>
-            <a:pPr algn="l" indent="0" marL="0">
+              <a:t> [31:0] pc, instr, alu_y, rdata;</a:t>
+            </a:r>
+            <a:endParaRPr lang="en-US" sz="1100" dirty="0"/>
+          </a:p>
+        </p:txBody>
+      </p:sp>
+      <p:sp>
+        <p:nvSpPr>
+          <p:cNvPr id="31" name="Text 29"/>
+          <p:cNvSpPr/>
+          <p:nvPr/>
+        </p:nvSpPr>
+        <p:spPr>
+          <a:xfrm>
+            <a:off x="621792" y="5500116"/>
+            <a:ext cx="310896" cy="214884"/>
+          </a:xfrm>
+          <a:prstGeom prst="rect">
+            <a:avLst/>
+          </a:prstGeom>
+          <a:noFill/>
+          <a:ln/>
+        </p:spPr>
+        <p:txBody>
+          <a:bodyPr wrap="square" lIns="0" tIns="0" rIns="0" bIns="0" rtlCol="0" anchor="ctr"/>
+          <a:lstStyle/>
+          <a:p>
+            <a:pPr marL="0" indent="0" algn="r">
               <a:buNone/>
             </a:pPr>
             <a:r>
               <a:rPr lang="en-US" sz="1100" dirty="0">
                 <a:solidFill>
-                  <a:srgbClr val="1A56DB"/>
+                  <a:srgbClr val="9AA0A6"/>
                 </a:solidFill>
                 <a:latin typeface="Courier New" pitchFamily="34" charset="0"/>
                 <a:ea typeface="Courier New" pitchFamily="34" charset="-122"/>
                 <a:cs typeface="Courier New" pitchFamily="34" charset="-120"/>
               </a:rPr>
-              <a:t>output</a:t>
-            </a:r>
-            <a:pPr algn="l" indent="0" marL="0">
+              <a:t>4</a:t>
+            </a:r>
+            <a:endParaRPr lang="en-US" sz="1100" dirty="0"/>
+          </a:p>
+        </p:txBody>
+      </p:sp>
+      <p:sp>
+        <p:nvSpPr>
+          <p:cNvPr id="32" name="Text 30"/>
+          <p:cNvSpPr/>
+          <p:nvPr/>
+        </p:nvSpPr>
+        <p:spPr>
+          <a:xfrm>
+            <a:off x="1042416" y="5500116"/>
+            <a:ext cx="10472623" cy="214884"/>
+          </a:xfrm>
+          <a:prstGeom prst="rect">
+            <a:avLst/>
+          </a:prstGeom>
+          <a:noFill/>
+          <a:ln/>
+        </p:spPr>
+        <p:txBody>
+          <a:bodyPr wrap="square" lIns="0" tIns="0" rIns="0" bIns="0" rtlCol="0" anchor="ctr"/>
+          <a:lstStyle/>
+          <a:p>
+            <a:pPr marL="0" indent="0" algn="l">
               <a:buNone/>
             </a:pPr>
             <a:r>
@@ -7901,23 +7530,73 @@
                 <a:ea typeface="Courier New" pitchFamily="34" charset="-122"/>
                 <a:cs typeface="Courier New" pitchFamily="34" charset="-120"/>
               </a:rPr>
-              <a:t> [</a:t>
-            </a:r>
-            <a:pPr algn="l" indent="0" marL="0">
+              <a:t>  fetch  u_if (.clk(clk), .rst(rst), .pc(pc), .instr(instr));</a:t>
+            </a:r>
+            <a:endParaRPr lang="en-US" sz="1100" dirty="0"/>
+          </a:p>
+        </p:txBody>
+      </p:sp>
+      <p:sp>
+        <p:nvSpPr>
+          <p:cNvPr id="33" name="Text 31"/>
+          <p:cNvSpPr/>
+          <p:nvPr/>
+        </p:nvSpPr>
+        <p:spPr>
+          <a:xfrm>
+            <a:off x="621792" y="5715000"/>
+            <a:ext cx="310896" cy="214884"/>
+          </a:xfrm>
+          <a:prstGeom prst="rect">
+            <a:avLst/>
+          </a:prstGeom>
+          <a:noFill/>
+          <a:ln/>
+        </p:spPr>
+        <p:txBody>
+          <a:bodyPr wrap="square" lIns="0" tIns="0" rIns="0" bIns="0" rtlCol="0" anchor="ctr"/>
+          <a:lstStyle/>
+          <a:p>
+            <a:pPr marL="0" indent="0" algn="r">
               <a:buNone/>
             </a:pPr>
             <a:r>
               <a:rPr lang="en-US" sz="1100" dirty="0">
                 <a:solidFill>
-                  <a:srgbClr val="1A1A1A"/>
+                  <a:srgbClr val="9AA0A6"/>
                 </a:solidFill>
                 <a:latin typeface="Courier New" pitchFamily="34" charset="0"/>
                 <a:ea typeface="Courier New" pitchFamily="34" charset="-122"/>
                 <a:cs typeface="Courier New" pitchFamily="34" charset="-120"/>
               </a:rPr>
-              <a:t>15</a:t>
-            </a:r>
-            <a:pPr algn="l" indent="0" marL="0">
+              <a:t>5</a:t>
+            </a:r>
+            <a:endParaRPr lang="en-US" sz="1100" dirty="0"/>
+          </a:p>
+        </p:txBody>
+      </p:sp>
+      <p:sp>
+        <p:nvSpPr>
+          <p:cNvPr id="34" name="Text 32"/>
+          <p:cNvSpPr/>
+          <p:nvPr/>
+        </p:nvSpPr>
+        <p:spPr>
+          <a:xfrm>
+            <a:off x="1042416" y="5715000"/>
+            <a:ext cx="10472623" cy="214884"/>
+          </a:xfrm>
+          <a:prstGeom prst="rect">
+            <a:avLst/>
+          </a:prstGeom>
+          <a:noFill/>
+          <a:ln/>
+        </p:spPr>
+        <p:txBody>
+          <a:bodyPr wrap="square" lIns="0" tIns="0" rIns="0" bIns="0" rtlCol="0" anchor="ctr"/>
+          <a:lstStyle/>
+          <a:p>
+            <a:pPr marL="0" indent="0" algn="l">
               <a:buNone/>
             </a:pPr>
             <a:r>
@@ -7929,23 +7608,73 @@
                 <a:ea typeface="Courier New" pitchFamily="34" charset="-122"/>
                 <a:cs typeface="Courier New" pitchFamily="34" charset="-120"/>
               </a:rPr>
-              <a:t>:</a:t>
-            </a:r>
-            <a:pPr algn="l" indent="0" marL="0">
+              <a:t>  decode u_id (.instr(instr), .imm(imm), .ctrl(ctrl));</a:t>
+            </a:r>
+            <a:endParaRPr lang="en-US" sz="1100" dirty="0"/>
+          </a:p>
+        </p:txBody>
+      </p:sp>
+      <p:sp>
+        <p:nvSpPr>
+          <p:cNvPr id="35" name="Text 33"/>
+          <p:cNvSpPr/>
+          <p:nvPr/>
+        </p:nvSpPr>
+        <p:spPr>
+          <a:xfrm>
+            <a:off x="621792" y="5929884"/>
+            <a:ext cx="310896" cy="214884"/>
+          </a:xfrm>
+          <a:prstGeom prst="rect">
+            <a:avLst/>
+          </a:prstGeom>
+          <a:noFill/>
+          <a:ln/>
+        </p:spPr>
+        <p:txBody>
+          <a:bodyPr wrap="square" lIns="0" tIns="0" rIns="0" bIns="0" rtlCol="0" anchor="ctr"/>
+          <a:lstStyle/>
+          <a:p>
+            <a:pPr marL="0" indent="0" algn="r">
               <a:buNone/>
             </a:pPr>
             <a:r>
               <a:rPr lang="en-US" sz="1100" dirty="0">
                 <a:solidFill>
-                  <a:srgbClr val="1A1A1A"/>
+                  <a:srgbClr val="9AA0A6"/>
                 </a:solidFill>
                 <a:latin typeface="Courier New" pitchFamily="34" charset="0"/>
                 <a:ea typeface="Courier New" pitchFamily="34" charset="-122"/>
                 <a:cs typeface="Courier New" pitchFamily="34" charset="-120"/>
               </a:rPr>
-              <a:t>0</a:t>
-            </a:r>
-            <a:pPr algn="l" indent="0" marL="0">
+              <a:t>6</a:t>
+            </a:r>
+            <a:endParaRPr lang="en-US" sz="1100" dirty="0"/>
+          </a:p>
+        </p:txBody>
+      </p:sp>
+      <p:sp>
+        <p:nvSpPr>
+          <p:cNvPr id="36" name="Text 34"/>
+          <p:cNvSpPr/>
+          <p:nvPr/>
+        </p:nvSpPr>
+        <p:spPr>
+          <a:xfrm>
+            <a:off x="1042416" y="5929884"/>
+            <a:ext cx="10472623" cy="214884"/>
+          </a:xfrm>
+          <a:prstGeom prst="rect">
+            <a:avLst/>
+          </a:prstGeom>
+          <a:noFill/>
+          <a:ln/>
+        </p:spPr>
+        <p:txBody>
+          <a:bodyPr wrap="square" lIns="0" tIns="0" rIns="0" bIns="0" rtlCol="0" anchor="ctr"/>
+          <a:lstStyle/>
+          <a:p>
+            <a:pPr marL="0" indent="0" algn="l">
               <a:buNone/>
             </a:pPr>
             <a:r>
@@ -7957,1404 +7686,84 @@
                 <a:ea typeface="Courier New" pitchFamily="34" charset="-122"/>
                 <a:cs typeface="Courier New" pitchFamily="34" charset="-120"/>
               </a:rPr>
-              <a:t>] </a:t>
-            </a:r>
-            <a:pPr algn="l" indent="0" marL="0">
+              <a:t>  execute u_ex(.a(rs1), .b(rs2), .imm(imm), .y(alu_y));</a:t>
+            </a:r>
+            <a:endParaRPr lang="en-US" sz="1100" dirty="0"/>
+          </a:p>
+        </p:txBody>
+      </p:sp>
+      <p:sp>
+        <p:nvSpPr>
+          <p:cNvPr id="37" name="Text 35"/>
+          <p:cNvSpPr/>
+          <p:nvPr/>
+        </p:nvSpPr>
+        <p:spPr>
+          <a:xfrm>
+            <a:off x="621792" y="6144768"/>
+            <a:ext cx="310896" cy="214884"/>
+          </a:xfrm>
+          <a:prstGeom prst="rect">
+            <a:avLst/>
+          </a:prstGeom>
+          <a:noFill/>
+          <a:ln/>
+        </p:spPr>
+        <p:txBody>
+          <a:bodyPr wrap="square" lIns="0" tIns="0" rIns="0" bIns="0" rtlCol="0" anchor="ctr"/>
+          <a:lstStyle/>
+          <a:p>
+            <a:pPr marL="0" indent="0" algn="r">
               <a:buNone/>
             </a:pPr>
             <a:r>
               <a:rPr lang="en-US" sz="1100" dirty="0">
                 <a:solidFill>
-                  <a:srgbClr val="1A1A1A"/>
+                  <a:srgbClr val="9AA0A6"/>
                 </a:solidFill>
                 <a:latin typeface="Courier New" pitchFamily="34" charset="0"/>
                 <a:ea typeface="Courier New" pitchFamily="34" charset="-122"/>
                 <a:cs typeface="Courier New" pitchFamily="34" charset="-120"/>
               </a:rPr>
-              <a:t>led</a:t>
-            </a:r>
-            <a:pPr algn="l" indent="0" marL="0">
+              <a:t>7</a:t>
+            </a:r>
+            <a:endParaRPr lang="en-US" sz="1100" dirty="0"/>
+          </a:p>
+        </p:txBody>
+      </p:sp>
+      <p:sp>
+        <p:nvSpPr>
+          <p:cNvPr id="38" name="Text 36"/>
+          <p:cNvSpPr/>
+          <p:nvPr/>
+        </p:nvSpPr>
+        <p:spPr>
+          <a:xfrm>
+            <a:off x="1042416" y="6144768"/>
+            <a:ext cx="10472623" cy="214884"/>
+          </a:xfrm>
+          <a:prstGeom prst="rect">
+            <a:avLst/>
+          </a:prstGeom>
+          <a:noFill/>
+          <a:ln/>
+        </p:spPr>
+        <p:txBody>
+          <a:bodyPr wrap="square" lIns="0" tIns="0" rIns="0" bIns="0" rtlCol="0" anchor="ctr"/>
+          <a:lstStyle/>
+          <a:p>
+            <a:pPr marL="0" indent="0" algn="l">
               <a:buNone/>
             </a:pPr>
             <a:r>
               <a:rPr lang="en-US" sz="1100" dirty="0">
                 <a:solidFill>
-                  <a:srgbClr val="1A1A1A"/>
+                  <a:srgbClr val="1A56DB"/>
                 </a:solidFill>
                 <a:latin typeface="Courier New" pitchFamily="34" charset="0"/>
                 <a:ea typeface="Courier New" pitchFamily="34" charset="-122"/>
                 <a:cs typeface="Courier New" pitchFamily="34" charset="-120"/>
               </a:rPr>
-              <a:t>);</a:t>
-            </a:r>
-            <a:endParaRPr lang="en-US" sz="1100" dirty="0"/>
-          </a:p>
-        </p:txBody>
-      </p:sp>
-      <p:sp>
-        <p:nvSpPr>
-          <p:cNvPr id="29" name="Text 27"/>
-          <p:cNvSpPr/>
-          <p:nvPr/>
-        </p:nvSpPr>
-        <p:spPr>
-          <a:xfrm>
-            <a:off x="621792" y="5285232"/>
-            <a:ext cx="310896" cy="214884"/>
-          </a:xfrm>
-          <a:prstGeom prst="rect">
-            <a:avLst/>
-          </a:prstGeom>
-          <a:noFill/>
-          <a:ln/>
-        </p:spPr>
-        <p:txBody>
-          <a:bodyPr wrap="square" lIns="0" tIns="0" rIns="0" bIns="0" rtlCol="0" anchor="ctr"/>
-          <a:lstStyle/>
-          <a:p>
-            <a:pPr algn="r" indent="0" marL="0">
-              <a:buNone/>
-            </a:pPr>
-            <a:r>
-              <a:rPr lang="en-US" sz="1100" dirty="0">
-                <a:solidFill>
-                  <a:srgbClr val="9AA0A6"/>
-                </a:solidFill>
-                <a:latin typeface="Courier New" pitchFamily="34" charset="0"/>
-                <a:ea typeface="Courier New" pitchFamily="34" charset="-122"/>
-                <a:cs typeface="Courier New" pitchFamily="34" charset="-120"/>
-              </a:rPr>
-              <a:t>3</a:t>
-            </a:r>
-            <a:endParaRPr lang="en-US" sz="1100" dirty="0"/>
-          </a:p>
-        </p:txBody>
-      </p:sp>
-      <p:sp>
-        <p:nvSpPr>
-          <p:cNvPr id="30" name="Text 28"/>
-          <p:cNvSpPr/>
-          <p:nvPr/>
-        </p:nvSpPr>
-        <p:spPr>
-          <a:xfrm>
-            <a:off x="1042416" y="5285232"/>
-            <a:ext cx="10472623" cy="214884"/>
-          </a:xfrm>
-          <a:prstGeom prst="rect">
-            <a:avLst/>
-          </a:prstGeom>
-          <a:noFill/>
-          <a:ln/>
-        </p:spPr>
-        <p:txBody>
-          <a:bodyPr wrap="square" lIns="0" tIns="0" rIns="0" bIns="0" rtlCol="0" anchor="ctr"/>
-          <a:lstStyle/>
-          <a:p>
-            <a:pPr algn="l" indent="0" marL="0">
-              <a:buNone/>
-            </a:pPr>
-            <a:r>
-              <a:rPr lang="en-US" sz="1100" dirty="0">
-                <a:solidFill>
-                  <a:srgbClr val="1A1A1A"/>
-                </a:solidFill>
-                <a:latin typeface="Courier New" pitchFamily="34" charset="0"/>
-                <a:ea typeface="Courier New" pitchFamily="34" charset="-122"/>
-                <a:cs typeface="Courier New" pitchFamily="34" charset="-120"/>
-              </a:rPr>
-              <a:t>  </a:t>
-            </a:r>
-            <a:pPr algn="l" indent="0" marL="0">
-              <a:buNone/>
-            </a:pPr>
-            <a:r>
-              <a:rPr lang="en-US" sz="1100" dirty="0">
-                <a:solidFill>
-                  <a:srgbClr val="1A56DB"/>
-                </a:solidFill>
-                <a:latin typeface="Courier New" pitchFamily="34" charset="0"/>
-                <a:ea typeface="Courier New" pitchFamily="34" charset="-122"/>
-                <a:cs typeface="Courier New" pitchFamily="34" charset="-120"/>
-              </a:rPr>
-              <a:t>wire</a:t>
-            </a:r>
-            <a:pPr algn="l" indent="0" marL="0">
-              <a:buNone/>
-            </a:pPr>
-            <a:r>
-              <a:rPr lang="en-US" sz="1100" dirty="0">
-                <a:solidFill>
-                  <a:srgbClr val="1A1A1A"/>
-                </a:solidFill>
-                <a:latin typeface="Courier New" pitchFamily="34" charset="0"/>
-                <a:ea typeface="Courier New" pitchFamily="34" charset="-122"/>
-                <a:cs typeface="Courier New" pitchFamily="34" charset="-120"/>
-              </a:rPr>
-              <a:t> [</a:t>
-            </a:r>
-            <a:pPr algn="l" indent="0" marL="0">
-              <a:buNone/>
-            </a:pPr>
-            <a:r>
-              <a:rPr lang="en-US" sz="1100" dirty="0">
-                <a:solidFill>
-                  <a:srgbClr val="1A1A1A"/>
-                </a:solidFill>
-                <a:latin typeface="Courier New" pitchFamily="34" charset="0"/>
-                <a:ea typeface="Courier New" pitchFamily="34" charset="-122"/>
-                <a:cs typeface="Courier New" pitchFamily="34" charset="-120"/>
-              </a:rPr>
-              <a:t>31</a:t>
-            </a:r>
-            <a:pPr algn="l" indent="0" marL="0">
-              <a:buNone/>
-            </a:pPr>
-            <a:r>
-              <a:rPr lang="en-US" sz="1100" dirty="0">
-                <a:solidFill>
-                  <a:srgbClr val="1A1A1A"/>
-                </a:solidFill>
-                <a:latin typeface="Courier New" pitchFamily="34" charset="0"/>
-                <a:ea typeface="Courier New" pitchFamily="34" charset="-122"/>
-                <a:cs typeface="Courier New" pitchFamily="34" charset="-120"/>
-              </a:rPr>
-              <a:t>:</a:t>
-            </a:r>
-            <a:pPr algn="l" indent="0" marL="0">
-              <a:buNone/>
-            </a:pPr>
-            <a:r>
-              <a:rPr lang="en-US" sz="1100" dirty="0">
-                <a:solidFill>
-                  <a:srgbClr val="1A1A1A"/>
-                </a:solidFill>
-                <a:latin typeface="Courier New" pitchFamily="34" charset="0"/>
-                <a:ea typeface="Courier New" pitchFamily="34" charset="-122"/>
-                <a:cs typeface="Courier New" pitchFamily="34" charset="-120"/>
-              </a:rPr>
-              <a:t>0</a:t>
-            </a:r>
-            <a:pPr algn="l" indent="0" marL="0">
-              <a:buNone/>
-            </a:pPr>
-            <a:r>
-              <a:rPr lang="en-US" sz="1100" dirty="0">
-                <a:solidFill>
-                  <a:srgbClr val="1A1A1A"/>
-                </a:solidFill>
-                <a:latin typeface="Courier New" pitchFamily="34" charset="0"/>
-                <a:ea typeface="Courier New" pitchFamily="34" charset="-122"/>
-                <a:cs typeface="Courier New" pitchFamily="34" charset="-120"/>
-              </a:rPr>
-              <a:t>] </a:t>
-            </a:r>
-            <a:pPr algn="l" indent="0" marL="0">
-              <a:buNone/>
-            </a:pPr>
-            <a:r>
-              <a:rPr lang="en-US" sz="1100" dirty="0">
-                <a:solidFill>
-                  <a:srgbClr val="1A1A1A"/>
-                </a:solidFill>
-                <a:latin typeface="Courier New" pitchFamily="34" charset="0"/>
-                <a:ea typeface="Courier New" pitchFamily="34" charset="-122"/>
-                <a:cs typeface="Courier New" pitchFamily="34" charset="-120"/>
-              </a:rPr>
-              <a:t>pc</a:t>
-            </a:r>
-            <a:pPr algn="l" indent="0" marL="0">
-              <a:buNone/>
-            </a:pPr>
-            <a:r>
-              <a:rPr lang="en-US" sz="1100" dirty="0">
-                <a:solidFill>
-                  <a:srgbClr val="1A1A1A"/>
-                </a:solidFill>
-                <a:latin typeface="Courier New" pitchFamily="34" charset="0"/>
-                <a:ea typeface="Courier New" pitchFamily="34" charset="-122"/>
-                <a:cs typeface="Courier New" pitchFamily="34" charset="-120"/>
-              </a:rPr>
-              <a:t>, </a:t>
-            </a:r>
-            <a:pPr algn="l" indent="0" marL="0">
-              <a:buNone/>
-            </a:pPr>
-            <a:r>
-              <a:rPr lang="en-US" sz="1100" dirty="0">
-                <a:solidFill>
-                  <a:srgbClr val="1A1A1A"/>
-                </a:solidFill>
-                <a:latin typeface="Courier New" pitchFamily="34" charset="0"/>
-                <a:ea typeface="Courier New" pitchFamily="34" charset="-122"/>
-                <a:cs typeface="Courier New" pitchFamily="34" charset="-120"/>
-              </a:rPr>
-              <a:t>instr</a:t>
-            </a:r>
-            <a:pPr algn="l" indent="0" marL="0">
-              <a:buNone/>
-            </a:pPr>
-            <a:r>
-              <a:rPr lang="en-US" sz="1100" dirty="0">
-                <a:solidFill>
-                  <a:srgbClr val="1A1A1A"/>
-                </a:solidFill>
-                <a:latin typeface="Courier New" pitchFamily="34" charset="0"/>
-                <a:ea typeface="Courier New" pitchFamily="34" charset="-122"/>
-                <a:cs typeface="Courier New" pitchFamily="34" charset="-120"/>
-              </a:rPr>
-              <a:t>, </a:t>
-            </a:r>
-            <a:pPr algn="l" indent="0" marL="0">
-              <a:buNone/>
-            </a:pPr>
-            <a:r>
-              <a:rPr lang="en-US" sz="1100" dirty="0">
-                <a:solidFill>
-                  <a:srgbClr val="1A1A1A"/>
-                </a:solidFill>
-                <a:latin typeface="Courier New" pitchFamily="34" charset="0"/>
-                <a:ea typeface="Courier New" pitchFamily="34" charset="-122"/>
-                <a:cs typeface="Courier New" pitchFamily="34" charset="-120"/>
-              </a:rPr>
-              <a:t>alu_y</a:t>
-            </a:r>
-            <a:pPr algn="l" indent="0" marL="0">
-              <a:buNone/>
-            </a:pPr>
-            <a:r>
-              <a:rPr lang="en-US" sz="1100" dirty="0">
-                <a:solidFill>
-                  <a:srgbClr val="1A1A1A"/>
-                </a:solidFill>
-                <a:latin typeface="Courier New" pitchFamily="34" charset="0"/>
-                <a:ea typeface="Courier New" pitchFamily="34" charset="-122"/>
-                <a:cs typeface="Courier New" pitchFamily="34" charset="-120"/>
-              </a:rPr>
-              <a:t>, </a:t>
-            </a:r>
-            <a:pPr algn="l" indent="0" marL="0">
-              <a:buNone/>
-            </a:pPr>
-            <a:r>
-              <a:rPr lang="en-US" sz="1100" dirty="0">
-                <a:solidFill>
-                  <a:srgbClr val="1A1A1A"/>
-                </a:solidFill>
-                <a:latin typeface="Courier New" pitchFamily="34" charset="0"/>
-                <a:ea typeface="Courier New" pitchFamily="34" charset="-122"/>
-                <a:cs typeface="Courier New" pitchFamily="34" charset="-120"/>
-              </a:rPr>
-              <a:t>rdata</a:t>
-            </a:r>
-            <a:pPr algn="l" indent="0" marL="0">
-              <a:buNone/>
-            </a:pPr>
-            <a:r>
-              <a:rPr lang="en-US" sz="1100" dirty="0">
-                <a:solidFill>
-                  <a:srgbClr val="1A1A1A"/>
-                </a:solidFill>
-                <a:latin typeface="Courier New" pitchFamily="34" charset="0"/>
-                <a:ea typeface="Courier New" pitchFamily="34" charset="-122"/>
-                <a:cs typeface="Courier New" pitchFamily="34" charset="-120"/>
-              </a:rPr>
-              <a:t>;</a:t>
-            </a:r>
-            <a:endParaRPr lang="en-US" sz="1100" dirty="0"/>
-          </a:p>
-        </p:txBody>
-      </p:sp>
-      <p:sp>
-        <p:nvSpPr>
-          <p:cNvPr id="31" name="Text 29"/>
-          <p:cNvSpPr/>
-          <p:nvPr/>
-        </p:nvSpPr>
-        <p:spPr>
-          <a:xfrm>
-            <a:off x="621792" y="5500116"/>
-            <a:ext cx="310896" cy="214884"/>
-          </a:xfrm>
-          <a:prstGeom prst="rect">
-            <a:avLst/>
-          </a:prstGeom>
-          <a:noFill/>
-          <a:ln/>
-        </p:spPr>
-        <p:txBody>
-          <a:bodyPr wrap="square" lIns="0" tIns="0" rIns="0" bIns="0" rtlCol="0" anchor="ctr"/>
-          <a:lstStyle/>
-          <a:p>
-            <a:pPr algn="r" indent="0" marL="0">
-              <a:buNone/>
-            </a:pPr>
-            <a:r>
-              <a:rPr lang="en-US" sz="1100" dirty="0">
-                <a:solidFill>
-                  <a:srgbClr val="9AA0A6"/>
-                </a:solidFill>
-                <a:latin typeface="Courier New" pitchFamily="34" charset="0"/>
-                <a:ea typeface="Courier New" pitchFamily="34" charset="-122"/>
-                <a:cs typeface="Courier New" pitchFamily="34" charset="-120"/>
-              </a:rPr>
-              <a:t>4</a:t>
-            </a:r>
-            <a:endParaRPr lang="en-US" sz="1100" dirty="0"/>
-          </a:p>
-        </p:txBody>
-      </p:sp>
-      <p:sp>
-        <p:nvSpPr>
-          <p:cNvPr id="32" name="Text 30"/>
-          <p:cNvSpPr/>
-          <p:nvPr/>
-        </p:nvSpPr>
-        <p:spPr>
-          <a:xfrm>
-            <a:off x="1042416" y="5500116"/>
-            <a:ext cx="10472623" cy="214884"/>
-          </a:xfrm>
-          <a:prstGeom prst="rect">
-            <a:avLst/>
-          </a:prstGeom>
-          <a:noFill/>
-          <a:ln/>
-        </p:spPr>
-        <p:txBody>
-          <a:bodyPr wrap="square" lIns="0" tIns="0" rIns="0" bIns="0" rtlCol="0" anchor="ctr"/>
-          <a:lstStyle/>
-          <a:p>
-            <a:pPr algn="l" indent="0" marL="0">
-              <a:buNone/>
-            </a:pPr>
-            <a:r>
-              <a:rPr lang="en-US" sz="1100" dirty="0">
-                <a:solidFill>
-                  <a:srgbClr val="1A1A1A"/>
-                </a:solidFill>
-                <a:latin typeface="Courier New" pitchFamily="34" charset="0"/>
-                <a:ea typeface="Courier New" pitchFamily="34" charset="-122"/>
-                <a:cs typeface="Courier New" pitchFamily="34" charset="-120"/>
-              </a:rPr>
-              <a:t>  </a:t>
-            </a:r>
-            <a:pPr algn="l" indent="0" marL="0">
-              <a:buNone/>
-            </a:pPr>
-            <a:r>
-              <a:rPr lang="en-US" sz="1100" dirty="0">
-                <a:solidFill>
-                  <a:srgbClr val="1A1A1A"/>
-                </a:solidFill>
-                <a:latin typeface="Courier New" pitchFamily="34" charset="0"/>
-                <a:ea typeface="Courier New" pitchFamily="34" charset="-122"/>
-                <a:cs typeface="Courier New" pitchFamily="34" charset="-120"/>
-              </a:rPr>
-              <a:t>fetch</a:t>
-            </a:r>
-            <a:pPr algn="l" indent="0" marL="0">
-              <a:buNone/>
-            </a:pPr>
-            <a:r>
-              <a:rPr lang="en-US" sz="1100" dirty="0">
-                <a:solidFill>
-                  <a:srgbClr val="1A1A1A"/>
-                </a:solidFill>
-                <a:latin typeface="Courier New" pitchFamily="34" charset="0"/>
-                <a:ea typeface="Courier New" pitchFamily="34" charset="-122"/>
-                <a:cs typeface="Courier New" pitchFamily="34" charset="-120"/>
-              </a:rPr>
-              <a:t>  </a:t>
-            </a:r>
-            <a:pPr algn="l" indent="0" marL="0">
-              <a:buNone/>
-            </a:pPr>
-            <a:r>
-              <a:rPr lang="en-US" sz="1100" dirty="0">
-                <a:solidFill>
-                  <a:srgbClr val="1A1A1A"/>
-                </a:solidFill>
-                <a:latin typeface="Courier New" pitchFamily="34" charset="0"/>
-                <a:ea typeface="Courier New" pitchFamily="34" charset="-122"/>
-                <a:cs typeface="Courier New" pitchFamily="34" charset="-120"/>
-              </a:rPr>
-              <a:t>u_if</a:t>
-            </a:r>
-            <a:pPr algn="l" indent="0" marL="0">
-              <a:buNone/>
-            </a:pPr>
-            <a:r>
-              <a:rPr lang="en-US" sz="1100" dirty="0">
-                <a:solidFill>
-                  <a:srgbClr val="1A1A1A"/>
-                </a:solidFill>
-                <a:latin typeface="Courier New" pitchFamily="34" charset="0"/>
-                <a:ea typeface="Courier New" pitchFamily="34" charset="-122"/>
-                <a:cs typeface="Courier New" pitchFamily="34" charset="-120"/>
-              </a:rPr>
-              <a:t> (.</a:t>
-            </a:r>
-            <a:pPr algn="l" indent="0" marL="0">
-              <a:buNone/>
-            </a:pPr>
-            <a:r>
-              <a:rPr lang="en-US" sz="1100" dirty="0">
-                <a:solidFill>
-                  <a:srgbClr val="1A1A1A"/>
-                </a:solidFill>
-                <a:latin typeface="Courier New" pitchFamily="34" charset="0"/>
-                <a:ea typeface="Courier New" pitchFamily="34" charset="-122"/>
-                <a:cs typeface="Courier New" pitchFamily="34" charset="-120"/>
-              </a:rPr>
-              <a:t>clk</a:t>
-            </a:r>
-            <a:pPr algn="l" indent="0" marL="0">
-              <a:buNone/>
-            </a:pPr>
-            <a:r>
-              <a:rPr lang="en-US" sz="1100" dirty="0">
-                <a:solidFill>
-                  <a:srgbClr val="1A1A1A"/>
-                </a:solidFill>
-                <a:latin typeface="Courier New" pitchFamily="34" charset="0"/>
-                <a:ea typeface="Courier New" pitchFamily="34" charset="-122"/>
-                <a:cs typeface="Courier New" pitchFamily="34" charset="-120"/>
-              </a:rPr>
-              <a:t>(</a:t>
-            </a:r>
-            <a:pPr algn="l" indent="0" marL="0">
-              <a:buNone/>
-            </a:pPr>
-            <a:r>
-              <a:rPr lang="en-US" sz="1100" dirty="0">
-                <a:solidFill>
-                  <a:srgbClr val="1A1A1A"/>
-                </a:solidFill>
-                <a:latin typeface="Courier New" pitchFamily="34" charset="0"/>
-                <a:ea typeface="Courier New" pitchFamily="34" charset="-122"/>
-                <a:cs typeface="Courier New" pitchFamily="34" charset="-120"/>
-              </a:rPr>
-              <a:t>clk</a:t>
-            </a:r>
-            <a:pPr algn="l" indent="0" marL="0">
-              <a:buNone/>
-            </a:pPr>
-            <a:r>
-              <a:rPr lang="en-US" sz="1100" dirty="0">
-                <a:solidFill>
-                  <a:srgbClr val="1A1A1A"/>
-                </a:solidFill>
-                <a:latin typeface="Courier New" pitchFamily="34" charset="0"/>
-                <a:ea typeface="Courier New" pitchFamily="34" charset="-122"/>
-                <a:cs typeface="Courier New" pitchFamily="34" charset="-120"/>
-              </a:rPr>
-              <a:t>), .</a:t>
-            </a:r>
-            <a:pPr algn="l" indent="0" marL="0">
-              <a:buNone/>
-            </a:pPr>
-            <a:r>
-              <a:rPr lang="en-US" sz="1100" dirty="0">
-                <a:solidFill>
-                  <a:srgbClr val="1A1A1A"/>
-                </a:solidFill>
-                <a:latin typeface="Courier New" pitchFamily="34" charset="0"/>
-                <a:ea typeface="Courier New" pitchFamily="34" charset="-122"/>
-                <a:cs typeface="Courier New" pitchFamily="34" charset="-120"/>
-              </a:rPr>
-              <a:t>rst</a:t>
-            </a:r>
-            <a:pPr algn="l" indent="0" marL="0">
-              <a:buNone/>
-            </a:pPr>
-            <a:r>
-              <a:rPr lang="en-US" sz="1100" dirty="0">
-                <a:solidFill>
-                  <a:srgbClr val="1A1A1A"/>
-                </a:solidFill>
-                <a:latin typeface="Courier New" pitchFamily="34" charset="0"/>
-                <a:ea typeface="Courier New" pitchFamily="34" charset="-122"/>
-                <a:cs typeface="Courier New" pitchFamily="34" charset="-120"/>
-              </a:rPr>
-              <a:t>(</a:t>
-            </a:r>
-            <a:pPr algn="l" indent="0" marL="0">
-              <a:buNone/>
-            </a:pPr>
-            <a:r>
-              <a:rPr lang="en-US" sz="1100" dirty="0">
-                <a:solidFill>
-                  <a:srgbClr val="1A1A1A"/>
-                </a:solidFill>
-                <a:latin typeface="Courier New" pitchFamily="34" charset="0"/>
-                <a:ea typeface="Courier New" pitchFamily="34" charset="-122"/>
-                <a:cs typeface="Courier New" pitchFamily="34" charset="-120"/>
-              </a:rPr>
-              <a:t>rst</a:t>
-            </a:r>
-            <a:pPr algn="l" indent="0" marL="0">
-              <a:buNone/>
-            </a:pPr>
-            <a:r>
-              <a:rPr lang="en-US" sz="1100" dirty="0">
-                <a:solidFill>
-                  <a:srgbClr val="1A1A1A"/>
-                </a:solidFill>
-                <a:latin typeface="Courier New" pitchFamily="34" charset="0"/>
-                <a:ea typeface="Courier New" pitchFamily="34" charset="-122"/>
-                <a:cs typeface="Courier New" pitchFamily="34" charset="-120"/>
-              </a:rPr>
-              <a:t>), .</a:t>
-            </a:r>
-            <a:pPr algn="l" indent="0" marL="0">
-              <a:buNone/>
-            </a:pPr>
-            <a:r>
-              <a:rPr lang="en-US" sz="1100" dirty="0">
-                <a:solidFill>
-                  <a:srgbClr val="1A1A1A"/>
-                </a:solidFill>
-                <a:latin typeface="Courier New" pitchFamily="34" charset="0"/>
-                <a:ea typeface="Courier New" pitchFamily="34" charset="-122"/>
-                <a:cs typeface="Courier New" pitchFamily="34" charset="-120"/>
-              </a:rPr>
-              <a:t>pc</a:t>
-            </a:r>
-            <a:pPr algn="l" indent="0" marL="0">
-              <a:buNone/>
-            </a:pPr>
-            <a:r>
-              <a:rPr lang="en-US" sz="1100" dirty="0">
-                <a:solidFill>
-                  <a:srgbClr val="1A1A1A"/>
-                </a:solidFill>
-                <a:latin typeface="Courier New" pitchFamily="34" charset="0"/>
-                <a:ea typeface="Courier New" pitchFamily="34" charset="-122"/>
-                <a:cs typeface="Courier New" pitchFamily="34" charset="-120"/>
-              </a:rPr>
-              <a:t>(</a:t>
-            </a:r>
-            <a:pPr algn="l" indent="0" marL="0">
-              <a:buNone/>
-            </a:pPr>
-            <a:r>
-              <a:rPr lang="en-US" sz="1100" dirty="0">
-                <a:solidFill>
-                  <a:srgbClr val="1A1A1A"/>
-                </a:solidFill>
-                <a:latin typeface="Courier New" pitchFamily="34" charset="0"/>
-                <a:ea typeface="Courier New" pitchFamily="34" charset="-122"/>
-                <a:cs typeface="Courier New" pitchFamily="34" charset="-120"/>
-              </a:rPr>
-              <a:t>pc</a:t>
-            </a:r>
-            <a:pPr algn="l" indent="0" marL="0">
-              <a:buNone/>
-            </a:pPr>
-            <a:r>
-              <a:rPr lang="en-US" sz="1100" dirty="0">
-                <a:solidFill>
-                  <a:srgbClr val="1A1A1A"/>
-                </a:solidFill>
-                <a:latin typeface="Courier New" pitchFamily="34" charset="0"/>
-                <a:ea typeface="Courier New" pitchFamily="34" charset="-122"/>
-                <a:cs typeface="Courier New" pitchFamily="34" charset="-120"/>
-              </a:rPr>
-              <a:t>), .</a:t>
-            </a:r>
-            <a:pPr algn="l" indent="0" marL="0">
-              <a:buNone/>
-            </a:pPr>
-            <a:r>
-              <a:rPr lang="en-US" sz="1100" dirty="0">
-                <a:solidFill>
-                  <a:srgbClr val="1A1A1A"/>
-                </a:solidFill>
-                <a:latin typeface="Courier New" pitchFamily="34" charset="0"/>
-                <a:ea typeface="Courier New" pitchFamily="34" charset="-122"/>
-                <a:cs typeface="Courier New" pitchFamily="34" charset="-120"/>
-              </a:rPr>
-              <a:t>instr</a:t>
-            </a:r>
-            <a:pPr algn="l" indent="0" marL="0">
-              <a:buNone/>
-            </a:pPr>
-            <a:r>
-              <a:rPr lang="en-US" sz="1100" dirty="0">
-                <a:solidFill>
-                  <a:srgbClr val="1A1A1A"/>
-                </a:solidFill>
-                <a:latin typeface="Courier New" pitchFamily="34" charset="0"/>
-                <a:ea typeface="Courier New" pitchFamily="34" charset="-122"/>
-                <a:cs typeface="Courier New" pitchFamily="34" charset="-120"/>
-              </a:rPr>
-              <a:t>(</a:t>
-            </a:r>
-            <a:pPr algn="l" indent="0" marL="0">
-              <a:buNone/>
-            </a:pPr>
-            <a:r>
-              <a:rPr lang="en-US" sz="1100" dirty="0">
-                <a:solidFill>
-                  <a:srgbClr val="1A1A1A"/>
-                </a:solidFill>
-                <a:latin typeface="Courier New" pitchFamily="34" charset="0"/>
-                <a:ea typeface="Courier New" pitchFamily="34" charset="-122"/>
-                <a:cs typeface="Courier New" pitchFamily="34" charset="-120"/>
-              </a:rPr>
-              <a:t>instr</a:t>
-            </a:r>
-            <a:pPr algn="l" indent="0" marL="0">
-              <a:buNone/>
-            </a:pPr>
-            <a:r>
-              <a:rPr lang="en-US" sz="1100" dirty="0">
-                <a:solidFill>
-                  <a:srgbClr val="1A1A1A"/>
-                </a:solidFill>
-                <a:latin typeface="Courier New" pitchFamily="34" charset="0"/>
-                <a:ea typeface="Courier New" pitchFamily="34" charset="-122"/>
-                <a:cs typeface="Courier New" pitchFamily="34" charset="-120"/>
-              </a:rPr>
-              <a:t>));</a:t>
-            </a:r>
-            <a:endParaRPr lang="en-US" sz="1100" dirty="0"/>
-          </a:p>
-        </p:txBody>
-      </p:sp>
-      <p:sp>
-        <p:nvSpPr>
-          <p:cNvPr id="33" name="Text 31"/>
-          <p:cNvSpPr/>
-          <p:nvPr/>
-        </p:nvSpPr>
-        <p:spPr>
-          <a:xfrm>
-            <a:off x="621792" y="5715000"/>
-            <a:ext cx="310896" cy="214884"/>
-          </a:xfrm>
-          <a:prstGeom prst="rect">
-            <a:avLst/>
-          </a:prstGeom>
-          <a:noFill/>
-          <a:ln/>
-        </p:spPr>
-        <p:txBody>
-          <a:bodyPr wrap="square" lIns="0" tIns="0" rIns="0" bIns="0" rtlCol="0" anchor="ctr"/>
-          <a:lstStyle/>
-          <a:p>
-            <a:pPr algn="r" indent="0" marL="0">
-              <a:buNone/>
-            </a:pPr>
-            <a:r>
-              <a:rPr lang="en-US" sz="1100" dirty="0">
-                <a:solidFill>
-                  <a:srgbClr val="9AA0A6"/>
-                </a:solidFill>
-                <a:latin typeface="Courier New" pitchFamily="34" charset="0"/>
-                <a:ea typeface="Courier New" pitchFamily="34" charset="-122"/>
-                <a:cs typeface="Courier New" pitchFamily="34" charset="-120"/>
-              </a:rPr>
-              <a:t>5</a:t>
-            </a:r>
-            <a:endParaRPr lang="en-US" sz="1100" dirty="0"/>
-          </a:p>
-        </p:txBody>
-      </p:sp>
-      <p:sp>
-        <p:nvSpPr>
-          <p:cNvPr id="34" name="Text 32"/>
-          <p:cNvSpPr/>
-          <p:nvPr/>
-        </p:nvSpPr>
-        <p:spPr>
-          <a:xfrm>
-            <a:off x="1042416" y="5715000"/>
-            <a:ext cx="10472623" cy="214884"/>
-          </a:xfrm>
-          <a:prstGeom prst="rect">
-            <a:avLst/>
-          </a:prstGeom>
-          <a:noFill/>
-          <a:ln/>
-        </p:spPr>
-        <p:txBody>
-          <a:bodyPr wrap="square" lIns="0" tIns="0" rIns="0" bIns="0" rtlCol="0" anchor="ctr"/>
-          <a:lstStyle/>
-          <a:p>
-            <a:pPr algn="l" indent="0" marL="0">
-              <a:buNone/>
-            </a:pPr>
-            <a:r>
-              <a:rPr lang="en-US" sz="1100" dirty="0">
-                <a:solidFill>
-                  <a:srgbClr val="1A1A1A"/>
-                </a:solidFill>
-                <a:latin typeface="Courier New" pitchFamily="34" charset="0"/>
-                <a:ea typeface="Courier New" pitchFamily="34" charset="-122"/>
-                <a:cs typeface="Courier New" pitchFamily="34" charset="-120"/>
-              </a:rPr>
-              <a:t>  </a:t>
-            </a:r>
-            <a:pPr algn="l" indent="0" marL="0">
-              <a:buNone/>
-            </a:pPr>
-            <a:r>
-              <a:rPr lang="en-US" sz="1100" dirty="0">
-                <a:solidFill>
-                  <a:srgbClr val="1A1A1A"/>
-                </a:solidFill>
-                <a:latin typeface="Courier New" pitchFamily="34" charset="0"/>
-                <a:ea typeface="Courier New" pitchFamily="34" charset="-122"/>
-                <a:cs typeface="Courier New" pitchFamily="34" charset="-120"/>
-              </a:rPr>
-              <a:t>decode</a:t>
-            </a:r>
-            <a:pPr algn="l" indent="0" marL="0">
-              <a:buNone/>
-            </a:pPr>
-            <a:r>
-              <a:rPr lang="en-US" sz="1100" dirty="0">
-                <a:solidFill>
-                  <a:srgbClr val="1A1A1A"/>
-                </a:solidFill>
-                <a:latin typeface="Courier New" pitchFamily="34" charset="0"/>
-                <a:ea typeface="Courier New" pitchFamily="34" charset="-122"/>
-                <a:cs typeface="Courier New" pitchFamily="34" charset="-120"/>
-              </a:rPr>
-              <a:t> </a:t>
-            </a:r>
-            <a:pPr algn="l" indent="0" marL="0">
-              <a:buNone/>
-            </a:pPr>
-            <a:r>
-              <a:rPr lang="en-US" sz="1100" dirty="0">
-                <a:solidFill>
-                  <a:srgbClr val="1A1A1A"/>
-                </a:solidFill>
-                <a:latin typeface="Courier New" pitchFamily="34" charset="0"/>
-                <a:ea typeface="Courier New" pitchFamily="34" charset="-122"/>
-                <a:cs typeface="Courier New" pitchFamily="34" charset="-120"/>
-              </a:rPr>
-              <a:t>u_id</a:t>
-            </a:r>
-            <a:pPr algn="l" indent="0" marL="0">
-              <a:buNone/>
-            </a:pPr>
-            <a:r>
-              <a:rPr lang="en-US" sz="1100" dirty="0">
-                <a:solidFill>
-                  <a:srgbClr val="1A1A1A"/>
-                </a:solidFill>
-                <a:latin typeface="Courier New" pitchFamily="34" charset="0"/>
-                <a:ea typeface="Courier New" pitchFamily="34" charset="-122"/>
-                <a:cs typeface="Courier New" pitchFamily="34" charset="-120"/>
-              </a:rPr>
-              <a:t> (.</a:t>
-            </a:r>
-            <a:pPr algn="l" indent="0" marL="0">
-              <a:buNone/>
-            </a:pPr>
-            <a:r>
-              <a:rPr lang="en-US" sz="1100" dirty="0">
-                <a:solidFill>
-                  <a:srgbClr val="1A1A1A"/>
-                </a:solidFill>
-                <a:latin typeface="Courier New" pitchFamily="34" charset="0"/>
-                <a:ea typeface="Courier New" pitchFamily="34" charset="-122"/>
-                <a:cs typeface="Courier New" pitchFamily="34" charset="-120"/>
-              </a:rPr>
-              <a:t>instr</a:t>
-            </a:r>
-            <a:pPr algn="l" indent="0" marL="0">
-              <a:buNone/>
-            </a:pPr>
-            <a:r>
-              <a:rPr lang="en-US" sz="1100" dirty="0">
-                <a:solidFill>
-                  <a:srgbClr val="1A1A1A"/>
-                </a:solidFill>
-                <a:latin typeface="Courier New" pitchFamily="34" charset="0"/>
-                <a:ea typeface="Courier New" pitchFamily="34" charset="-122"/>
-                <a:cs typeface="Courier New" pitchFamily="34" charset="-120"/>
-              </a:rPr>
-              <a:t>(</a:t>
-            </a:r>
-            <a:pPr algn="l" indent="0" marL="0">
-              <a:buNone/>
-            </a:pPr>
-            <a:r>
-              <a:rPr lang="en-US" sz="1100" dirty="0">
-                <a:solidFill>
-                  <a:srgbClr val="1A1A1A"/>
-                </a:solidFill>
-                <a:latin typeface="Courier New" pitchFamily="34" charset="0"/>
-                <a:ea typeface="Courier New" pitchFamily="34" charset="-122"/>
-                <a:cs typeface="Courier New" pitchFamily="34" charset="-120"/>
-              </a:rPr>
-              <a:t>instr</a:t>
-            </a:r>
-            <a:pPr algn="l" indent="0" marL="0">
-              <a:buNone/>
-            </a:pPr>
-            <a:r>
-              <a:rPr lang="en-US" sz="1100" dirty="0">
-                <a:solidFill>
-                  <a:srgbClr val="1A1A1A"/>
-                </a:solidFill>
-                <a:latin typeface="Courier New" pitchFamily="34" charset="0"/>
-                <a:ea typeface="Courier New" pitchFamily="34" charset="-122"/>
-                <a:cs typeface="Courier New" pitchFamily="34" charset="-120"/>
-              </a:rPr>
-              <a:t>), .</a:t>
-            </a:r>
-            <a:pPr algn="l" indent="0" marL="0">
-              <a:buNone/>
-            </a:pPr>
-            <a:r>
-              <a:rPr lang="en-US" sz="1100" dirty="0">
-                <a:solidFill>
-                  <a:srgbClr val="1A1A1A"/>
-                </a:solidFill>
-                <a:latin typeface="Courier New" pitchFamily="34" charset="0"/>
-                <a:ea typeface="Courier New" pitchFamily="34" charset="-122"/>
-                <a:cs typeface="Courier New" pitchFamily="34" charset="-120"/>
-              </a:rPr>
-              <a:t>imm</a:t>
-            </a:r>
-            <a:pPr algn="l" indent="0" marL="0">
-              <a:buNone/>
-            </a:pPr>
-            <a:r>
-              <a:rPr lang="en-US" sz="1100" dirty="0">
-                <a:solidFill>
-                  <a:srgbClr val="1A1A1A"/>
-                </a:solidFill>
-                <a:latin typeface="Courier New" pitchFamily="34" charset="0"/>
-                <a:ea typeface="Courier New" pitchFamily="34" charset="-122"/>
-                <a:cs typeface="Courier New" pitchFamily="34" charset="-120"/>
-              </a:rPr>
-              <a:t>(</a:t>
-            </a:r>
-            <a:pPr algn="l" indent="0" marL="0">
-              <a:buNone/>
-            </a:pPr>
-            <a:r>
-              <a:rPr lang="en-US" sz="1100" dirty="0">
-                <a:solidFill>
-                  <a:srgbClr val="1A1A1A"/>
-                </a:solidFill>
-                <a:latin typeface="Courier New" pitchFamily="34" charset="0"/>
-                <a:ea typeface="Courier New" pitchFamily="34" charset="-122"/>
-                <a:cs typeface="Courier New" pitchFamily="34" charset="-120"/>
-              </a:rPr>
-              <a:t>imm</a:t>
-            </a:r>
-            <a:pPr algn="l" indent="0" marL="0">
-              <a:buNone/>
-            </a:pPr>
-            <a:r>
-              <a:rPr lang="en-US" sz="1100" dirty="0">
-                <a:solidFill>
-                  <a:srgbClr val="1A1A1A"/>
-                </a:solidFill>
-                <a:latin typeface="Courier New" pitchFamily="34" charset="0"/>
-                <a:ea typeface="Courier New" pitchFamily="34" charset="-122"/>
-                <a:cs typeface="Courier New" pitchFamily="34" charset="-120"/>
-              </a:rPr>
-              <a:t>), .</a:t>
-            </a:r>
-            <a:pPr algn="l" indent="0" marL="0">
-              <a:buNone/>
-            </a:pPr>
-            <a:r>
-              <a:rPr lang="en-US" sz="1100" dirty="0">
-                <a:solidFill>
-                  <a:srgbClr val="1A1A1A"/>
-                </a:solidFill>
-                <a:latin typeface="Courier New" pitchFamily="34" charset="0"/>
-                <a:ea typeface="Courier New" pitchFamily="34" charset="-122"/>
-                <a:cs typeface="Courier New" pitchFamily="34" charset="-120"/>
-              </a:rPr>
-              <a:t>ctrl</a:t>
-            </a:r>
-            <a:pPr algn="l" indent="0" marL="0">
-              <a:buNone/>
-            </a:pPr>
-            <a:r>
-              <a:rPr lang="en-US" sz="1100" dirty="0">
-                <a:solidFill>
-                  <a:srgbClr val="1A1A1A"/>
-                </a:solidFill>
-                <a:latin typeface="Courier New" pitchFamily="34" charset="0"/>
-                <a:ea typeface="Courier New" pitchFamily="34" charset="-122"/>
-                <a:cs typeface="Courier New" pitchFamily="34" charset="-120"/>
-              </a:rPr>
-              <a:t>(</a:t>
-            </a:r>
-            <a:pPr algn="l" indent="0" marL="0">
-              <a:buNone/>
-            </a:pPr>
-            <a:r>
-              <a:rPr lang="en-US" sz="1100" dirty="0">
-                <a:solidFill>
-                  <a:srgbClr val="1A1A1A"/>
-                </a:solidFill>
-                <a:latin typeface="Courier New" pitchFamily="34" charset="0"/>
-                <a:ea typeface="Courier New" pitchFamily="34" charset="-122"/>
-                <a:cs typeface="Courier New" pitchFamily="34" charset="-120"/>
-              </a:rPr>
-              <a:t>ctrl</a:t>
-            </a:r>
-            <a:pPr algn="l" indent="0" marL="0">
-              <a:buNone/>
-            </a:pPr>
-            <a:r>
-              <a:rPr lang="en-US" sz="1100" dirty="0">
-                <a:solidFill>
-                  <a:srgbClr val="1A1A1A"/>
-                </a:solidFill>
-                <a:latin typeface="Courier New" pitchFamily="34" charset="0"/>
-                <a:ea typeface="Courier New" pitchFamily="34" charset="-122"/>
-                <a:cs typeface="Courier New" pitchFamily="34" charset="-120"/>
-              </a:rPr>
-              <a:t>));</a:t>
-            </a:r>
-            <a:endParaRPr lang="en-US" sz="1100" dirty="0"/>
-          </a:p>
-        </p:txBody>
-      </p:sp>
-      <p:sp>
-        <p:nvSpPr>
-          <p:cNvPr id="35" name="Text 33"/>
-          <p:cNvSpPr/>
-          <p:nvPr/>
-        </p:nvSpPr>
-        <p:spPr>
-          <a:xfrm>
-            <a:off x="621792" y="5929884"/>
-            <a:ext cx="310896" cy="214884"/>
-          </a:xfrm>
-          <a:prstGeom prst="rect">
-            <a:avLst/>
-          </a:prstGeom>
-          <a:noFill/>
-          <a:ln/>
-        </p:spPr>
-        <p:txBody>
-          <a:bodyPr wrap="square" lIns="0" tIns="0" rIns="0" bIns="0" rtlCol="0" anchor="ctr"/>
-          <a:lstStyle/>
-          <a:p>
-            <a:pPr algn="r" indent="0" marL="0">
-              <a:buNone/>
-            </a:pPr>
-            <a:r>
-              <a:rPr lang="en-US" sz="1100" dirty="0">
-                <a:solidFill>
-                  <a:srgbClr val="9AA0A6"/>
-                </a:solidFill>
-                <a:latin typeface="Courier New" pitchFamily="34" charset="0"/>
-                <a:ea typeface="Courier New" pitchFamily="34" charset="-122"/>
-                <a:cs typeface="Courier New" pitchFamily="34" charset="-120"/>
-              </a:rPr>
-              <a:t>6</a:t>
-            </a:r>
-            <a:endParaRPr lang="en-US" sz="1100" dirty="0"/>
-          </a:p>
-        </p:txBody>
-      </p:sp>
-      <p:sp>
-        <p:nvSpPr>
-          <p:cNvPr id="36" name="Text 34"/>
-          <p:cNvSpPr/>
-          <p:nvPr/>
-        </p:nvSpPr>
-        <p:spPr>
-          <a:xfrm>
-            <a:off x="1042416" y="5929884"/>
-            <a:ext cx="10472623" cy="214884"/>
-          </a:xfrm>
-          <a:prstGeom prst="rect">
-            <a:avLst/>
-          </a:prstGeom>
-          <a:noFill/>
-          <a:ln/>
-        </p:spPr>
-        <p:txBody>
-          <a:bodyPr wrap="square" lIns="0" tIns="0" rIns="0" bIns="0" rtlCol="0" anchor="ctr"/>
-          <a:lstStyle/>
-          <a:p>
-            <a:pPr algn="l" indent="0" marL="0">
-              <a:buNone/>
-            </a:pPr>
-            <a:r>
-              <a:rPr lang="en-US" sz="1100" dirty="0">
-                <a:solidFill>
-                  <a:srgbClr val="1A1A1A"/>
-                </a:solidFill>
-                <a:latin typeface="Courier New" pitchFamily="34" charset="0"/>
-                <a:ea typeface="Courier New" pitchFamily="34" charset="-122"/>
-                <a:cs typeface="Courier New" pitchFamily="34" charset="-120"/>
-              </a:rPr>
-              <a:t>  </a:t>
-            </a:r>
-            <a:pPr algn="l" indent="0" marL="0">
-              <a:buNone/>
-            </a:pPr>
-            <a:r>
-              <a:rPr lang="en-US" sz="1100" dirty="0">
-                <a:solidFill>
-                  <a:srgbClr val="1A1A1A"/>
-                </a:solidFill>
-                <a:latin typeface="Courier New" pitchFamily="34" charset="0"/>
-                <a:ea typeface="Courier New" pitchFamily="34" charset="-122"/>
-                <a:cs typeface="Courier New" pitchFamily="34" charset="-120"/>
-              </a:rPr>
-              <a:t>execute</a:t>
-            </a:r>
-            <a:pPr algn="l" indent="0" marL="0">
-              <a:buNone/>
-            </a:pPr>
-            <a:r>
-              <a:rPr lang="en-US" sz="1100" dirty="0">
-                <a:solidFill>
-                  <a:srgbClr val="1A1A1A"/>
-                </a:solidFill>
-                <a:latin typeface="Courier New" pitchFamily="34" charset="0"/>
-                <a:ea typeface="Courier New" pitchFamily="34" charset="-122"/>
-                <a:cs typeface="Courier New" pitchFamily="34" charset="-120"/>
-              </a:rPr>
-              <a:t> </a:t>
-            </a:r>
-            <a:pPr algn="l" indent="0" marL="0">
-              <a:buNone/>
-            </a:pPr>
-            <a:r>
-              <a:rPr lang="en-US" sz="1100" dirty="0">
-                <a:solidFill>
-                  <a:srgbClr val="1A1A1A"/>
-                </a:solidFill>
-                <a:latin typeface="Courier New" pitchFamily="34" charset="0"/>
-                <a:ea typeface="Courier New" pitchFamily="34" charset="-122"/>
-                <a:cs typeface="Courier New" pitchFamily="34" charset="-120"/>
-              </a:rPr>
-              <a:t>u_ex</a:t>
-            </a:r>
-            <a:pPr algn="l" indent="0" marL="0">
-              <a:buNone/>
-            </a:pPr>
-            <a:r>
-              <a:rPr lang="en-US" sz="1100" dirty="0">
-                <a:solidFill>
-                  <a:srgbClr val="1A1A1A"/>
-                </a:solidFill>
-                <a:latin typeface="Courier New" pitchFamily="34" charset="0"/>
-                <a:ea typeface="Courier New" pitchFamily="34" charset="-122"/>
-                <a:cs typeface="Courier New" pitchFamily="34" charset="-120"/>
-              </a:rPr>
-              <a:t>(.</a:t>
-            </a:r>
-            <a:pPr algn="l" indent="0" marL="0">
-              <a:buNone/>
-            </a:pPr>
-            <a:r>
-              <a:rPr lang="en-US" sz="1100" dirty="0">
-                <a:solidFill>
-                  <a:srgbClr val="1A1A1A"/>
-                </a:solidFill>
-                <a:latin typeface="Courier New" pitchFamily="34" charset="0"/>
-                <a:ea typeface="Courier New" pitchFamily="34" charset="-122"/>
-                <a:cs typeface="Courier New" pitchFamily="34" charset="-120"/>
-              </a:rPr>
-              <a:t>a</a:t>
-            </a:r>
-            <a:pPr algn="l" indent="0" marL="0">
-              <a:buNone/>
-            </a:pPr>
-            <a:r>
-              <a:rPr lang="en-US" sz="1100" dirty="0">
-                <a:solidFill>
-                  <a:srgbClr val="1A1A1A"/>
-                </a:solidFill>
-                <a:latin typeface="Courier New" pitchFamily="34" charset="0"/>
-                <a:ea typeface="Courier New" pitchFamily="34" charset="-122"/>
-                <a:cs typeface="Courier New" pitchFamily="34" charset="-120"/>
-              </a:rPr>
-              <a:t>(</a:t>
-            </a:r>
-            <a:pPr algn="l" indent="0" marL="0">
-              <a:buNone/>
-            </a:pPr>
-            <a:r>
-              <a:rPr lang="en-US" sz="1100" dirty="0">
-                <a:solidFill>
-                  <a:srgbClr val="1A1A1A"/>
-                </a:solidFill>
-                <a:latin typeface="Courier New" pitchFamily="34" charset="0"/>
-                <a:ea typeface="Courier New" pitchFamily="34" charset="-122"/>
-                <a:cs typeface="Courier New" pitchFamily="34" charset="-120"/>
-              </a:rPr>
-              <a:t>rs1</a:t>
-            </a:r>
-            <a:pPr algn="l" indent="0" marL="0">
-              <a:buNone/>
-            </a:pPr>
-            <a:r>
-              <a:rPr lang="en-US" sz="1100" dirty="0">
-                <a:solidFill>
-                  <a:srgbClr val="1A1A1A"/>
-                </a:solidFill>
-                <a:latin typeface="Courier New" pitchFamily="34" charset="0"/>
-                <a:ea typeface="Courier New" pitchFamily="34" charset="-122"/>
-                <a:cs typeface="Courier New" pitchFamily="34" charset="-120"/>
-              </a:rPr>
-              <a:t>), .</a:t>
-            </a:r>
-            <a:pPr algn="l" indent="0" marL="0">
-              <a:buNone/>
-            </a:pPr>
-            <a:r>
-              <a:rPr lang="en-US" sz="1100" dirty="0">
-                <a:solidFill>
-                  <a:srgbClr val="1A1A1A"/>
-                </a:solidFill>
-                <a:latin typeface="Courier New" pitchFamily="34" charset="0"/>
-                <a:ea typeface="Courier New" pitchFamily="34" charset="-122"/>
-                <a:cs typeface="Courier New" pitchFamily="34" charset="-120"/>
-              </a:rPr>
-              <a:t>b</a:t>
-            </a:r>
-            <a:pPr algn="l" indent="0" marL="0">
-              <a:buNone/>
-            </a:pPr>
-            <a:r>
-              <a:rPr lang="en-US" sz="1100" dirty="0">
-                <a:solidFill>
-                  <a:srgbClr val="1A1A1A"/>
-                </a:solidFill>
-                <a:latin typeface="Courier New" pitchFamily="34" charset="0"/>
-                <a:ea typeface="Courier New" pitchFamily="34" charset="-122"/>
-                <a:cs typeface="Courier New" pitchFamily="34" charset="-120"/>
-              </a:rPr>
-              <a:t>(</a:t>
-            </a:r>
-            <a:pPr algn="l" indent="0" marL="0">
-              <a:buNone/>
-            </a:pPr>
-            <a:r>
-              <a:rPr lang="en-US" sz="1100" dirty="0">
-                <a:solidFill>
-                  <a:srgbClr val="1A1A1A"/>
-                </a:solidFill>
-                <a:latin typeface="Courier New" pitchFamily="34" charset="0"/>
-                <a:ea typeface="Courier New" pitchFamily="34" charset="-122"/>
-                <a:cs typeface="Courier New" pitchFamily="34" charset="-120"/>
-              </a:rPr>
-              <a:t>rs2</a:t>
-            </a:r>
-            <a:pPr algn="l" indent="0" marL="0">
-              <a:buNone/>
-            </a:pPr>
-            <a:r>
-              <a:rPr lang="en-US" sz="1100" dirty="0">
-                <a:solidFill>
-                  <a:srgbClr val="1A1A1A"/>
-                </a:solidFill>
-                <a:latin typeface="Courier New" pitchFamily="34" charset="0"/>
-                <a:ea typeface="Courier New" pitchFamily="34" charset="-122"/>
-                <a:cs typeface="Courier New" pitchFamily="34" charset="-120"/>
-              </a:rPr>
-              <a:t>), .</a:t>
-            </a:r>
-            <a:pPr algn="l" indent="0" marL="0">
-              <a:buNone/>
-            </a:pPr>
-            <a:r>
-              <a:rPr lang="en-US" sz="1100" dirty="0">
-                <a:solidFill>
-                  <a:srgbClr val="1A1A1A"/>
-                </a:solidFill>
-                <a:latin typeface="Courier New" pitchFamily="34" charset="0"/>
-                <a:ea typeface="Courier New" pitchFamily="34" charset="-122"/>
-                <a:cs typeface="Courier New" pitchFamily="34" charset="-120"/>
-              </a:rPr>
-              <a:t>imm</a:t>
-            </a:r>
-            <a:pPr algn="l" indent="0" marL="0">
-              <a:buNone/>
-            </a:pPr>
-            <a:r>
-              <a:rPr lang="en-US" sz="1100" dirty="0">
-                <a:solidFill>
-                  <a:srgbClr val="1A1A1A"/>
-                </a:solidFill>
-                <a:latin typeface="Courier New" pitchFamily="34" charset="0"/>
-                <a:ea typeface="Courier New" pitchFamily="34" charset="-122"/>
-                <a:cs typeface="Courier New" pitchFamily="34" charset="-120"/>
-              </a:rPr>
-              <a:t>(</a:t>
-            </a:r>
-            <a:pPr algn="l" indent="0" marL="0">
-              <a:buNone/>
-            </a:pPr>
-            <a:r>
-              <a:rPr lang="en-US" sz="1100" dirty="0">
-                <a:solidFill>
-                  <a:srgbClr val="1A1A1A"/>
-                </a:solidFill>
-                <a:latin typeface="Courier New" pitchFamily="34" charset="0"/>
-                <a:ea typeface="Courier New" pitchFamily="34" charset="-122"/>
-                <a:cs typeface="Courier New" pitchFamily="34" charset="-120"/>
-              </a:rPr>
-              <a:t>imm</a:t>
-            </a:r>
-            <a:pPr algn="l" indent="0" marL="0">
-              <a:buNone/>
-            </a:pPr>
-            <a:r>
-              <a:rPr lang="en-US" sz="1100" dirty="0">
-                <a:solidFill>
-                  <a:srgbClr val="1A1A1A"/>
-                </a:solidFill>
-                <a:latin typeface="Courier New" pitchFamily="34" charset="0"/>
-                <a:ea typeface="Courier New" pitchFamily="34" charset="-122"/>
-                <a:cs typeface="Courier New" pitchFamily="34" charset="-120"/>
-              </a:rPr>
-              <a:t>), .</a:t>
-            </a:r>
-            <a:pPr algn="l" indent="0" marL="0">
-              <a:buNone/>
-            </a:pPr>
-            <a:r>
-              <a:rPr lang="en-US" sz="1100" dirty="0">
-                <a:solidFill>
-                  <a:srgbClr val="1A1A1A"/>
-                </a:solidFill>
-                <a:latin typeface="Courier New" pitchFamily="34" charset="0"/>
-                <a:ea typeface="Courier New" pitchFamily="34" charset="-122"/>
-                <a:cs typeface="Courier New" pitchFamily="34" charset="-120"/>
-              </a:rPr>
-              <a:t>y</a:t>
-            </a:r>
-            <a:pPr algn="l" indent="0" marL="0">
-              <a:buNone/>
-            </a:pPr>
-            <a:r>
-              <a:rPr lang="en-US" sz="1100" dirty="0">
-                <a:solidFill>
-                  <a:srgbClr val="1A1A1A"/>
-                </a:solidFill>
-                <a:latin typeface="Courier New" pitchFamily="34" charset="0"/>
-                <a:ea typeface="Courier New" pitchFamily="34" charset="-122"/>
-                <a:cs typeface="Courier New" pitchFamily="34" charset="-120"/>
-              </a:rPr>
-              <a:t>(</a:t>
-            </a:r>
-            <a:pPr algn="l" indent="0" marL="0">
-              <a:buNone/>
-            </a:pPr>
-            <a:r>
-              <a:rPr lang="en-US" sz="1100" dirty="0">
-                <a:solidFill>
-                  <a:srgbClr val="1A1A1A"/>
-                </a:solidFill>
-                <a:latin typeface="Courier New" pitchFamily="34" charset="0"/>
-                <a:ea typeface="Courier New" pitchFamily="34" charset="-122"/>
-                <a:cs typeface="Courier New" pitchFamily="34" charset="-120"/>
-              </a:rPr>
-              <a:t>alu_y</a:t>
-            </a:r>
-            <a:pPr algn="l" indent="0" marL="0">
-              <a:buNone/>
-            </a:pPr>
-            <a:r>
-              <a:rPr lang="en-US" sz="1100" dirty="0">
-                <a:solidFill>
-                  <a:srgbClr val="1A1A1A"/>
-                </a:solidFill>
-                <a:latin typeface="Courier New" pitchFamily="34" charset="0"/>
-                <a:ea typeface="Courier New" pitchFamily="34" charset="-122"/>
-                <a:cs typeface="Courier New" pitchFamily="34" charset="-120"/>
-              </a:rPr>
-              <a:t>));</a:t>
-            </a:r>
-            <a:endParaRPr lang="en-US" sz="1100" dirty="0"/>
-          </a:p>
-        </p:txBody>
-      </p:sp>
-      <p:sp>
-        <p:nvSpPr>
-          <p:cNvPr id="37" name="Text 35"/>
-          <p:cNvSpPr/>
-          <p:nvPr/>
-        </p:nvSpPr>
-        <p:spPr>
-          <a:xfrm>
-            <a:off x="621792" y="6144768"/>
-            <a:ext cx="310896" cy="214884"/>
-          </a:xfrm>
-          <a:prstGeom prst="rect">
-            <a:avLst/>
-          </a:prstGeom>
-          <a:noFill/>
-          <a:ln/>
-        </p:spPr>
-        <p:txBody>
-          <a:bodyPr wrap="square" lIns="0" tIns="0" rIns="0" bIns="0" rtlCol="0" anchor="ctr"/>
-          <a:lstStyle/>
-          <a:p>
-            <a:pPr algn="r" indent="0" marL="0">
-              <a:buNone/>
-            </a:pPr>
-            <a:r>
-              <a:rPr lang="en-US" sz="1100" dirty="0">
-                <a:solidFill>
-                  <a:srgbClr val="9AA0A6"/>
-                </a:solidFill>
-                <a:latin typeface="Courier New" pitchFamily="34" charset="0"/>
-                <a:ea typeface="Courier New" pitchFamily="34" charset="-122"/>
-                <a:cs typeface="Courier New" pitchFamily="34" charset="-120"/>
-              </a:rPr>
-              <a:t>7</a:t>
-            </a:r>
-            <a:endParaRPr lang="en-US" sz="1100" dirty="0"/>
-          </a:p>
-        </p:txBody>
-      </p:sp>
-      <p:sp>
-        <p:nvSpPr>
-          <p:cNvPr id="38" name="Text 36"/>
-          <p:cNvSpPr/>
-          <p:nvPr/>
-        </p:nvSpPr>
-        <p:spPr>
-          <a:xfrm>
-            <a:off x="1042416" y="6144768"/>
-            <a:ext cx="10472623" cy="214884"/>
-          </a:xfrm>
-          <a:prstGeom prst="rect">
-            <a:avLst/>
-          </a:prstGeom>
-          <a:noFill/>
-          <a:ln/>
-        </p:spPr>
-        <p:txBody>
-          <a:bodyPr wrap="square" lIns="0" tIns="0" rIns="0" bIns="0" rtlCol="0" anchor="ctr"/>
-          <a:lstStyle/>
-          <a:p>
-            <a:pPr algn="l" indent="0" marL="0">
-              <a:buNone/>
-            </a:pPr>
-            <a:r>
-              <a:rPr lang="en-US" sz="1100" dirty="0">
-                <a:solidFill>
-                  <a:srgbClr val="1A56DB"/>
-                </a:solidFill>
-                <a:latin typeface="Courier New" pitchFamily="34" charset="0"/>
-                <a:ea typeface="Courier New" pitchFamily="34" charset="-122"/>
-                <a:cs typeface="Courier New" pitchFamily="34" charset="-120"/>
-              </a:rPr>
               <a:t>endmodule</a:t>
             </a:r>
             <a:endParaRPr lang="en-US" sz="1100" dirty="0"/>
@@ -9380,6 +7789,13 @@
           </a:solidFill>
           <a:ln/>
         </p:spPr>
+        <p:txBody>
+          <a:bodyPr/>
+          <a:lstStyle/>
+          <a:p>
+            <a:endParaRPr lang="en-US"/>
+          </a:p>
+        </p:txBody>
       </p:sp>
       <p:sp>
         <p:nvSpPr>
@@ -9402,7 +7818,7 @@
           <a:bodyPr wrap="square" rtlCol="0" anchor="ctr"/>
           <a:lstStyle/>
           <a:p>
-            <a:pPr algn="ctr" indent="0" marL="0">
+            <a:pPr marL="0" indent="0" algn="ctr">
               <a:buNone/>
             </a:pPr>
             <a:r>
@@ -9441,7 +7857,7 @@
           <a:bodyPr wrap="square" rtlCol="0" anchor="ctr"/>
           <a:lstStyle/>
           <a:p>
-            <a:pPr algn="r" indent="0" marL="0">
+            <a:pPr marL="0" indent="0" algn="r">
               <a:buNone/>
             </a:pPr>
             <a:r>
@@ -9475,6 +7891,7 @@
         <a:solidFill>
           <a:srgbClr val="FFFFFF"/>
         </a:solidFill>
+        <a:effectLst/>
       </p:bgPr>
     </p:bg>
     <p:spTree>
@@ -9514,7 +7931,7 @@
           </a:bodyPr>
           <a:lstStyle/>
           <a:p>
-            <a:pPr algn="l" indent="0" marL="0">
+            <a:pPr marL="0" indent="0" algn="l">
               <a:buNone/>
             </a:pPr>
             <a:r>
@@ -9528,9 +7945,6 @@
               </a:rPr>
               <a:t>How to Read RTL</a:t>
             </a:r>
-            <a:pPr algn="l" indent="0" marL="0">
-              <a:buNone/>
-            </a:pPr>
             <a:r>
               <a:rPr lang="en-US" sz="3300" b="1" dirty="0">
                 <a:solidFill>
@@ -9542,9 +7956,6 @@
               </a:rPr>
               <a:t>   |   </a:t>
             </a:r>
-            <a:pPr algn="l" indent="0" marL="0">
-              <a:buNone/>
-            </a:pPr>
             <a:r>
               <a:rPr lang="en-US" sz="3300" b="1" dirty="0">
                 <a:solidFill>
@@ -9579,6 +7990,13 @@
           </a:solidFill>
           <a:ln/>
         </p:spPr>
+        <p:txBody>
+          <a:bodyPr/>
+          <a:lstStyle/>
+          <a:p>
+            <a:endParaRPr lang="en-US"/>
+          </a:p>
+        </p:txBody>
       </p:sp>
       <p:sp>
         <p:nvSpPr>
@@ -9601,7 +8019,7 @@
           <a:bodyPr wrap="square" lIns="0" tIns="0" rIns="0" bIns="0" rtlCol="0" anchor="t"/>
           <a:lstStyle/>
           <a:p>
-            <a:pPr algn="l" indent="0" marL="0">
+            <a:pPr marL="0" indent="0" algn="l">
               <a:buNone/>
             </a:pPr>
             <a:r>
@@ -9638,6 +8056,13 @@
           </a:solidFill>
           <a:ln/>
         </p:spPr>
+        <p:txBody>
+          <a:bodyPr/>
+          <a:lstStyle/>
+          <a:p>
+            <a:endParaRPr lang="en-US"/>
+          </a:p>
+        </p:txBody>
       </p:sp>
       <p:sp>
         <p:nvSpPr>
@@ -9660,7 +8085,7 @@
           <a:bodyPr wrap="square" rtlCol="0" anchor="ctr"/>
           <a:lstStyle/>
           <a:p>
-            <a:pPr algn="ctr" indent="0" marL="0">
+            <a:pPr marL="0" indent="0" algn="ctr">
               <a:buNone/>
             </a:pPr>
             <a:r>
@@ -9699,7 +8124,7 @@
           <a:bodyPr wrap="square" lIns="0" tIns="0" rIns="0" bIns="0" rtlCol="0" anchor="t"/>
           <a:lstStyle/>
           <a:p>
-            <a:pPr algn="l" indent="0" marL="0">
+            <a:pPr marL="0" indent="0" algn="l">
               <a:lnSpc>
                 <a:spcPct val="100000"/>
               </a:lnSpc>
@@ -9716,22 +8141,135 @@
               </a:rPr>
               <a:t>Find the clock &amp; reset.</a:t>
             </a:r>
-            <a:pPr algn="l" indent="0" marL="0">
+            <a:r>
+              <a:rPr lang="en-US" sz="1500" dirty="0">
+                <a:solidFill>
+                  <a:srgbClr val="595959"/>
+                </a:solidFill>
+                <a:latin typeface="Tw Cen MT" pitchFamily="34" charset="0"/>
+                <a:ea typeface="Tw Cen MT" pitchFamily="34" charset="-122"/>
+                <a:cs typeface="Tw Cen MT" pitchFamily="34" charset="-120"/>
+              </a:rPr>
+              <a:t>  Every sequential block keys off posedge clk and rst.</a:t>
+            </a:r>
+            <a:endParaRPr lang="en-US" sz="1500" dirty="0"/>
+          </a:p>
+        </p:txBody>
+      </p:sp>
+      <p:sp>
+        <p:nvSpPr>
+          <p:cNvPr id="8" name="Shape 6"/>
+          <p:cNvSpPr/>
+          <p:nvPr/>
+        </p:nvSpPr>
+        <p:spPr>
+          <a:xfrm>
+            <a:off x="566928" y="2642616"/>
+            <a:ext cx="457200" cy="457200"/>
+          </a:xfrm>
+          <a:prstGeom prst="ellipse">
+            <a:avLst/>
+          </a:prstGeom>
+          <a:solidFill>
+            <a:srgbClr val="9E1B32"/>
+          </a:solidFill>
+          <a:ln/>
+        </p:spPr>
+        <p:txBody>
+          <a:bodyPr/>
+          <a:lstStyle/>
+          <a:p>
+            <a:endParaRPr lang="en-US"/>
+          </a:p>
+        </p:txBody>
+      </p:sp>
+      <p:sp>
+        <p:nvSpPr>
+          <p:cNvPr id="9" name="Text 7"/>
+          <p:cNvSpPr/>
+          <p:nvPr/>
+        </p:nvSpPr>
+        <p:spPr>
+          <a:xfrm>
+            <a:off x="566928" y="2642616"/>
+            <a:ext cx="457200" cy="457200"/>
+          </a:xfrm>
+          <a:prstGeom prst="rect">
+            <a:avLst/>
+          </a:prstGeom>
+          <a:noFill/>
+          <a:ln/>
+        </p:spPr>
+        <p:txBody>
+          <a:bodyPr wrap="square" rtlCol="0" anchor="ctr"/>
+          <a:lstStyle/>
+          <a:p>
+            <a:pPr marL="0" indent="0" algn="ctr">
+              <a:buNone/>
+            </a:pPr>
+            <a:r>
+              <a:rPr lang="en-US" sz="2000" b="1" dirty="0">
+                <a:solidFill>
+                  <a:srgbClr val="FFFFFF"/>
+                </a:solidFill>
+                <a:latin typeface="Tw Cen MT Condensed Extra Bold" pitchFamily="34" charset="0"/>
+                <a:ea typeface="Tw Cen MT Condensed Extra Bold" pitchFamily="34" charset="-122"/>
+                <a:cs typeface="Tw Cen MT Condensed Extra Bold" pitchFamily="34" charset="-120"/>
+              </a:rPr>
+              <a:t>2</a:t>
+            </a:r>
+            <a:endParaRPr lang="en-US" sz="2000" dirty="0"/>
+          </a:p>
+        </p:txBody>
+      </p:sp>
+      <p:sp>
+        <p:nvSpPr>
+          <p:cNvPr id="10" name="Text 8"/>
+          <p:cNvSpPr/>
+          <p:nvPr/>
+        </p:nvSpPr>
+        <p:spPr>
+          <a:xfrm>
+            <a:off x="1225296" y="2606040"/>
+            <a:ext cx="5650992" cy="603504"/>
+          </a:xfrm>
+          <a:prstGeom prst="rect">
+            <a:avLst/>
+          </a:prstGeom>
+          <a:noFill/>
+          <a:ln/>
+        </p:spPr>
+        <p:txBody>
+          <a:bodyPr wrap="square" lIns="0" tIns="0" rIns="0" bIns="0" rtlCol="0" anchor="t"/>
+          <a:lstStyle/>
+          <a:p>
+            <a:pPr marL="0" indent="0" algn="l">
               <a:lnSpc>
                 <a:spcPct val="100000"/>
               </a:lnSpc>
               <a:buNone/>
             </a:pPr>
             <a:r>
-              <a:rPr lang="en-US" sz="1500" dirty="0">
-                <a:solidFill>
-                  <a:srgbClr val="595959"/>
+              <a:rPr lang="en-US" sz="1500" b="1" dirty="0">
+                <a:solidFill>
+                  <a:srgbClr val="1A1A1A"/>
                 </a:solidFill>
                 <a:latin typeface="Tw Cen MT" pitchFamily="34" charset="0"/>
                 <a:ea typeface="Tw Cen MT" pitchFamily="34" charset="-122"/>
                 <a:cs typeface="Tw Cen MT" pitchFamily="34" charset="-120"/>
               </a:rPr>
-              <a:t>  Every sequential block keys off posedge clk and rst.</a:t>
+              <a:t>Find the PC register.</a:t>
+            </a:r>
+            <a:r>
+              <a:rPr lang="en-US" sz="1500" dirty="0">
+                <a:solidFill>
+                  <a:srgbClr val="595959"/>
+                </a:solidFill>
+                <a:latin typeface="Tw Cen MT" pitchFamily="34" charset="0"/>
+                <a:ea typeface="Tw Cen MT" pitchFamily="34" charset="-122"/>
+                <a:cs typeface="Tw Cen MT" pitchFamily="34" charset="-120"/>
+              </a:rPr>
+              <a:t>  It's the heartbeat — where does it get its next value?</a:t>
             </a:r>
             <a:endParaRPr lang="en-US" sz="1500" dirty="0"/>
           </a:p>
@@ -9739,13 +8277,13 @@
       </p:sp>
       <p:sp>
         <p:nvSpPr>
-          <p:cNvPr id="8" name="Shape 6"/>
-          <p:cNvSpPr/>
-          <p:nvPr/>
-        </p:nvSpPr>
-        <p:spPr>
-          <a:xfrm>
-            <a:off x="566928" y="2642616"/>
+          <p:cNvPr id="11" name="Shape 9"/>
+          <p:cNvSpPr/>
+          <p:nvPr/>
+        </p:nvSpPr>
+        <p:spPr>
+          <a:xfrm>
+            <a:off x="566928" y="3392424"/>
             <a:ext cx="457200" cy="457200"/>
           </a:xfrm>
           <a:prstGeom prst="ellipse">
@@ -9756,16 +8294,23 @@
           </a:solidFill>
           <a:ln/>
         </p:spPr>
-      </p:sp>
-      <p:sp>
-        <p:nvSpPr>
-          <p:cNvPr id="9" name="Text 7"/>
-          <p:cNvSpPr/>
-          <p:nvPr/>
-        </p:nvSpPr>
-        <p:spPr>
-          <a:xfrm>
-            <a:off x="566928" y="2642616"/>
+        <p:txBody>
+          <a:bodyPr/>
+          <a:lstStyle/>
+          <a:p>
+            <a:endParaRPr lang="en-US"/>
+          </a:p>
+        </p:txBody>
+      </p:sp>
+      <p:sp>
+        <p:nvSpPr>
+          <p:cNvPr id="12" name="Text 10"/>
+          <p:cNvSpPr/>
+          <p:nvPr/>
+        </p:nvSpPr>
+        <p:spPr>
+          <a:xfrm>
+            <a:off x="566928" y="3392424"/>
             <a:ext cx="457200" cy="457200"/>
           </a:xfrm>
           <a:prstGeom prst="rect">
@@ -9778,7 +8323,7 @@
           <a:bodyPr wrap="square" rtlCol="0" anchor="ctr"/>
           <a:lstStyle/>
           <a:p>
-            <a:pPr algn="ctr" indent="0" marL="0">
+            <a:pPr marL="0" indent="0" algn="ctr">
               <a:buNone/>
             </a:pPr>
             <a:r>
@@ -9790,7 +8335,7 @@
                 <a:ea typeface="Tw Cen MT Condensed Extra Bold" pitchFamily="34" charset="-122"/>
                 <a:cs typeface="Tw Cen MT Condensed Extra Bold" pitchFamily="34" charset="-120"/>
               </a:rPr>
-              <a:t>2</a:t>
+              <a:t>3</a:t>
             </a:r>
             <a:endParaRPr lang="en-US" sz="2000" dirty="0"/>
           </a:p>
@@ -9798,13 +8343,13 @@
       </p:sp>
       <p:sp>
         <p:nvSpPr>
-          <p:cNvPr id="10" name="Text 8"/>
-          <p:cNvSpPr/>
-          <p:nvPr/>
-        </p:nvSpPr>
-        <p:spPr>
-          <a:xfrm>
-            <a:off x="1225296" y="2606040"/>
+          <p:cNvPr id="13" name="Text 11"/>
+          <p:cNvSpPr/>
+          <p:nvPr/>
+        </p:nvSpPr>
+        <p:spPr>
+          <a:xfrm>
+            <a:off x="1225296" y="3355848"/>
             <a:ext cx="5650992" cy="603504"/>
           </a:xfrm>
           <a:prstGeom prst="rect">
@@ -9817,7 +8362,7 @@
           <a:bodyPr wrap="square" lIns="0" tIns="0" rIns="0" bIns="0" rtlCol="0" anchor="t"/>
           <a:lstStyle/>
           <a:p>
-            <a:pPr algn="l" indent="0" marL="0">
+            <a:pPr marL="0" indent="0" algn="l">
               <a:lnSpc>
                 <a:spcPct val="100000"/>
               </a:lnSpc>
@@ -9832,24 +8377,137 @@
                 <a:ea typeface="Tw Cen MT" pitchFamily="34" charset="-122"/>
                 <a:cs typeface="Tw Cen MT" pitchFamily="34" charset="-120"/>
               </a:rPr>
-              <a:t>Find the PC register.</a:t>
-            </a:r>
-            <a:pPr algn="l" indent="0" marL="0">
+              <a:t>Trace instruction fetch.</a:t>
+            </a:r>
+            <a:r>
+              <a:rPr lang="en-US" sz="1500" dirty="0">
+                <a:solidFill>
+                  <a:srgbClr val="595959"/>
+                </a:solidFill>
+                <a:latin typeface="Tw Cen MT" pitchFamily="34" charset="0"/>
+                <a:ea typeface="Tw Cen MT" pitchFamily="34" charset="-122"/>
+                <a:cs typeface="Tw Cen MT" pitchFamily="34" charset="-120"/>
+              </a:rPr>
+              <a:t>  PC indexes instruction memory → the 32-bit instr word.</a:t>
+            </a:r>
+            <a:endParaRPr lang="en-US" sz="1500" dirty="0"/>
+          </a:p>
+        </p:txBody>
+      </p:sp>
+      <p:sp>
+        <p:nvSpPr>
+          <p:cNvPr id="14" name="Shape 12"/>
+          <p:cNvSpPr/>
+          <p:nvPr/>
+        </p:nvSpPr>
+        <p:spPr>
+          <a:xfrm>
+            <a:off x="566928" y="4142232"/>
+            <a:ext cx="457200" cy="457200"/>
+          </a:xfrm>
+          <a:prstGeom prst="ellipse">
+            <a:avLst/>
+          </a:prstGeom>
+          <a:solidFill>
+            <a:srgbClr val="9E1B32"/>
+          </a:solidFill>
+          <a:ln/>
+        </p:spPr>
+        <p:txBody>
+          <a:bodyPr/>
+          <a:lstStyle/>
+          <a:p>
+            <a:endParaRPr lang="en-US"/>
+          </a:p>
+        </p:txBody>
+      </p:sp>
+      <p:sp>
+        <p:nvSpPr>
+          <p:cNvPr id="15" name="Text 13"/>
+          <p:cNvSpPr/>
+          <p:nvPr/>
+        </p:nvSpPr>
+        <p:spPr>
+          <a:xfrm>
+            <a:off x="566928" y="4142232"/>
+            <a:ext cx="457200" cy="457200"/>
+          </a:xfrm>
+          <a:prstGeom prst="rect">
+            <a:avLst/>
+          </a:prstGeom>
+          <a:noFill/>
+          <a:ln/>
+        </p:spPr>
+        <p:txBody>
+          <a:bodyPr wrap="square" rtlCol="0" anchor="ctr"/>
+          <a:lstStyle/>
+          <a:p>
+            <a:pPr marL="0" indent="0" algn="ctr">
+              <a:buNone/>
+            </a:pPr>
+            <a:r>
+              <a:rPr lang="en-US" sz="2000" b="1" dirty="0">
+                <a:solidFill>
+                  <a:srgbClr val="FFFFFF"/>
+                </a:solidFill>
+                <a:latin typeface="Tw Cen MT Condensed Extra Bold" pitchFamily="34" charset="0"/>
+                <a:ea typeface="Tw Cen MT Condensed Extra Bold" pitchFamily="34" charset="-122"/>
+                <a:cs typeface="Tw Cen MT Condensed Extra Bold" pitchFamily="34" charset="-120"/>
+              </a:rPr>
+              <a:t>4</a:t>
+            </a:r>
+            <a:endParaRPr lang="en-US" sz="2000" dirty="0"/>
+          </a:p>
+        </p:txBody>
+      </p:sp>
+      <p:sp>
+        <p:nvSpPr>
+          <p:cNvPr id="16" name="Text 14"/>
+          <p:cNvSpPr/>
+          <p:nvPr/>
+        </p:nvSpPr>
+        <p:spPr>
+          <a:xfrm>
+            <a:off x="1225296" y="4105656"/>
+            <a:ext cx="5650992" cy="603504"/>
+          </a:xfrm>
+          <a:prstGeom prst="rect">
+            <a:avLst/>
+          </a:prstGeom>
+          <a:noFill/>
+          <a:ln/>
+        </p:spPr>
+        <p:txBody>
+          <a:bodyPr wrap="square" lIns="0" tIns="0" rIns="0" bIns="0" rtlCol="0" anchor="t"/>
+          <a:lstStyle/>
+          <a:p>
+            <a:pPr marL="0" indent="0" algn="l">
               <a:lnSpc>
                 <a:spcPct val="100000"/>
               </a:lnSpc>
               <a:buNone/>
             </a:pPr>
             <a:r>
-              <a:rPr lang="en-US" sz="1500" dirty="0">
-                <a:solidFill>
-                  <a:srgbClr val="595959"/>
+              <a:rPr lang="en-US" sz="1500" b="1" dirty="0">
+                <a:solidFill>
+                  <a:srgbClr val="1A1A1A"/>
                 </a:solidFill>
                 <a:latin typeface="Tw Cen MT" pitchFamily="34" charset="0"/>
                 <a:ea typeface="Tw Cen MT" pitchFamily="34" charset="-122"/>
                 <a:cs typeface="Tw Cen MT" pitchFamily="34" charset="-120"/>
               </a:rPr>
-              <a:t>  It's the heartbeat — where does it get its next value?</a:t>
+              <a:t>Watch it split in decode.</a:t>
+            </a:r>
+            <a:r>
+              <a:rPr lang="en-US" sz="1500" dirty="0">
+                <a:solidFill>
+                  <a:srgbClr val="595959"/>
+                </a:solidFill>
+                <a:latin typeface="Tw Cen MT" pitchFamily="34" charset="0"/>
+                <a:ea typeface="Tw Cen MT" pitchFamily="34" charset="-122"/>
+                <a:cs typeface="Tw Cen MT" pitchFamily="34" charset="-120"/>
+              </a:rPr>
+              <a:t>  Opcode, funct3/7, register fields, immediate.</a:t>
             </a:r>
             <a:endParaRPr lang="en-US" sz="1500" dirty="0"/>
           </a:p>
@@ -9857,13 +8515,13 @@
       </p:sp>
       <p:sp>
         <p:nvSpPr>
-          <p:cNvPr id="11" name="Shape 9"/>
-          <p:cNvSpPr/>
-          <p:nvPr/>
-        </p:nvSpPr>
-        <p:spPr>
-          <a:xfrm>
-            <a:off x="566928" y="3392424"/>
+          <p:cNvPr id="17" name="Shape 15"/>
+          <p:cNvSpPr/>
+          <p:nvPr/>
+        </p:nvSpPr>
+        <p:spPr>
+          <a:xfrm>
+            <a:off x="566928" y="4892040"/>
             <a:ext cx="457200" cy="457200"/>
           </a:xfrm>
           <a:prstGeom prst="ellipse">
@@ -9874,16 +8532,23 @@
           </a:solidFill>
           <a:ln/>
         </p:spPr>
-      </p:sp>
-      <p:sp>
-        <p:nvSpPr>
-          <p:cNvPr id="12" name="Text 10"/>
-          <p:cNvSpPr/>
-          <p:nvPr/>
-        </p:nvSpPr>
-        <p:spPr>
-          <a:xfrm>
-            <a:off x="566928" y="3392424"/>
+        <p:txBody>
+          <a:bodyPr/>
+          <a:lstStyle/>
+          <a:p>
+            <a:endParaRPr lang="en-US"/>
+          </a:p>
+        </p:txBody>
+      </p:sp>
+      <p:sp>
+        <p:nvSpPr>
+          <p:cNvPr id="18" name="Text 16"/>
+          <p:cNvSpPr/>
+          <p:nvPr/>
+        </p:nvSpPr>
+        <p:spPr>
+          <a:xfrm>
+            <a:off x="566928" y="4892040"/>
             <a:ext cx="457200" cy="457200"/>
           </a:xfrm>
           <a:prstGeom prst="rect">
@@ -9896,7 +8561,7 @@
           <a:bodyPr wrap="square" rtlCol="0" anchor="ctr"/>
           <a:lstStyle/>
           <a:p>
-            <a:pPr algn="ctr" indent="0" marL="0">
+            <a:pPr marL="0" indent="0" algn="ctr">
               <a:buNone/>
             </a:pPr>
             <a:r>
@@ -9908,7 +8573,7 @@
                 <a:ea typeface="Tw Cen MT Condensed Extra Bold" pitchFamily="34" charset="-122"/>
                 <a:cs typeface="Tw Cen MT Condensed Extra Bold" pitchFamily="34" charset="-120"/>
               </a:rPr>
-              <a:t>3</a:t>
+              <a:t>5</a:t>
             </a:r>
             <a:endParaRPr lang="en-US" sz="2000" dirty="0"/>
           </a:p>
@@ -9916,13 +8581,13 @@
       </p:sp>
       <p:sp>
         <p:nvSpPr>
-          <p:cNvPr id="13" name="Text 11"/>
-          <p:cNvSpPr/>
-          <p:nvPr/>
-        </p:nvSpPr>
-        <p:spPr>
-          <a:xfrm>
-            <a:off x="1225296" y="3355848"/>
+          <p:cNvPr id="19" name="Text 17"/>
+          <p:cNvSpPr/>
+          <p:nvPr/>
+        </p:nvSpPr>
+        <p:spPr>
+          <a:xfrm>
+            <a:off x="1225296" y="4855464"/>
             <a:ext cx="5650992" cy="603504"/>
           </a:xfrm>
           <a:prstGeom prst="rect">
@@ -9935,7 +8600,7 @@
           <a:bodyPr wrap="square" lIns="0" tIns="0" rIns="0" bIns="0" rtlCol="0" anchor="t"/>
           <a:lstStyle/>
           <a:p>
-            <a:pPr algn="l" indent="0" marL="0">
+            <a:pPr marL="0" indent="0" algn="l">
               <a:lnSpc>
                 <a:spcPct val="100000"/>
               </a:lnSpc>
@@ -9950,14 +8615,8 @@
                 <a:ea typeface="Tw Cen MT" pitchFamily="34" charset="-122"/>
                 <a:cs typeface="Tw Cen MT" pitchFamily="34" charset="-120"/>
               </a:rPr>
-              <a:t>Trace instruction fetch.</a:t>
-            </a:r>
-            <a:pPr algn="l" indent="0" marL="0">
-              <a:lnSpc>
-                <a:spcPct val="100000"/>
-              </a:lnSpc>
-              <a:buNone/>
-            </a:pPr>
+              <a:t>Follow to write-back.</a:t>
+            </a:r>
             <a:r>
               <a:rPr lang="en-US" sz="1500" dirty="0">
                 <a:solidFill>
@@ -9967,7 +8626,7 @@
                 <a:ea typeface="Tw Cen MT" pitchFamily="34" charset="-122"/>
                 <a:cs typeface="Tw Cen MT" pitchFamily="34" charset="-120"/>
               </a:rPr>
-              <a:t>  PC indexes instruction memory → the 32-bit instr word.</a:t>
+              <a:t>  Where does the result land back in the register file?</a:t>
             </a:r>
             <a:endParaRPr lang="en-US" sz="1500" dirty="0"/>
           </a:p>
@@ -9975,16 +8634,350 @@
       </p:sp>
       <p:sp>
         <p:nvSpPr>
-          <p:cNvPr id="14" name="Shape 12"/>
-          <p:cNvSpPr/>
-          <p:nvPr/>
-        </p:nvSpPr>
-        <p:spPr>
-          <a:xfrm>
-            <a:off x="566928" y="4142232"/>
-            <a:ext cx="457200" cy="457200"/>
-          </a:xfrm>
-          <a:prstGeom prst="ellipse">
+          <p:cNvPr id="20" name="Shape 18"/>
+          <p:cNvSpPr/>
+          <p:nvPr/>
+        </p:nvSpPr>
+        <p:spPr>
+          <a:xfrm>
+            <a:off x="7086600" y="1892808"/>
+            <a:ext cx="4535424" cy="3017520"/>
+          </a:xfrm>
+          <a:prstGeom prst="rect">
+            <a:avLst/>
+          </a:prstGeom>
+          <a:solidFill>
+            <a:srgbClr val="1A1A1A"/>
+          </a:solidFill>
+          <a:ln/>
+        </p:spPr>
+        <p:txBody>
+          <a:bodyPr/>
+          <a:lstStyle/>
+          <a:p>
+            <a:endParaRPr lang="en-US"/>
+          </a:p>
+        </p:txBody>
+      </p:sp>
+      <p:sp>
+        <p:nvSpPr>
+          <p:cNvPr id="21" name="Shape 19"/>
+          <p:cNvSpPr/>
+          <p:nvPr/>
+        </p:nvSpPr>
+        <p:spPr>
+          <a:xfrm>
+            <a:off x="7086600" y="1892808"/>
+            <a:ext cx="4535424" cy="256032"/>
+          </a:xfrm>
+          <a:prstGeom prst="rect">
+            <a:avLst/>
+          </a:prstGeom>
+          <a:solidFill>
+            <a:srgbClr val="2C2C2C"/>
+          </a:solidFill>
+          <a:ln/>
+        </p:spPr>
+        <p:txBody>
+          <a:bodyPr/>
+          <a:lstStyle/>
+          <a:p>
+            <a:endParaRPr lang="en-US"/>
+          </a:p>
+        </p:txBody>
+      </p:sp>
+      <p:sp>
+        <p:nvSpPr>
+          <p:cNvPr id="22" name="Text 20"/>
+          <p:cNvSpPr/>
+          <p:nvPr/>
+        </p:nvSpPr>
+        <p:spPr>
+          <a:xfrm>
+            <a:off x="7214616" y="1892808"/>
+            <a:ext cx="4261104" cy="256032"/>
+          </a:xfrm>
+          <a:prstGeom prst="rect">
+            <a:avLst/>
+          </a:prstGeom>
+          <a:noFill/>
+          <a:ln/>
+        </p:spPr>
+        <p:txBody>
+          <a:bodyPr wrap="square" lIns="0" tIns="0" rIns="0" bIns="0" rtlCol="0" anchor="ctr"/>
+          <a:lstStyle/>
+          <a:p>
+            <a:pPr marL="0" indent="0">
+              <a:buNone/>
+            </a:pPr>
+            <a:r>
+              <a:rPr lang="en-US" sz="1050" b="1" kern="0" spc="100" dirty="0">
+                <a:solidFill>
+                  <a:srgbClr val="B8B8B8"/>
+                </a:solidFill>
+                <a:latin typeface="Tw Cen MT" pitchFamily="34" charset="0"/>
+                <a:ea typeface="Tw Cen MT" pitchFamily="34" charset="-122"/>
+                <a:cs typeface="Tw Cen MT" pitchFamily="34" charset="-120"/>
+              </a:rPr>
+              <a:t>VIVADO TCL CONSOLE</a:t>
+            </a:r>
+            <a:endParaRPr lang="en-US" sz="1050" dirty="0"/>
+          </a:p>
+        </p:txBody>
+      </p:sp>
+      <p:sp>
+        <p:nvSpPr>
+          <p:cNvPr id="23" name="Text 21"/>
+          <p:cNvSpPr/>
+          <p:nvPr/>
+        </p:nvSpPr>
+        <p:spPr>
+          <a:xfrm>
+            <a:off x="7232904" y="2221992"/>
+            <a:ext cx="4242816" cy="2615184"/>
+          </a:xfrm>
+          <a:prstGeom prst="rect">
+            <a:avLst/>
+          </a:prstGeom>
+          <a:noFill/>
+          <a:ln/>
+        </p:spPr>
+        <p:txBody>
+          <a:bodyPr wrap="square" lIns="0" tIns="0" rIns="0" bIns="0" rtlCol="0" anchor="t"/>
+          <a:lstStyle/>
+          <a:p>
+            <a:pPr marL="0" indent="0" algn="l">
+              <a:lnSpc>
+                <a:spcPct val="108000"/>
+              </a:lnSpc>
+              <a:buNone/>
+            </a:pPr>
+            <a:r>
+              <a:rPr lang="en-US" sz="1200" dirty="0">
+                <a:solidFill>
+                  <a:srgbClr val="8FD19E"/>
+                </a:solidFill>
+                <a:latin typeface="Courier New" pitchFamily="34" charset="0"/>
+                <a:ea typeface="Courier New" pitchFamily="34" charset="-122"/>
+                <a:cs typeface="Courier New" pitchFamily="34" charset="-120"/>
+              </a:rPr>
+              <a:t>$ open_project rv_core.xpr</a:t>
+            </a:r>
+            <a:endParaRPr lang="en-US" sz="1200" dirty="0"/>
+          </a:p>
+          <a:p>
+            <a:pPr marL="0" indent="0" algn="l">
+              <a:lnSpc>
+                <a:spcPct val="108000"/>
+              </a:lnSpc>
+              <a:buNone/>
+            </a:pPr>
+            <a:r>
+              <a:rPr lang="en-US" sz="1200" dirty="0">
+                <a:solidFill>
+                  <a:srgbClr val="8FD19E"/>
+                </a:solidFill>
+                <a:latin typeface="Courier New" pitchFamily="34" charset="0"/>
+                <a:ea typeface="Courier New" pitchFamily="34" charset="-122"/>
+                <a:cs typeface="Courier New" pitchFamily="34" charset="-120"/>
+              </a:rPr>
+              <a:t>$ launch_runs synth_1</a:t>
+            </a:r>
+            <a:endParaRPr lang="en-US" sz="1200" dirty="0"/>
+          </a:p>
+          <a:p>
+            <a:pPr marL="0" indent="0" algn="l">
+              <a:lnSpc>
+                <a:spcPct val="108000"/>
+              </a:lnSpc>
+              <a:buNone/>
+            </a:pPr>
+            <a:r>
+              <a:rPr lang="en-US" sz="1200" dirty="0">
+                <a:solidFill>
+                  <a:srgbClr val="E8E8E8"/>
+                </a:solidFill>
+                <a:latin typeface="Courier New" pitchFamily="34" charset="0"/>
+                <a:ea typeface="Courier New" pitchFamily="34" charset="-122"/>
+                <a:cs typeface="Courier New" pitchFamily="34" charset="-120"/>
+              </a:rPr>
+              <a:t>INFO: synthesis complete</a:t>
+            </a:r>
+            <a:endParaRPr lang="en-US" sz="1200" dirty="0"/>
+          </a:p>
+          <a:p>
+            <a:pPr marL="0" indent="0" algn="l">
+              <a:lnSpc>
+                <a:spcPct val="108000"/>
+              </a:lnSpc>
+              <a:buNone/>
+            </a:pPr>
+            <a:r>
+              <a:rPr lang="en-US" sz="1200" dirty="0">
+                <a:solidFill>
+                  <a:srgbClr val="8FD19E"/>
+                </a:solidFill>
+                <a:latin typeface="Courier New" pitchFamily="34" charset="0"/>
+                <a:ea typeface="Courier New" pitchFamily="34" charset="-122"/>
+                <a:cs typeface="Courier New" pitchFamily="34" charset="-120"/>
+              </a:rPr>
+              <a:t>$ launch_runs impl_1 -to_step</a:t>
+            </a:r>
+            <a:endParaRPr lang="en-US" sz="1200" dirty="0"/>
+          </a:p>
+          <a:p>
+            <a:pPr marL="0" indent="0" algn="l">
+              <a:lnSpc>
+                <a:spcPct val="108000"/>
+              </a:lnSpc>
+              <a:buNone/>
+            </a:pPr>
+            <a:r>
+              <a:rPr lang="en-US" sz="1200" dirty="0">
+                <a:solidFill>
+                  <a:srgbClr val="E8E8E8"/>
+                </a:solidFill>
+                <a:latin typeface="Courier New" pitchFamily="34" charset="0"/>
+                <a:ea typeface="Courier New" pitchFamily="34" charset="-122"/>
+                <a:cs typeface="Courier New" pitchFamily="34" charset="-120"/>
+              </a:rPr>
+              <a:t>  write_bitstream</a:t>
+            </a:r>
+            <a:endParaRPr lang="en-US" sz="1200" dirty="0"/>
+          </a:p>
+          <a:p>
+            <a:pPr marL="0" indent="0" algn="l">
+              <a:lnSpc>
+                <a:spcPct val="108000"/>
+              </a:lnSpc>
+              <a:buNone/>
+            </a:pPr>
+            <a:r>
+              <a:rPr lang="en-US" sz="1200" dirty="0">
+                <a:solidFill>
+                  <a:srgbClr val="E8E8E8"/>
+                </a:solidFill>
+                <a:latin typeface="Courier New" pitchFamily="34" charset="0"/>
+                <a:ea typeface="Courier New" pitchFamily="34" charset="-122"/>
+                <a:cs typeface="Courier New" pitchFamily="34" charset="-120"/>
+              </a:rPr>
+              <a:t>INFO: bitstream written:</a:t>
+            </a:r>
+            <a:endParaRPr lang="en-US" sz="1200" dirty="0"/>
+          </a:p>
+          <a:p>
+            <a:pPr marL="0" indent="0" algn="l">
+              <a:lnSpc>
+                <a:spcPct val="108000"/>
+              </a:lnSpc>
+              <a:buNone/>
+            </a:pPr>
+            <a:r>
+              <a:rPr lang="en-US" sz="1200" dirty="0">
+                <a:solidFill>
+                  <a:srgbClr val="E8E8E8"/>
+                </a:solidFill>
+                <a:latin typeface="Courier New" pitchFamily="34" charset="0"/>
+                <a:ea typeface="Courier New" pitchFamily="34" charset="-122"/>
+                <a:cs typeface="Courier New" pitchFamily="34" charset="-120"/>
+              </a:rPr>
+              <a:t>  rv_top.bit</a:t>
+            </a:r>
+            <a:endParaRPr lang="en-US" sz="1200" dirty="0"/>
+          </a:p>
+          <a:p>
+            <a:pPr marL="0" indent="0" algn="l">
+              <a:lnSpc>
+                <a:spcPct val="108000"/>
+              </a:lnSpc>
+              <a:buNone/>
+            </a:pPr>
+            <a:r>
+              <a:rPr lang="en-US" sz="1200" dirty="0">
+                <a:solidFill>
+                  <a:srgbClr val="8FD19E"/>
+                </a:solidFill>
+                <a:latin typeface="Courier New" pitchFamily="34" charset="0"/>
+                <a:ea typeface="Courier New" pitchFamily="34" charset="-122"/>
+                <a:cs typeface="Courier New" pitchFamily="34" charset="-120"/>
+              </a:rPr>
+              <a:t>$ program device</a:t>
+            </a:r>
+            <a:endParaRPr lang="en-US" sz="1200" dirty="0"/>
+          </a:p>
+          <a:p>
+            <a:pPr marL="0" indent="0" algn="l">
+              <a:lnSpc>
+                <a:spcPct val="108000"/>
+              </a:lnSpc>
+              <a:buNone/>
+            </a:pPr>
+            <a:r>
+              <a:rPr lang="en-US" sz="1200" dirty="0">
+                <a:solidFill>
+                  <a:srgbClr val="E8E8E8"/>
+                </a:solidFill>
+                <a:latin typeface="Courier New" pitchFamily="34" charset="0"/>
+                <a:ea typeface="Courier New" pitchFamily="34" charset="-122"/>
+                <a:cs typeface="Courier New" pitchFamily="34" charset="-120"/>
+              </a:rPr>
+              <a:t>INFO: Programmed XC7A35T</a:t>
+            </a:r>
+            <a:endParaRPr lang="en-US" sz="1200" dirty="0"/>
+          </a:p>
+        </p:txBody>
+      </p:sp>
+      <p:sp>
+        <p:nvSpPr>
+          <p:cNvPr id="24" name="Text 22"/>
+          <p:cNvSpPr/>
+          <p:nvPr/>
+        </p:nvSpPr>
+        <p:spPr>
+          <a:xfrm>
+            <a:off x="566928" y="5806440"/>
+            <a:ext cx="11057839" cy="457200"/>
+          </a:xfrm>
+          <a:prstGeom prst="rect">
+            <a:avLst/>
+          </a:prstGeom>
+          <a:noFill/>
+          <a:ln/>
+        </p:spPr>
+        <p:txBody>
+          <a:bodyPr wrap="square" lIns="0" tIns="0" rIns="0" bIns="0" rtlCol="0" anchor="ctr"/>
+          <a:lstStyle/>
+          <a:p>
+            <a:pPr marL="0" indent="0" algn="l">
+              <a:buNone/>
+            </a:pPr>
+            <a:r>
+              <a:rPr lang="en-US" sz="1500" i="1" dirty="0">
+                <a:solidFill>
+                  <a:srgbClr val="9E1B32"/>
+                </a:solidFill>
+                <a:latin typeface="Tw Cen MT" pitchFamily="34" charset="0"/>
+                <a:ea typeface="Tw Cen MT" pitchFamily="34" charset="-122"/>
+                <a:cs typeface="Tw Cen MT" pitchFamily="34" charset="-120"/>
+              </a:rPr>
+              <a:t>You can't change what you can't trace. Name every wire before you touch one.</a:t>
+            </a:r>
+            <a:endParaRPr lang="en-US" sz="1500" dirty="0"/>
+          </a:p>
+        </p:txBody>
+      </p:sp>
+      <p:sp>
+        <p:nvSpPr>
+          <p:cNvPr id="25" name="Shape 23"/>
+          <p:cNvSpPr/>
+          <p:nvPr/>
+        </p:nvSpPr>
+        <p:spPr>
+          <a:xfrm>
+            <a:off x="0" y="6382512"/>
+            <a:ext cx="475488" cy="475488"/>
+          </a:xfrm>
+          <a:prstGeom prst="rect">
             <a:avLst/>
           </a:prstGeom>
           <a:solidFill>
@@ -9992,17 +8985,24 @@
           </a:solidFill>
           <a:ln/>
         </p:spPr>
-      </p:sp>
-      <p:sp>
-        <p:nvSpPr>
-          <p:cNvPr id="15" name="Text 13"/>
-          <p:cNvSpPr/>
-          <p:nvPr/>
-        </p:nvSpPr>
-        <p:spPr>
-          <a:xfrm>
-            <a:off x="566928" y="4142232"/>
-            <a:ext cx="457200" cy="457200"/>
+        <p:txBody>
+          <a:bodyPr/>
+          <a:lstStyle/>
+          <a:p>
+            <a:endParaRPr lang="en-US"/>
+          </a:p>
+        </p:txBody>
+      </p:sp>
+      <p:sp>
+        <p:nvSpPr>
+          <p:cNvPr id="26" name="Text 24"/>
+          <p:cNvSpPr/>
+          <p:nvPr/>
+        </p:nvSpPr>
+        <p:spPr>
+          <a:xfrm>
+            <a:off x="0" y="6382512"/>
+            <a:ext cx="475488" cy="475488"/>
           </a:xfrm>
           <a:prstGeom prst="rect">
             <a:avLst/>
@@ -10014,11 +9014,11 @@
           <a:bodyPr wrap="square" rtlCol="0" anchor="ctr"/>
           <a:lstStyle/>
           <a:p>
-            <a:pPr algn="ctr" indent="0" marL="0">
-              <a:buNone/>
-            </a:pPr>
-            <a:r>
-              <a:rPr lang="en-US" sz="2000" b="1" dirty="0">
+            <a:pPr marL="0" indent="0" algn="ctr">
+              <a:buNone/>
+            </a:pPr>
+            <a:r>
+              <a:rPr lang="en-US" sz="2200" b="1" dirty="0">
                 <a:solidFill>
                   <a:srgbClr val="FFFFFF"/>
                 </a:solidFill>
@@ -10026,562 +9026,6 @@
                 <a:ea typeface="Tw Cen MT Condensed Extra Bold" pitchFamily="34" charset="-122"/>
                 <a:cs typeface="Tw Cen MT Condensed Extra Bold" pitchFamily="34" charset="-120"/>
               </a:rPr>
-              <a:t>4</a:t>
-            </a:r>
-            <a:endParaRPr lang="en-US" sz="2000" dirty="0"/>
-          </a:p>
-        </p:txBody>
-      </p:sp>
-      <p:sp>
-        <p:nvSpPr>
-          <p:cNvPr id="16" name="Text 14"/>
-          <p:cNvSpPr/>
-          <p:nvPr/>
-        </p:nvSpPr>
-        <p:spPr>
-          <a:xfrm>
-            <a:off x="1225296" y="4105656"/>
-            <a:ext cx="5650992" cy="603504"/>
-          </a:xfrm>
-          <a:prstGeom prst="rect">
-            <a:avLst/>
-          </a:prstGeom>
-          <a:noFill/>
-          <a:ln/>
-        </p:spPr>
-        <p:txBody>
-          <a:bodyPr wrap="square" lIns="0" tIns="0" rIns="0" bIns="0" rtlCol="0" anchor="t"/>
-          <a:lstStyle/>
-          <a:p>
-            <a:pPr algn="l" indent="0" marL="0">
-              <a:lnSpc>
-                <a:spcPct val="100000"/>
-              </a:lnSpc>
-              <a:buNone/>
-            </a:pPr>
-            <a:r>
-              <a:rPr lang="en-US" sz="1500" b="1" dirty="0">
-                <a:solidFill>
-                  <a:srgbClr val="1A1A1A"/>
-                </a:solidFill>
-                <a:latin typeface="Tw Cen MT" pitchFamily="34" charset="0"/>
-                <a:ea typeface="Tw Cen MT" pitchFamily="34" charset="-122"/>
-                <a:cs typeface="Tw Cen MT" pitchFamily="34" charset="-120"/>
-              </a:rPr>
-              <a:t>Watch it split in decode.</a:t>
-            </a:r>
-            <a:pPr algn="l" indent="0" marL="0">
-              <a:lnSpc>
-                <a:spcPct val="100000"/>
-              </a:lnSpc>
-              <a:buNone/>
-            </a:pPr>
-            <a:r>
-              <a:rPr lang="en-US" sz="1500" dirty="0">
-                <a:solidFill>
-                  <a:srgbClr val="595959"/>
-                </a:solidFill>
-                <a:latin typeface="Tw Cen MT" pitchFamily="34" charset="0"/>
-                <a:ea typeface="Tw Cen MT" pitchFamily="34" charset="-122"/>
-                <a:cs typeface="Tw Cen MT" pitchFamily="34" charset="-120"/>
-              </a:rPr>
-              <a:t>  Opcode, funct3/7, register fields, immediate.</a:t>
-            </a:r>
-            <a:endParaRPr lang="en-US" sz="1500" dirty="0"/>
-          </a:p>
-        </p:txBody>
-      </p:sp>
-      <p:sp>
-        <p:nvSpPr>
-          <p:cNvPr id="17" name="Shape 15"/>
-          <p:cNvSpPr/>
-          <p:nvPr/>
-        </p:nvSpPr>
-        <p:spPr>
-          <a:xfrm>
-            <a:off x="566928" y="4892040"/>
-            <a:ext cx="457200" cy="457200"/>
-          </a:xfrm>
-          <a:prstGeom prst="ellipse">
-            <a:avLst/>
-          </a:prstGeom>
-          <a:solidFill>
-            <a:srgbClr val="9E1B32"/>
-          </a:solidFill>
-          <a:ln/>
-        </p:spPr>
-      </p:sp>
-      <p:sp>
-        <p:nvSpPr>
-          <p:cNvPr id="18" name="Text 16"/>
-          <p:cNvSpPr/>
-          <p:nvPr/>
-        </p:nvSpPr>
-        <p:spPr>
-          <a:xfrm>
-            <a:off x="566928" y="4892040"/>
-            <a:ext cx="457200" cy="457200"/>
-          </a:xfrm>
-          <a:prstGeom prst="rect">
-            <a:avLst/>
-          </a:prstGeom>
-          <a:noFill/>
-          <a:ln/>
-        </p:spPr>
-        <p:txBody>
-          <a:bodyPr wrap="square" rtlCol="0" anchor="ctr"/>
-          <a:lstStyle/>
-          <a:p>
-            <a:pPr algn="ctr" indent="0" marL="0">
-              <a:buNone/>
-            </a:pPr>
-            <a:r>
-              <a:rPr lang="en-US" sz="2000" b="1" dirty="0">
-                <a:solidFill>
-                  <a:srgbClr val="FFFFFF"/>
-                </a:solidFill>
-                <a:latin typeface="Tw Cen MT Condensed Extra Bold" pitchFamily="34" charset="0"/>
-                <a:ea typeface="Tw Cen MT Condensed Extra Bold" pitchFamily="34" charset="-122"/>
-                <a:cs typeface="Tw Cen MT Condensed Extra Bold" pitchFamily="34" charset="-120"/>
-              </a:rPr>
-              <a:t>5</a:t>
-            </a:r>
-            <a:endParaRPr lang="en-US" sz="2000" dirty="0"/>
-          </a:p>
-        </p:txBody>
-      </p:sp>
-      <p:sp>
-        <p:nvSpPr>
-          <p:cNvPr id="19" name="Text 17"/>
-          <p:cNvSpPr/>
-          <p:nvPr/>
-        </p:nvSpPr>
-        <p:spPr>
-          <a:xfrm>
-            <a:off x="1225296" y="4855464"/>
-            <a:ext cx="5650992" cy="603504"/>
-          </a:xfrm>
-          <a:prstGeom prst="rect">
-            <a:avLst/>
-          </a:prstGeom>
-          <a:noFill/>
-          <a:ln/>
-        </p:spPr>
-        <p:txBody>
-          <a:bodyPr wrap="square" lIns="0" tIns="0" rIns="0" bIns="0" rtlCol="0" anchor="t"/>
-          <a:lstStyle/>
-          <a:p>
-            <a:pPr algn="l" indent="0" marL="0">
-              <a:lnSpc>
-                <a:spcPct val="100000"/>
-              </a:lnSpc>
-              <a:buNone/>
-            </a:pPr>
-            <a:r>
-              <a:rPr lang="en-US" sz="1500" b="1" dirty="0">
-                <a:solidFill>
-                  <a:srgbClr val="1A1A1A"/>
-                </a:solidFill>
-                <a:latin typeface="Tw Cen MT" pitchFamily="34" charset="0"/>
-                <a:ea typeface="Tw Cen MT" pitchFamily="34" charset="-122"/>
-                <a:cs typeface="Tw Cen MT" pitchFamily="34" charset="-120"/>
-              </a:rPr>
-              <a:t>Follow to write-back.</a:t>
-            </a:r>
-            <a:pPr algn="l" indent="0" marL="0">
-              <a:lnSpc>
-                <a:spcPct val="100000"/>
-              </a:lnSpc>
-              <a:buNone/>
-            </a:pPr>
-            <a:r>
-              <a:rPr lang="en-US" sz="1500" dirty="0">
-                <a:solidFill>
-                  <a:srgbClr val="595959"/>
-                </a:solidFill>
-                <a:latin typeface="Tw Cen MT" pitchFamily="34" charset="0"/>
-                <a:ea typeface="Tw Cen MT" pitchFamily="34" charset="-122"/>
-                <a:cs typeface="Tw Cen MT" pitchFamily="34" charset="-120"/>
-              </a:rPr>
-              <a:t>  Where does the result land back in the register file?</a:t>
-            </a:r>
-            <a:endParaRPr lang="en-US" sz="1500" dirty="0"/>
-          </a:p>
-        </p:txBody>
-      </p:sp>
-      <p:sp>
-        <p:nvSpPr>
-          <p:cNvPr id="20" name="Shape 18"/>
-          <p:cNvSpPr/>
-          <p:nvPr/>
-        </p:nvSpPr>
-        <p:spPr>
-          <a:xfrm>
-            <a:off x="7086600" y="1892808"/>
-            <a:ext cx="4535424" cy="3017520"/>
-          </a:xfrm>
-          <a:prstGeom prst="rect">
-            <a:avLst/>
-          </a:prstGeom>
-          <a:solidFill>
-            <a:srgbClr val="1A1A1A"/>
-          </a:solidFill>
-          <a:ln/>
-        </p:spPr>
-      </p:sp>
-      <p:sp>
-        <p:nvSpPr>
-          <p:cNvPr id="21" name="Shape 19"/>
-          <p:cNvSpPr/>
-          <p:nvPr/>
-        </p:nvSpPr>
-        <p:spPr>
-          <a:xfrm>
-            <a:off x="7086600" y="1892808"/>
-            <a:ext cx="4535424" cy="256032"/>
-          </a:xfrm>
-          <a:prstGeom prst="rect">
-            <a:avLst/>
-          </a:prstGeom>
-          <a:solidFill>
-            <a:srgbClr val="2C2C2C"/>
-          </a:solidFill>
-          <a:ln/>
-        </p:spPr>
-      </p:sp>
-      <p:sp>
-        <p:nvSpPr>
-          <p:cNvPr id="22" name="Text 20"/>
-          <p:cNvSpPr/>
-          <p:nvPr/>
-        </p:nvSpPr>
-        <p:spPr>
-          <a:xfrm>
-            <a:off x="7214616" y="1892808"/>
-            <a:ext cx="4261104" cy="256032"/>
-          </a:xfrm>
-          <a:prstGeom prst="rect">
-            <a:avLst/>
-          </a:prstGeom>
-          <a:noFill/>
-          <a:ln/>
-        </p:spPr>
-        <p:txBody>
-          <a:bodyPr wrap="square" lIns="0" tIns="0" rIns="0" bIns="0" rtlCol="0" anchor="ctr"/>
-          <a:lstStyle/>
-          <a:p>
-            <a:pPr indent="0" marL="0">
-              <a:buNone/>
-            </a:pPr>
-            <a:r>
-              <a:rPr lang="en-US" sz="1050" b="1" spc="100" kern="0" dirty="0">
-                <a:solidFill>
-                  <a:srgbClr val="B8B8B8"/>
-                </a:solidFill>
-                <a:latin typeface="Tw Cen MT" pitchFamily="34" charset="0"/>
-                <a:ea typeface="Tw Cen MT" pitchFamily="34" charset="-122"/>
-                <a:cs typeface="Tw Cen MT" pitchFamily="34" charset="-120"/>
-              </a:rPr>
-              <a:t>VIVADO TCL CONSOLE</a:t>
-            </a:r>
-            <a:endParaRPr lang="en-US" sz="1050" dirty="0"/>
-          </a:p>
-        </p:txBody>
-      </p:sp>
-      <p:sp>
-        <p:nvSpPr>
-          <p:cNvPr id="23" name="Text 21"/>
-          <p:cNvSpPr/>
-          <p:nvPr/>
-        </p:nvSpPr>
-        <p:spPr>
-          <a:xfrm>
-            <a:off x="7232904" y="2221992"/>
-            <a:ext cx="4242816" cy="2615184"/>
-          </a:xfrm>
-          <a:prstGeom prst="rect">
-            <a:avLst/>
-          </a:prstGeom>
-          <a:noFill/>
-          <a:ln/>
-        </p:spPr>
-        <p:txBody>
-          <a:bodyPr wrap="square" lIns="0" tIns="0" rIns="0" bIns="0" rtlCol="0" anchor="t"/>
-          <a:lstStyle/>
-          <a:p>
-            <a:pPr algn="l" indent="0" marL="0">
-              <a:lnSpc>
-                <a:spcPct val="108000"/>
-              </a:lnSpc>
-              <a:buNone/>
-            </a:pPr>
-            <a:r>
-              <a:rPr lang="en-US" sz="1200" dirty="0">
-                <a:solidFill>
-                  <a:srgbClr val="8FD19E"/>
-                </a:solidFill>
-                <a:latin typeface="Courier New" pitchFamily="34" charset="0"/>
-                <a:ea typeface="Courier New" pitchFamily="34" charset="-122"/>
-                <a:cs typeface="Courier New" pitchFamily="34" charset="-120"/>
-              </a:rPr>
-              <a:t>$ open_project rv_core.xpr</a:t>
-            </a:r>
-            <a:endParaRPr lang="en-US" sz="1200" dirty="0"/>
-          </a:p>
-          <a:p>
-            <a:pPr algn="l" indent="0" marL="0">
-              <a:lnSpc>
-                <a:spcPct val="108000"/>
-              </a:lnSpc>
-              <a:buNone/>
-            </a:pPr>
-            <a:r>
-              <a:rPr lang="en-US" sz="1200" dirty="0">
-                <a:solidFill>
-                  <a:srgbClr val="8FD19E"/>
-                </a:solidFill>
-                <a:latin typeface="Courier New" pitchFamily="34" charset="0"/>
-                <a:ea typeface="Courier New" pitchFamily="34" charset="-122"/>
-                <a:cs typeface="Courier New" pitchFamily="34" charset="-120"/>
-              </a:rPr>
-              <a:t>$ launch_runs synth_1</a:t>
-            </a:r>
-            <a:endParaRPr lang="en-US" sz="1200" dirty="0"/>
-          </a:p>
-          <a:p>
-            <a:pPr algn="l" indent="0" marL="0">
-              <a:lnSpc>
-                <a:spcPct val="108000"/>
-              </a:lnSpc>
-              <a:buNone/>
-            </a:pPr>
-            <a:r>
-              <a:rPr lang="en-US" sz="1200" dirty="0">
-                <a:solidFill>
-                  <a:srgbClr val="E8E8E8"/>
-                </a:solidFill>
-                <a:latin typeface="Courier New" pitchFamily="34" charset="0"/>
-                <a:ea typeface="Courier New" pitchFamily="34" charset="-122"/>
-                <a:cs typeface="Courier New" pitchFamily="34" charset="-120"/>
-              </a:rPr>
-              <a:t>INFO: synthesis complete</a:t>
-            </a:r>
-            <a:endParaRPr lang="en-US" sz="1200" dirty="0"/>
-          </a:p>
-          <a:p>
-            <a:pPr algn="l" indent="0" marL="0">
-              <a:lnSpc>
-                <a:spcPct val="108000"/>
-              </a:lnSpc>
-              <a:buNone/>
-            </a:pPr>
-            <a:r>
-              <a:rPr lang="en-US" sz="1200" dirty="0">
-                <a:solidFill>
-                  <a:srgbClr val="8FD19E"/>
-                </a:solidFill>
-                <a:latin typeface="Courier New" pitchFamily="34" charset="0"/>
-                <a:ea typeface="Courier New" pitchFamily="34" charset="-122"/>
-                <a:cs typeface="Courier New" pitchFamily="34" charset="-120"/>
-              </a:rPr>
-              <a:t>$ launch_runs impl_1 -to_step</a:t>
-            </a:r>
-            <a:endParaRPr lang="en-US" sz="1200" dirty="0"/>
-          </a:p>
-          <a:p>
-            <a:pPr algn="l" indent="0" marL="0">
-              <a:lnSpc>
-                <a:spcPct val="108000"/>
-              </a:lnSpc>
-              <a:buNone/>
-            </a:pPr>
-            <a:r>
-              <a:rPr lang="en-US" sz="1200" dirty="0">
-                <a:solidFill>
-                  <a:srgbClr val="E8E8E8"/>
-                </a:solidFill>
-                <a:latin typeface="Courier New" pitchFamily="34" charset="0"/>
-                <a:ea typeface="Courier New" pitchFamily="34" charset="-122"/>
-                <a:cs typeface="Courier New" pitchFamily="34" charset="-120"/>
-              </a:rPr>
-              <a:t>  write_bitstream</a:t>
-            </a:r>
-            <a:endParaRPr lang="en-US" sz="1200" dirty="0"/>
-          </a:p>
-          <a:p>
-            <a:pPr algn="l" indent="0" marL="0">
-              <a:lnSpc>
-                <a:spcPct val="108000"/>
-              </a:lnSpc>
-              <a:buNone/>
-            </a:pPr>
-            <a:r>
-              <a:rPr lang="en-US" sz="1200" dirty="0">
-                <a:solidFill>
-                  <a:srgbClr val="E8E8E8"/>
-                </a:solidFill>
-                <a:latin typeface="Courier New" pitchFamily="34" charset="0"/>
-                <a:ea typeface="Courier New" pitchFamily="34" charset="-122"/>
-                <a:cs typeface="Courier New" pitchFamily="34" charset="-120"/>
-              </a:rPr>
-              <a:t>INFO: bitstream written:</a:t>
-            </a:r>
-            <a:endParaRPr lang="en-US" sz="1200" dirty="0"/>
-          </a:p>
-          <a:p>
-            <a:pPr algn="l" indent="0" marL="0">
-              <a:lnSpc>
-                <a:spcPct val="108000"/>
-              </a:lnSpc>
-              <a:buNone/>
-            </a:pPr>
-            <a:r>
-              <a:rPr lang="en-US" sz="1200" dirty="0">
-                <a:solidFill>
-                  <a:srgbClr val="E8E8E8"/>
-                </a:solidFill>
-                <a:latin typeface="Courier New" pitchFamily="34" charset="0"/>
-                <a:ea typeface="Courier New" pitchFamily="34" charset="-122"/>
-                <a:cs typeface="Courier New" pitchFamily="34" charset="-120"/>
-              </a:rPr>
-              <a:t>  rv_top.bit</a:t>
-            </a:r>
-            <a:endParaRPr lang="en-US" sz="1200" dirty="0"/>
-          </a:p>
-          <a:p>
-            <a:pPr algn="l" indent="0" marL="0">
-              <a:lnSpc>
-                <a:spcPct val="108000"/>
-              </a:lnSpc>
-              <a:buNone/>
-            </a:pPr>
-            <a:r>
-              <a:rPr lang="en-US" sz="1200" dirty="0">
-                <a:solidFill>
-                  <a:srgbClr val="8FD19E"/>
-                </a:solidFill>
-                <a:latin typeface="Courier New" pitchFamily="34" charset="0"/>
-                <a:ea typeface="Courier New" pitchFamily="34" charset="-122"/>
-                <a:cs typeface="Courier New" pitchFamily="34" charset="-120"/>
-              </a:rPr>
-              <a:t>$ program device</a:t>
-            </a:r>
-            <a:endParaRPr lang="en-US" sz="1200" dirty="0"/>
-          </a:p>
-          <a:p>
-            <a:pPr algn="l" indent="0" marL="0">
-              <a:lnSpc>
-                <a:spcPct val="108000"/>
-              </a:lnSpc>
-              <a:buNone/>
-            </a:pPr>
-            <a:r>
-              <a:rPr lang="en-US" sz="1200" dirty="0">
-                <a:solidFill>
-                  <a:srgbClr val="E8E8E8"/>
-                </a:solidFill>
-                <a:latin typeface="Courier New" pitchFamily="34" charset="0"/>
-                <a:ea typeface="Courier New" pitchFamily="34" charset="-122"/>
-                <a:cs typeface="Courier New" pitchFamily="34" charset="-120"/>
-              </a:rPr>
-              <a:t>INFO: Programmed XC7A35T</a:t>
-            </a:r>
-            <a:endParaRPr lang="en-US" sz="1200" dirty="0"/>
-          </a:p>
-        </p:txBody>
-      </p:sp>
-      <p:sp>
-        <p:nvSpPr>
-          <p:cNvPr id="24" name="Text 22"/>
-          <p:cNvSpPr/>
-          <p:nvPr/>
-        </p:nvSpPr>
-        <p:spPr>
-          <a:xfrm>
-            <a:off x="566928" y="5806440"/>
-            <a:ext cx="11057839" cy="457200"/>
-          </a:xfrm>
-          <a:prstGeom prst="rect">
-            <a:avLst/>
-          </a:prstGeom>
-          <a:noFill/>
-          <a:ln/>
-        </p:spPr>
-        <p:txBody>
-          <a:bodyPr wrap="square" lIns="0" tIns="0" rIns="0" bIns="0" rtlCol="0" anchor="ctr"/>
-          <a:lstStyle/>
-          <a:p>
-            <a:pPr algn="l" indent="0" marL="0">
-              <a:buNone/>
-            </a:pPr>
-            <a:r>
-              <a:rPr lang="en-US" sz="1500" i="1" dirty="0">
-                <a:solidFill>
-                  <a:srgbClr val="9E1B32"/>
-                </a:solidFill>
-                <a:latin typeface="Tw Cen MT" pitchFamily="34" charset="0"/>
-                <a:ea typeface="Tw Cen MT" pitchFamily="34" charset="-122"/>
-                <a:cs typeface="Tw Cen MT" pitchFamily="34" charset="-120"/>
-              </a:rPr>
-              <a:t>You can't change what you can't trace. Name every wire before you touch one.</a:t>
-            </a:r>
-            <a:endParaRPr lang="en-US" sz="1500" dirty="0"/>
-          </a:p>
-        </p:txBody>
-      </p:sp>
-      <p:sp>
-        <p:nvSpPr>
-          <p:cNvPr id="25" name="Shape 23"/>
-          <p:cNvSpPr/>
-          <p:nvPr/>
-        </p:nvSpPr>
-        <p:spPr>
-          <a:xfrm>
-            <a:off x="0" y="6382512"/>
-            <a:ext cx="475488" cy="475488"/>
-          </a:xfrm>
-          <a:prstGeom prst="rect">
-            <a:avLst/>
-          </a:prstGeom>
-          <a:solidFill>
-            <a:srgbClr val="9E1B32"/>
-          </a:solidFill>
-          <a:ln/>
-        </p:spPr>
-      </p:sp>
-      <p:sp>
-        <p:nvSpPr>
-          <p:cNvPr id="26" name="Text 24"/>
-          <p:cNvSpPr/>
-          <p:nvPr/>
-        </p:nvSpPr>
-        <p:spPr>
-          <a:xfrm>
-            <a:off x="0" y="6382512"/>
-            <a:ext cx="475488" cy="475488"/>
-          </a:xfrm>
-          <a:prstGeom prst="rect">
-            <a:avLst/>
-          </a:prstGeom>
-          <a:noFill/>
-          <a:ln/>
-        </p:spPr>
-        <p:txBody>
-          <a:bodyPr wrap="square" rtlCol="0" anchor="ctr"/>
-          <a:lstStyle/>
-          <a:p>
-            <a:pPr algn="ctr" indent="0" marL="0">
-              <a:buNone/>
-            </a:pPr>
-            <a:r>
-              <a:rPr lang="en-US" sz="2200" b="1" dirty="0">
-                <a:solidFill>
-                  <a:srgbClr val="FFFFFF"/>
-                </a:solidFill>
-                <a:latin typeface="Tw Cen MT Condensed Extra Bold" pitchFamily="34" charset="0"/>
-                <a:ea typeface="Tw Cen MT Condensed Extra Bold" pitchFamily="34" charset="-122"/>
-                <a:cs typeface="Tw Cen MT Condensed Extra Bold" pitchFamily="34" charset="-120"/>
-              </a:rPr>
               <a:t>D</a:t>
             </a:r>
             <a:endParaRPr lang="en-US" sz="2200" dirty="0"/>
@@ -10609,7 +9053,7 @@
           <a:bodyPr wrap="square" rtlCol="0" anchor="ctr"/>
           <a:lstStyle/>
           <a:p>
-            <a:pPr algn="r" indent="0" marL="0">
+            <a:pPr marL="0" indent="0" algn="r">
               <a:buNone/>
             </a:pPr>
             <a:r>
@@ -10643,6 +9087,7 @@
         <a:solidFill>
           <a:srgbClr val="FFFFFF"/>
         </a:solidFill>
+        <a:effectLst/>
       </p:bgPr>
     </p:bg>
     <p:spTree>
@@ -10680,7 +9125,7 @@
           <a:bodyPr wrap="square" rtlCol="0" anchor="ctr"/>
           <a:lstStyle/>
           <a:p>
-            <a:pPr algn="l" indent="0" marL="0">
+            <a:pPr marL="0" indent="0" algn="l">
               <a:buNone/>
             </a:pPr>
             <a:r>
@@ -10692,7 +9137,7 @@
                 <a:ea typeface="Tw Cen MT Condensed Extra Bold" pitchFamily="34" charset="-122"/>
                 <a:cs typeface="Tw Cen MT Condensed Extra Bold" pitchFamily="34" charset="-120"/>
               </a:rPr>
-              <a:t>Milestone M0 · Lab</a:t>
+              <a:t>Working Towards Milestone M0</a:t>
             </a:r>
             <a:endParaRPr lang="en-US" sz="4800" dirty="0"/>
           </a:p>
@@ -10717,6 +9162,13 @@
           </a:solidFill>
           <a:ln/>
         </p:spPr>
+        <p:txBody>
+          <a:bodyPr/>
+          <a:lstStyle/>
+          <a:p>
+            <a:endParaRPr lang="en-US"/>
+          </a:p>
+        </p:txBody>
       </p:sp>
       <p:sp>
         <p:nvSpPr>
@@ -10739,7 +9191,7 @@
           <a:bodyPr wrap="square" rtlCol="0" anchor="ctr"/>
           <a:lstStyle/>
           <a:p>
-            <a:pPr algn="l" indent="0" marL="0">
+            <a:pPr marL="0" indent="0" algn="l">
               <a:buNone/>
             </a:pPr>
             <a:r>
@@ -10776,6 +9228,13 @@
           </a:solidFill>
           <a:ln/>
         </p:spPr>
+        <p:txBody>
+          <a:bodyPr/>
+          <a:lstStyle/>
+          <a:p>
+            <a:endParaRPr lang="en-US"/>
+          </a:p>
+        </p:txBody>
       </p:sp>
       <p:sp>
         <p:nvSpPr>
@@ -10798,7 +9257,7 @@
           <a:bodyPr wrap="square" rtlCol="0" anchor="ctr"/>
           <a:lstStyle/>
           <a:p>
-            <a:pPr algn="ctr" indent="0" marL="0">
+            <a:pPr marL="0" indent="0" algn="ctr">
               <a:buNone/>
             </a:pPr>
             <a:r>
@@ -10837,7 +9296,7 @@
           <a:bodyPr wrap="square" rtlCol="0" anchor="ctr"/>
           <a:lstStyle/>
           <a:p>
-            <a:pPr algn="r" indent="0" marL="0">
+            <a:pPr marL="0" indent="0" algn="r">
               <a:buNone/>
             </a:pPr>
             <a:r>
@@ -10871,6 +9330,7 @@
         <a:solidFill>
           <a:srgbClr val="FFFFFF"/>
         </a:solidFill>
+        <a:effectLst/>
       </p:bgPr>
     </p:bg>
     <p:spTree>
@@ -10910,7 +9370,7 @@
           </a:bodyPr>
           <a:lstStyle/>
           <a:p>
-            <a:pPr algn="l" indent="0" marL="0">
+            <a:pPr marL="0" indent="0" algn="l">
               <a:buNone/>
             </a:pPr>
             <a:r>
@@ -10924,9 +9384,6 @@
               </a:rPr>
               <a:t>The Lab</a:t>
             </a:r>
-            <a:pPr algn="l" indent="0" marL="0">
-              <a:buNone/>
-            </a:pPr>
             <a:r>
               <a:rPr lang="en-US" sz="3300" b="1" dirty="0">
                 <a:solidFill>
@@ -10938,9 +9395,6 @@
               </a:rPr>
               <a:t>   |   </a:t>
             </a:r>
-            <a:pPr algn="l" indent="0" marL="0">
-              <a:buNone/>
-            </a:pPr>
             <a:r>
               <a:rPr lang="en-US" sz="3300" b="1" dirty="0">
                 <a:solidFill>
@@ -10975,6 +9429,13 @@
           </a:solidFill>
           <a:ln/>
         </p:spPr>
+        <p:txBody>
+          <a:bodyPr/>
+          <a:lstStyle/>
+          <a:p>
+            <a:endParaRPr lang="en-US"/>
+          </a:p>
+        </p:txBody>
       </p:sp>
       <p:sp>
         <p:nvSpPr>
@@ -10997,7 +9458,7 @@
           <a:bodyPr wrap="square" lIns="0" tIns="0" rIns="0" bIns="0" rtlCol="0" anchor="t"/>
           <a:lstStyle/>
           <a:p>
-            <a:pPr algn="l" indent="0" marL="0">
+            <a:pPr marL="0" indent="0" algn="l">
               <a:buNone/>
             </a:pPr>
             <a:r>
@@ -11034,6 +9495,13 @@
           </a:solidFill>
           <a:ln/>
         </p:spPr>
+        <p:txBody>
+          <a:bodyPr/>
+          <a:lstStyle/>
+          <a:p>
+            <a:endParaRPr lang="en-US"/>
+          </a:p>
+        </p:txBody>
       </p:sp>
       <p:sp>
         <p:nvSpPr>
@@ -11054,6 +9522,13 @@
           </a:solidFill>
           <a:ln/>
         </p:spPr>
+        <p:txBody>
+          <a:bodyPr/>
+          <a:lstStyle/>
+          <a:p>
+            <a:endParaRPr lang="en-US"/>
+          </a:p>
+        </p:txBody>
       </p:sp>
       <p:sp>
         <p:nvSpPr>
@@ -11074,6 +9549,13 @@
           </a:solidFill>
           <a:ln/>
         </p:spPr>
+        <p:txBody>
+          <a:bodyPr/>
+          <a:lstStyle/>
+          <a:p>
+            <a:endParaRPr lang="en-US"/>
+          </a:p>
+        </p:txBody>
       </p:sp>
       <p:sp>
         <p:nvSpPr>
@@ -11096,7 +9578,7 @@
           <a:bodyPr wrap="square" rtlCol="0" anchor="ctr"/>
           <a:lstStyle/>
           <a:p>
-            <a:pPr algn="ctr" indent="0" marL="0">
+            <a:pPr marL="0" indent="0" algn="ctr">
               <a:buNone/>
             </a:pPr>
             <a:r>
@@ -11135,7 +9617,7 @@
           <a:bodyPr wrap="square" lIns="0" tIns="0" rIns="0" bIns="0" rtlCol="0" anchor="t"/>
           <a:lstStyle/>
           <a:p>
-            <a:pPr algn="ctr" indent="0" marL="0">
+            <a:pPr marL="0" indent="0" algn="ctr">
               <a:buNone/>
             </a:pPr>
             <a:r>
@@ -11174,7 +9656,7 @@
           <a:bodyPr wrap="square" lIns="0" tIns="0" rIns="0" bIns="0" rtlCol="0" anchor="t"/>
           <a:lstStyle/>
           <a:p>
-            <a:pPr algn="ctr" indent="0" marL="0">
+            <a:pPr marL="0" indent="0" algn="ctr">
               <a:lnSpc>
                 <a:spcPct val="100000"/>
               </a:lnSpc>
@@ -11214,6 +9696,13 @@
           </a:solidFill>
           <a:ln/>
         </p:spPr>
+        <p:txBody>
+          <a:bodyPr/>
+          <a:lstStyle/>
+          <a:p>
+            <a:endParaRPr lang="en-US"/>
+          </a:p>
+        </p:txBody>
       </p:sp>
       <p:sp>
         <p:nvSpPr>
@@ -11234,6 +9723,13 @@
           </a:solidFill>
           <a:ln/>
         </p:spPr>
+        <p:txBody>
+          <a:bodyPr/>
+          <a:lstStyle/>
+          <a:p>
+            <a:endParaRPr lang="en-US"/>
+          </a:p>
+        </p:txBody>
       </p:sp>
       <p:sp>
         <p:nvSpPr>
@@ -11254,6 +9750,13 @@
           </a:solidFill>
           <a:ln/>
         </p:spPr>
+        <p:txBody>
+          <a:bodyPr/>
+          <a:lstStyle/>
+          <a:p>
+            <a:endParaRPr lang="en-US"/>
+          </a:p>
+        </p:txBody>
       </p:sp>
       <p:sp>
         <p:nvSpPr>
@@ -11276,7 +9779,7 @@
           <a:bodyPr wrap="square" rtlCol="0" anchor="ctr"/>
           <a:lstStyle/>
           <a:p>
-            <a:pPr algn="ctr" indent="0" marL="0">
+            <a:pPr marL="0" indent="0" algn="ctr">
               <a:buNone/>
             </a:pPr>
             <a:r>
@@ -11315,7 +9818,7 @@
           <a:bodyPr wrap="square" lIns="0" tIns="0" rIns="0" bIns="0" rtlCol="0" anchor="t"/>
           <a:lstStyle/>
           <a:p>
-            <a:pPr algn="ctr" indent="0" marL="0">
+            <a:pPr marL="0" indent="0" algn="ctr">
               <a:buNone/>
             </a:pPr>
             <a:r>
@@ -11354,7 +9857,7 @@
           <a:bodyPr wrap="square" lIns="0" tIns="0" rIns="0" bIns="0" rtlCol="0" anchor="t"/>
           <a:lstStyle/>
           <a:p>
-            <a:pPr algn="ctr" indent="0" marL="0">
+            <a:pPr marL="0" indent="0" algn="ctr">
               <a:lnSpc>
                 <a:spcPct val="100000"/>
               </a:lnSpc>
@@ -11394,6 +9897,13 @@
           </a:solidFill>
           <a:ln/>
         </p:spPr>
+        <p:txBody>
+          <a:bodyPr/>
+          <a:lstStyle/>
+          <a:p>
+            <a:endParaRPr lang="en-US"/>
+          </a:p>
+        </p:txBody>
       </p:sp>
       <p:sp>
         <p:nvSpPr>
@@ -11414,6 +9924,13 @@
           </a:solidFill>
           <a:ln/>
         </p:spPr>
+        <p:txBody>
+          <a:bodyPr/>
+          <a:lstStyle/>
+          <a:p>
+            <a:endParaRPr lang="en-US"/>
+          </a:p>
+        </p:txBody>
       </p:sp>
       <p:sp>
         <p:nvSpPr>
@@ -11434,6 +9951,13 @@
           </a:solidFill>
           <a:ln/>
         </p:spPr>
+        <p:txBody>
+          <a:bodyPr/>
+          <a:lstStyle/>
+          <a:p>
+            <a:endParaRPr lang="en-US"/>
+          </a:p>
+        </p:txBody>
       </p:sp>
       <p:sp>
         <p:nvSpPr>
@@ -11456,7 +9980,7 @@
           <a:bodyPr wrap="square" rtlCol="0" anchor="ctr"/>
           <a:lstStyle/>
           <a:p>
-            <a:pPr algn="ctr" indent="0" marL="0">
+            <a:pPr marL="0" indent="0" algn="ctr">
               <a:buNone/>
             </a:pPr>
             <a:r>
@@ -11495,7 +10019,7 @@
           <a:bodyPr wrap="square" lIns="0" tIns="0" rIns="0" bIns="0" rtlCol="0" anchor="t"/>
           <a:lstStyle/>
           <a:p>
-            <a:pPr algn="ctr" indent="0" marL="0">
+            <a:pPr marL="0" indent="0" algn="ctr">
               <a:buNone/>
             </a:pPr>
             <a:r>
@@ -11534,7 +10058,7 @@
           <a:bodyPr wrap="square" lIns="0" tIns="0" rIns="0" bIns="0" rtlCol="0" anchor="t"/>
           <a:lstStyle/>
           <a:p>
-            <a:pPr algn="ctr" indent="0" marL="0">
+            <a:pPr marL="0" indent="0" algn="ctr">
               <a:lnSpc>
                 <a:spcPct val="100000"/>
               </a:lnSpc>
@@ -11574,6 +10098,13 @@
           </a:solidFill>
           <a:ln/>
         </p:spPr>
+        <p:txBody>
+          <a:bodyPr/>
+          <a:lstStyle/>
+          <a:p>
+            <a:endParaRPr lang="en-US"/>
+          </a:p>
+        </p:txBody>
       </p:sp>
       <p:sp>
         <p:nvSpPr>
@@ -11594,6 +10125,13 @@
           </a:solidFill>
           <a:ln/>
         </p:spPr>
+        <p:txBody>
+          <a:bodyPr/>
+          <a:lstStyle/>
+          <a:p>
+            <a:endParaRPr lang="en-US"/>
+          </a:p>
+        </p:txBody>
       </p:sp>
       <p:sp>
         <p:nvSpPr>
@@ -11614,6 +10152,13 @@
           </a:solidFill>
           <a:ln/>
         </p:spPr>
+        <p:txBody>
+          <a:bodyPr/>
+          <a:lstStyle/>
+          <a:p>
+            <a:endParaRPr lang="en-US"/>
+          </a:p>
+        </p:txBody>
       </p:sp>
       <p:sp>
         <p:nvSpPr>
@@ -11636,7 +10181,7 @@
           <a:bodyPr wrap="square" rtlCol="0" anchor="ctr"/>
           <a:lstStyle/>
           <a:p>
-            <a:pPr algn="ctr" indent="0" marL="0">
+            <a:pPr marL="0" indent="0" algn="ctr">
               <a:buNone/>
             </a:pPr>
             <a:r>
@@ -11675,7 +10220,7 @@
           <a:bodyPr wrap="square" lIns="0" tIns="0" rIns="0" bIns="0" rtlCol="0" anchor="t"/>
           <a:lstStyle/>
           <a:p>
-            <a:pPr algn="ctr" indent="0" marL="0">
+            <a:pPr marL="0" indent="0" algn="ctr">
               <a:buNone/>
             </a:pPr>
             <a:r>
@@ -11714,7 +10259,7 @@
           <a:bodyPr wrap="square" lIns="0" tIns="0" rIns="0" bIns="0" rtlCol="0" anchor="t"/>
           <a:lstStyle/>
           <a:p>
-            <a:pPr algn="ctr" indent="0" marL="0">
+            <a:pPr marL="0" indent="0" algn="ctr">
               <a:lnSpc>
                 <a:spcPct val="100000"/>
               </a:lnSpc>
@@ -11729,7 +10274,7 @@
                 <a:ea typeface="Tw Cen MT" pitchFamily="34" charset="-122"/>
                 <a:cs typeface="Tw Cen MT" pitchFamily="34" charset="-120"/>
               </a:rPr>
-              <a:t>Record Fmax and LUT/FF counts from the reports. (Optional — sets up Week 2.)</a:t>
+              <a:t>Record Fmax and LUT/FF counts from the reports. </a:t>
             </a:r>
             <a:endParaRPr lang="en-US" sz="1350" dirty="0"/>
           </a:p>
@@ -11756,7 +10301,7 @@
           <a:bodyPr wrap="square" lIns="0" tIns="0" rIns="0" bIns="0" rtlCol="0" anchor="ctr"/>
           <a:lstStyle/>
           <a:p>
-            <a:pPr algn="l" indent="0" marL="0">
+            <a:pPr marL="0" indent="0" algn="l">
               <a:buNone/>
             </a:pPr>
             <a:r>
@@ -11793,6 +10338,13 @@
           </a:solidFill>
           <a:ln/>
         </p:spPr>
+        <p:txBody>
+          <a:bodyPr/>
+          <a:lstStyle/>
+          <a:p>
+            <a:endParaRPr lang="en-US"/>
+          </a:p>
+        </p:txBody>
       </p:sp>
       <p:sp>
         <p:nvSpPr>
@@ -11815,7 +10367,7 @@
           <a:bodyPr wrap="square" rtlCol="0" anchor="ctr"/>
           <a:lstStyle/>
           <a:p>
-            <a:pPr algn="ctr" indent="0" marL="0">
+            <a:pPr marL="0" indent="0" algn="ctr">
               <a:buNone/>
             </a:pPr>
             <a:r>
@@ -11854,7 +10406,7 @@
           <a:bodyPr wrap="square" rtlCol="0" anchor="ctr"/>
           <a:lstStyle/>
           <a:p>
-            <a:pPr algn="r" indent="0" marL="0">
+            <a:pPr marL="0" indent="0" algn="r">
               <a:buNone/>
             </a:pPr>
             <a:r>
@@ -12173,4 +10725,319 @@
     </a:ext>
   </a:extLst>
 </a:theme>
+</file>
+
+<file path=ppt/theme/theme2.xml><?xml version="1.0" encoding="utf-8"?>
+<a:theme xmlns:a="http://schemas.openxmlformats.org/drawingml/2006/main" name="Office Theme">
+  <a:themeElements>
+    <a:clrScheme name="Office">
+      <a:dk1>
+        <a:sysClr val="windowText" lastClr="000000"/>
+      </a:dk1>
+      <a:lt1>
+        <a:sysClr val="window" lastClr="FFFFFF"/>
+      </a:lt1>
+      <a:dk2>
+        <a:srgbClr val="0E2841"/>
+      </a:dk2>
+      <a:lt2>
+        <a:srgbClr val="E8E8E8"/>
+      </a:lt2>
+      <a:accent1>
+        <a:srgbClr val="156082"/>
+      </a:accent1>
+      <a:accent2>
+        <a:srgbClr val="E97132"/>
+      </a:accent2>
+      <a:accent3>
+        <a:srgbClr val="196B24"/>
+      </a:accent3>
+      <a:accent4>
+        <a:srgbClr val="0F9ED5"/>
+      </a:accent4>
+      <a:accent5>
+        <a:srgbClr val="A02B93"/>
+      </a:accent5>
+      <a:accent6>
+        <a:srgbClr val="4EA72E"/>
+      </a:accent6>
+      <a:hlink>
+        <a:srgbClr val="467886"/>
+      </a:hlink>
+      <a:folHlink>
+        <a:srgbClr val="96607D"/>
+      </a:folHlink>
+    </a:clrScheme>
+    <a:fontScheme name="Office">
+      <a:majorFont>
+        <a:latin typeface="Aptos Display" panose="02110004020202020204"/>
+        <a:ea typeface=""/>
+        <a:cs typeface=""/>
+        <a:font script="Jpan" typeface="游ゴシック Light"/>
+        <a:font script="Hang" typeface="맑은 고딕"/>
+        <a:font script="Hans" typeface="等线 Light"/>
+        <a:font script="Hant" typeface="新細明體"/>
+        <a:font script="Arab" typeface="Times New Roman"/>
+        <a:font script="Hebr" typeface="Times New Roman"/>
+        <a:font script="Thai" typeface="Angsana New"/>
+        <a:font script="Ethi" typeface="Nyala"/>
+        <a:font script="Beng" typeface="Vrinda"/>
+        <a:font script="Gujr" typeface="Shruti"/>
+        <a:font script="Khmr" typeface="MoolBoran"/>
+        <a:font script="Knda" typeface="Tunga"/>
+        <a:font script="Guru" typeface="Raavi"/>
+        <a:font script="Cans" typeface="Euphemia"/>
+        <a:font script="Cher" typeface="Plantagenet Cherokee"/>
+        <a:font script="Yiii" typeface="Microsoft Yi Baiti"/>
+        <a:font script="Tibt" typeface="Microsoft Himalaya"/>
+        <a:font script="Thaa" typeface="MV Boli"/>
+        <a:font script="Deva" typeface="Mangal"/>
+        <a:font script="Telu" typeface="Gautami"/>
+        <a:font script="Taml" typeface="Latha"/>
+        <a:font script="Syrc" typeface="Estrangelo Edessa"/>
+        <a:font script="Orya" typeface="Kalinga"/>
+        <a:font script="Mlym" typeface="Kartika"/>
+        <a:font script="Laoo" typeface="DokChampa"/>
+        <a:font script="Sinh" typeface="Iskoola Pota"/>
+        <a:font script="Mong" typeface="Mongolian Baiti"/>
+        <a:font script="Viet" typeface="Times New Roman"/>
+        <a:font script="Uigh" typeface="Microsoft Uighur"/>
+        <a:font script="Geor" typeface="Sylfaen"/>
+        <a:font script="Armn" typeface="Arial"/>
+        <a:font script="Bugi" typeface="Leelawadee UI"/>
+        <a:font script="Bopo" typeface="Microsoft JhengHei"/>
+        <a:font script="Java" typeface="Javanese Text"/>
+        <a:font script="Lisu" typeface="Segoe UI"/>
+        <a:font script="Mymr" typeface="Myanmar Text"/>
+        <a:font script="Nkoo" typeface="Ebrima"/>
+        <a:font script="Olck" typeface="Nirmala UI"/>
+        <a:font script="Osma" typeface="Ebrima"/>
+        <a:font script="Phag" typeface="Phagspa"/>
+        <a:font script="Syrn" typeface="Estrangelo Edessa"/>
+        <a:font script="Syrj" typeface="Estrangelo Edessa"/>
+        <a:font script="Syre" typeface="Estrangelo Edessa"/>
+        <a:font script="Sora" typeface="Nirmala UI"/>
+        <a:font script="Tale" typeface="Microsoft Tai Le"/>
+        <a:font script="Talu" typeface="Microsoft New Tai Lue"/>
+        <a:font script="Tfng" typeface="Ebrima"/>
+      </a:majorFont>
+      <a:minorFont>
+        <a:latin typeface="Aptos" panose="02110004020202020204"/>
+        <a:ea typeface=""/>
+        <a:cs typeface=""/>
+        <a:font script="Jpan" typeface="游ゴシック"/>
+        <a:font script="Hang" typeface="맑은 고딕"/>
+        <a:font script="Hans" typeface="等线"/>
+        <a:font script="Hant" typeface="新細明體"/>
+        <a:font script="Arab" typeface="Arial"/>
+        <a:font script="Hebr" typeface="Arial"/>
+        <a:font script="Thai" typeface="Cordia New"/>
+        <a:font script="Ethi" typeface="Nyala"/>
+        <a:font script="Beng" typeface="Vrinda"/>
+        <a:font script="Gujr" typeface="Shruti"/>
+        <a:font script="Khmr" typeface="DaunPenh"/>
+        <a:font script="Knda" typeface="Tunga"/>
+        <a:font script="Guru" typeface="Raavi"/>
+        <a:font script="Cans" typeface="Euphemia"/>
+        <a:font script="Cher" typeface="Plantagenet Cherokee"/>
+        <a:font script="Yiii" typeface="Microsoft Yi Baiti"/>
+        <a:font script="Tibt" typeface="Microsoft Himalaya"/>
+        <a:font script="Thaa" typeface="MV Boli"/>
+        <a:font script="Deva" typeface="Mangal"/>
+        <a:font script="Telu" typeface="Gautami"/>
+        <a:font script="Taml" typeface="Latha"/>
+        <a:font script="Syrc" typeface="Estrangelo Edessa"/>
+        <a:font script="Orya" typeface="Kalinga"/>
+        <a:font script="Mlym" typeface="Kartika"/>
+        <a:font script="Laoo" typeface="DokChampa"/>
+        <a:font script="Sinh" typeface="Iskoola Pota"/>
+        <a:font script="Mong" typeface="Mongolian Baiti"/>
+        <a:font script="Viet" typeface="Arial"/>
+        <a:font script="Uigh" typeface="Microsoft Uighur"/>
+        <a:font script="Geor" typeface="Sylfaen"/>
+        <a:font script="Armn" typeface="Arial"/>
+        <a:font script="Bugi" typeface="Leelawadee UI"/>
+        <a:font script="Bopo" typeface="Microsoft JhengHei"/>
+        <a:font script="Java" typeface="Javanese Text"/>
+        <a:font script="Lisu" typeface="Segoe UI"/>
+        <a:font script="Mymr" typeface="Myanmar Text"/>
+        <a:font script="Nkoo" typeface="Ebrima"/>
+        <a:font script="Olck" typeface="Nirmala UI"/>
+        <a:font script="Osma" typeface="Ebrima"/>
+        <a:font script="Phag" typeface="Phagspa"/>
+        <a:font script="Syrn" typeface="Estrangelo Edessa"/>
+        <a:font script="Syrj" typeface="Estrangelo Edessa"/>
+        <a:font script="Syre" typeface="Estrangelo Edessa"/>
+        <a:font script="Sora" typeface="Nirmala UI"/>
+        <a:font script="Tale" typeface="Microsoft Tai Le"/>
+        <a:font script="Talu" typeface="Microsoft New Tai Lue"/>
+        <a:font script="Tfng" typeface="Ebrima"/>
+      </a:minorFont>
+    </a:fontScheme>
+    <a:fmtScheme name="Office">
+      <a:fillStyleLst>
+        <a:solidFill>
+          <a:schemeClr val="phClr"/>
+        </a:solidFill>
+        <a:gradFill rotWithShape="1">
+          <a:gsLst>
+            <a:gs pos="0">
+              <a:schemeClr val="phClr">
+                <a:lumMod val="110000"/>
+                <a:satMod val="105000"/>
+                <a:tint val="67000"/>
+              </a:schemeClr>
+            </a:gs>
+            <a:gs pos="50000">
+              <a:schemeClr val="phClr">
+                <a:lumMod val="105000"/>
+                <a:satMod val="103000"/>
+                <a:tint val="73000"/>
+              </a:schemeClr>
+            </a:gs>
+            <a:gs pos="100000">
+              <a:schemeClr val="phClr">
+                <a:lumMod val="105000"/>
+                <a:satMod val="109000"/>
+                <a:tint val="81000"/>
+              </a:schemeClr>
+            </a:gs>
+          </a:gsLst>
+          <a:lin ang="5400000" scaled="0"/>
+        </a:gradFill>
+        <a:gradFill rotWithShape="1">
+          <a:gsLst>
+            <a:gs pos="0">
+              <a:schemeClr val="phClr">
+                <a:satMod val="103000"/>
+                <a:lumMod val="102000"/>
+                <a:tint val="94000"/>
+              </a:schemeClr>
+            </a:gs>
+            <a:gs pos="50000">
+              <a:schemeClr val="phClr">
+                <a:satMod val="110000"/>
+                <a:lumMod val="100000"/>
+                <a:shade val="100000"/>
+              </a:schemeClr>
+            </a:gs>
+            <a:gs pos="100000">
+              <a:schemeClr val="phClr">
+                <a:lumMod val="99000"/>
+                <a:satMod val="120000"/>
+                <a:shade val="78000"/>
+              </a:schemeClr>
+            </a:gs>
+          </a:gsLst>
+          <a:lin ang="5400000" scaled="0"/>
+        </a:gradFill>
+      </a:fillStyleLst>
+      <a:lnStyleLst>
+        <a:ln w="12700" cap="flat" cmpd="sng" algn="ctr">
+          <a:solidFill>
+            <a:schemeClr val="phClr"/>
+          </a:solidFill>
+          <a:prstDash val="solid"/>
+          <a:miter lim="800000"/>
+        </a:ln>
+        <a:ln w="19050" cap="flat" cmpd="sng" algn="ctr">
+          <a:solidFill>
+            <a:schemeClr val="phClr"/>
+          </a:solidFill>
+          <a:prstDash val="solid"/>
+          <a:miter lim="800000"/>
+        </a:ln>
+        <a:ln w="25400" cap="flat" cmpd="sng" algn="ctr">
+          <a:solidFill>
+            <a:schemeClr val="phClr"/>
+          </a:solidFill>
+          <a:prstDash val="solid"/>
+          <a:miter lim="800000"/>
+        </a:ln>
+      </a:lnStyleLst>
+      <a:effectStyleLst>
+        <a:effectStyle>
+          <a:effectLst/>
+        </a:effectStyle>
+        <a:effectStyle>
+          <a:effectLst/>
+        </a:effectStyle>
+        <a:effectStyle>
+          <a:effectLst>
+            <a:outerShdw blurRad="57150" dist="19050" dir="5400000" algn="ctr" rotWithShape="0">
+              <a:srgbClr val="000000">
+                <a:alpha val="63000"/>
+              </a:srgbClr>
+            </a:outerShdw>
+          </a:effectLst>
+        </a:effectStyle>
+      </a:effectStyleLst>
+      <a:bgFillStyleLst>
+        <a:solidFill>
+          <a:schemeClr val="phClr"/>
+        </a:solidFill>
+        <a:solidFill>
+          <a:schemeClr val="phClr">
+            <a:tint val="95000"/>
+            <a:satMod val="170000"/>
+          </a:schemeClr>
+        </a:solidFill>
+        <a:gradFill rotWithShape="1">
+          <a:gsLst>
+            <a:gs pos="0">
+              <a:schemeClr val="phClr">
+                <a:tint val="93000"/>
+                <a:satMod val="150000"/>
+                <a:shade val="98000"/>
+                <a:lumMod val="102000"/>
+              </a:schemeClr>
+            </a:gs>
+            <a:gs pos="50000">
+              <a:schemeClr val="phClr">
+                <a:tint val="98000"/>
+                <a:satMod val="130000"/>
+                <a:shade val="90000"/>
+                <a:lumMod val="103000"/>
+              </a:schemeClr>
+            </a:gs>
+            <a:gs pos="100000">
+              <a:schemeClr val="phClr">
+                <a:shade val="63000"/>
+                <a:satMod val="120000"/>
+              </a:schemeClr>
+            </a:gs>
+          </a:gsLst>
+          <a:lin ang="5400000" scaled="0"/>
+        </a:gradFill>
+      </a:bgFillStyleLst>
+    </a:fmtScheme>
+  </a:themeElements>
+  <a:objectDefaults>
+    <a:lnDef>
+      <a:spPr/>
+      <a:bodyPr/>
+      <a:lstStyle/>
+      <a:style>
+        <a:lnRef idx="2">
+          <a:schemeClr val="accent1"/>
+        </a:lnRef>
+        <a:fillRef idx="0">
+          <a:schemeClr val="accent1"/>
+        </a:fillRef>
+        <a:effectRef idx="1">
+          <a:schemeClr val="accent1"/>
+        </a:effectRef>
+        <a:fontRef idx="minor">
+          <a:schemeClr val="tx1"/>
+        </a:fontRef>
+      </a:style>
+    </a:lnDef>
+  </a:objectDefaults>
+  <a:extraClrSchemeLst/>
+  <a:extLst>
+    <a:ext uri="{05A4C25C-085E-4340-85A3-A5531E510DB2}">
+      <thm15:themeFamily xmlns:thm15="http://schemas.microsoft.com/office/thememl/2012/main" name="Office Theme" id="{2E142A2C-CD16-42D6-873A-C26D2A0506FA}" vid="{1BDDFF52-6CD6-40A5-AB3C-68EB2F1E4D0A}"/>
+    </a:ext>
+  </a:extLst>
+</a:theme>
 </file>
--- a/Week 1/CENG4100_Week01.pptx
+++ b/Week 1/CENG4100_Week01.pptx
@@ -5,7 +5,7 @@
     <p:sldMasterId id="2147483648" r:id="rId1"/>
   </p:sldMasterIdLst>
   <p:notesMasterIdLst>
-    <p:notesMasterId r:id="rId13"/>
+    <p:notesMasterId r:id="rId14"/>
   </p:notesMasterIdLst>
   <p:sldIdLst>
     <p:sldId id="256" r:id="rId2"/>
@@ -19,6 +19,7 @@
     <p:sldId id="264" r:id="rId10"/>
     <p:sldId id="265" r:id="rId11"/>
     <p:sldId id="266" r:id="rId12"/>
+    <p:sldId id="267" r:id="rId13"/>
   </p:sldIdLst>
   <p:sldSz cx="12192000" cy="6858000"/>
   <p:notesSz cx="6858000" cy="12192000"/>
@@ -490,6 +491,114 @@
     <p:extLst>
       <p:ext uri="{BB962C8B-B14F-4D97-AF65-F5344CB8AC3E}">
         <p14:creationId xmlns:p14="http://schemas.microsoft.com/office/powerpoint/2010/main" val="1024086991"/>
+      </p:ext>
+    </p:extLst>
+  </p:cSld>
+  <p:clrMapOvr>
+    <a:masterClrMapping/>
+  </p:clrMapOvr>
+</p:notes>
+</file>
+
+<file path=ppt/notesSlides/notesSlide12.xml><?xml version="1.0" encoding="utf-8"?>
+<p:notes xmlns:a="http://schemas.openxmlformats.org/drawingml/2006/main" xmlns:r="http://schemas.openxmlformats.org/officeDocument/2006/relationships" xmlns:p="http://schemas.openxmlformats.org/presentationml/2006/main">
+  <p:cSld>
+    <p:spTree>
+      <p:nvGrpSpPr>
+        <p:cNvPr id="1" name="">
+          <a:extLst>
+            <a:ext uri="{FF2B5EF4-FFF2-40B4-BE49-F238E27FC236}">
+              <a16:creationId xmlns:a16="http://schemas.microsoft.com/office/drawing/2014/main" id="{E51ED09F-D14A-7903-B023-2611489BE5DA}"/>
+            </a:ext>
+          </a:extLst>
+        </p:cNvPr>
+        <p:cNvGrpSpPr/>
+        <p:nvPr/>
+      </p:nvGrpSpPr>
+      <p:grpSpPr>
+        <a:xfrm>
+          <a:off x="0" y="0"/>
+          <a:ext cx="0" cy="0"/>
+          <a:chOff x="0" y="0"/>
+          <a:chExt cx="0" cy="0"/>
+        </a:xfrm>
+      </p:grpSpPr>
+      <p:sp>
+        <p:nvSpPr>
+          <p:cNvPr id="2" name="Slide Image Placeholder 1">
+            <a:extLst>
+              <a:ext uri="{FF2B5EF4-FFF2-40B4-BE49-F238E27FC236}">
+                <a16:creationId xmlns:a16="http://schemas.microsoft.com/office/drawing/2014/main" id="{4E753C8C-354E-F278-AE1E-A98522DC2C2A}"/>
+              </a:ext>
+            </a:extLst>
+          </p:cNvPr>
+          <p:cNvSpPr>
+            <a:spLocks noGrp="1" noRot="1" noChangeAspect="1"/>
+          </p:cNvSpPr>
+          <p:nvPr>
+            <p:ph type="sldImg"/>
+          </p:nvPr>
+        </p:nvSpPr>
+        <p:spPr/>
+      </p:sp>
+      <p:sp>
+        <p:nvSpPr>
+          <p:cNvPr id="3" name="Notes Placeholder 2">
+            <a:extLst>
+              <a:ext uri="{FF2B5EF4-FFF2-40B4-BE49-F238E27FC236}">
+                <a16:creationId xmlns:a16="http://schemas.microsoft.com/office/drawing/2014/main" id="{9CAB7C84-3635-8641-F58C-EF2C884BC3A2}"/>
+              </a:ext>
+            </a:extLst>
+          </p:cNvPr>
+          <p:cNvSpPr>
+            <a:spLocks noGrp="1"/>
+          </p:cNvSpPr>
+          <p:nvPr>
+            <p:ph type="body" idx="1"/>
+          </p:nvPr>
+        </p:nvSpPr>
+        <p:spPr/>
+        <p:txBody>
+          <a:bodyPr/>
+          <a:lstStyle/>
+          <a:p>
+            <a:endParaRPr lang="en-US" dirty="0"/>
+          </a:p>
+        </p:txBody>
+      </p:sp>
+      <p:sp>
+        <p:nvSpPr>
+          <p:cNvPr id="4" name="Slide Number Placeholder 3">
+            <a:extLst>
+              <a:ext uri="{FF2B5EF4-FFF2-40B4-BE49-F238E27FC236}">
+                <a16:creationId xmlns:a16="http://schemas.microsoft.com/office/drawing/2014/main" id="{B69D616C-9327-4F06-EE3F-3FB7A798BD7C}"/>
+              </a:ext>
+            </a:extLst>
+          </p:cNvPr>
+          <p:cNvSpPr>
+            <a:spLocks noGrp="1"/>
+          </p:cNvSpPr>
+          <p:nvPr>
+            <p:ph type="sldNum" sz="quarter" idx="10"/>
+          </p:nvPr>
+        </p:nvSpPr>
+        <p:spPr/>
+        <p:txBody>
+          <a:bodyPr/>
+          <a:lstStyle/>
+          <a:p>
+            <a:fld id="{F7021451-1387-4CA6-816F-3879F97B5CBC}" type="slidenum">
+              <a:rPr lang="en-US"/>
+              <a:t>12</a:t>
+            </a:fld>
+            <a:endParaRPr lang="en-US"/>
+          </a:p>
+        </p:txBody>
+      </p:sp>
+    </p:spTree>
+    <p:extLst>
+      <p:ext uri="{BB962C8B-B14F-4D97-AF65-F5344CB8AC3E}">
+        <p14:creationId xmlns:p14="http://schemas.microsoft.com/office/powerpoint/2010/main" val="1327490278"/>
       </p:ext>
     </p:extLst>
   </p:cSld>
@@ -2775,6 +2884,653 @@
         </p:txBody>
       </p:sp>
     </p:spTree>
+  </p:cSld>
+  <p:clrMapOvr>
+    <a:masterClrMapping/>
+  </p:clrMapOvr>
+</p:sld>
+</file>
+
+<file path=ppt/slides/slide12.xml><?xml version="1.0" encoding="utf-8"?>
+<p:sld xmlns:a="http://schemas.openxmlformats.org/drawingml/2006/main" xmlns:r="http://schemas.openxmlformats.org/officeDocument/2006/relationships" xmlns:p="http://schemas.openxmlformats.org/presentationml/2006/main">
+  <p:cSld>
+    <p:bg>
+      <p:bgPr>
+        <a:solidFill>
+          <a:srgbClr val="FFFFFF"/>
+        </a:solidFill>
+        <a:effectLst/>
+      </p:bgPr>
+    </p:bg>
+    <p:spTree>
+      <p:nvGrpSpPr>
+        <p:cNvPr id="1" name="">
+          <a:extLst>
+            <a:ext uri="{FF2B5EF4-FFF2-40B4-BE49-F238E27FC236}">
+              <a16:creationId xmlns:a16="http://schemas.microsoft.com/office/drawing/2014/main" id="{80C33584-8F34-6D9B-355E-FC27DDBD5D7C}"/>
+            </a:ext>
+          </a:extLst>
+        </p:cNvPr>
+        <p:cNvGrpSpPr/>
+        <p:nvPr/>
+      </p:nvGrpSpPr>
+      <p:grpSpPr>
+        <a:xfrm>
+          <a:off x="0" y="0"/>
+          <a:ext cx="0" cy="0"/>
+          <a:chOff x="0" y="0"/>
+          <a:chExt cx="0" cy="0"/>
+        </a:xfrm>
+      </p:grpSpPr>
+      <p:sp>
+        <p:nvSpPr>
+          <p:cNvPr id="2" name="Text 0">
+            <a:extLst>
+              <a:ext uri="{FF2B5EF4-FFF2-40B4-BE49-F238E27FC236}">
+                <a16:creationId xmlns:a16="http://schemas.microsoft.com/office/drawing/2014/main" id="{84E96852-A711-BC14-1A4F-73A67D51E53E}"/>
+              </a:ext>
+            </a:extLst>
+          </p:cNvPr>
+          <p:cNvSpPr/>
+          <p:nvPr/>
+        </p:nvSpPr>
+        <p:spPr>
+          <a:xfrm>
+            <a:off x="566928" y="310896"/>
+            <a:ext cx="11057839" cy="658368"/>
+          </a:xfrm>
+          <a:prstGeom prst="rect">
+            <a:avLst/>
+          </a:prstGeom>
+          <a:noFill/>
+          <a:ln/>
+        </p:spPr>
+        <p:txBody>
+          <a:bodyPr wrap="none" lIns="0" tIns="0" rIns="0" bIns="0" rtlCol="0" anchor="ctr">
+            <a:normAutofit/>
+          </a:bodyPr>
+          <a:lstStyle/>
+          <a:p>
+            <a:r>
+              <a:rPr lang="en-US" sz="3300" b="1" dirty="0">
+                <a:solidFill>
+                  <a:srgbClr val="1A1A1A"/>
+                </a:solidFill>
+                <a:latin typeface="Tw Cen MT Condensed Extra Bold" pitchFamily="34" charset="0"/>
+              </a:rPr>
+              <a:t>By December, this goes on your </a:t>
+            </a:r>
+            <a:r>
+              <a:rPr lang="en-US" sz="3600" dirty="0">
+                <a:solidFill>
+                  <a:srgbClr val="1A1F26"/>
+                </a:solidFill>
+                <a:latin typeface="Tw Cen MT Condensed Extra Bold" pitchFamily="34" charset="0"/>
+                <a:ea typeface="Tw Cen MT Condensed Extra Bold" pitchFamily="34" charset="-122"/>
+                <a:cs typeface="Tw Cen MT Condensed Extra Bold" pitchFamily="34" charset="-120"/>
+              </a:rPr>
+              <a:t>résumé</a:t>
+            </a:r>
+            <a:endParaRPr lang="en-US" sz="3300" dirty="0"/>
+          </a:p>
+        </p:txBody>
+      </p:sp>
+      <p:sp>
+        <p:nvSpPr>
+          <p:cNvPr id="3" name="Shape 1">
+            <a:extLst>
+              <a:ext uri="{FF2B5EF4-FFF2-40B4-BE49-F238E27FC236}">
+                <a16:creationId xmlns:a16="http://schemas.microsoft.com/office/drawing/2014/main" id="{A2090A53-1423-097A-F4DD-75FE6C2E32A8}"/>
+              </a:ext>
+            </a:extLst>
+          </p:cNvPr>
+          <p:cNvSpPr/>
+          <p:nvPr/>
+        </p:nvSpPr>
+        <p:spPr>
+          <a:xfrm>
+            <a:off x="566928" y="1060704"/>
+            <a:ext cx="11057839" cy="25603"/>
+          </a:xfrm>
+          <a:prstGeom prst="rect">
+            <a:avLst/>
+          </a:prstGeom>
+          <a:solidFill>
+            <a:srgbClr val="9E1B32"/>
+          </a:solidFill>
+          <a:ln/>
+        </p:spPr>
+        <p:txBody>
+          <a:bodyPr/>
+          <a:lstStyle/>
+          <a:p>
+            <a:endParaRPr lang="en-US"/>
+          </a:p>
+        </p:txBody>
+      </p:sp>
+      <p:sp>
+        <p:nvSpPr>
+          <p:cNvPr id="4" name="Text 2">
+            <a:extLst>
+              <a:ext uri="{FF2B5EF4-FFF2-40B4-BE49-F238E27FC236}">
+                <a16:creationId xmlns:a16="http://schemas.microsoft.com/office/drawing/2014/main" id="{B0EDF961-8A63-A5D7-373F-CA29CB464598}"/>
+              </a:ext>
+            </a:extLst>
+          </p:cNvPr>
+          <p:cNvSpPr/>
+          <p:nvPr/>
+        </p:nvSpPr>
+        <p:spPr>
+          <a:xfrm>
+            <a:off x="566928" y="1109615"/>
+            <a:ext cx="11057839" cy="502920"/>
+          </a:xfrm>
+          <a:prstGeom prst="rect">
+            <a:avLst/>
+          </a:prstGeom>
+          <a:noFill/>
+          <a:ln/>
+        </p:spPr>
+        <p:txBody>
+          <a:bodyPr wrap="square" lIns="0" tIns="0" rIns="0" bIns="0" rtlCol="0" anchor="t"/>
+          <a:lstStyle/>
+          <a:p>
+            <a:r>
+              <a:rPr lang="en-US" sz="1600" dirty="0">
+                <a:latin typeface="Tw Cen MT" panose="020B0602020104020603" pitchFamily="34" charset="0"/>
+              </a:rPr>
+              <a:t>Built and deployed a working RISC-V (RV32I) processor in Verilog on a Xilinx Artix-7 FPGA including </a:t>
+            </a:r>
+            <a:r>
+              <a:rPr lang="en-US" sz="1600" dirty="0" err="1">
+                <a:latin typeface="Tw Cen MT" panose="020B0602020104020603" pitchFamily="34" charset="0"/>
+              </a:rPr>
+              <a:t>datapath</a:t>
+            </a:r>
+            <a:r>
+              <a:rPr lang="en-US" sz="1600" dirty="0">
+                <a:latin typeface="Tw Cen MT" panose="020B0602020104020603" pitchFamily="34" charset="0"/>
+              </a:rPr>
+              <a:t>, control, pipelining, and cache using </a:t>
+            </a:r>
+            <a:r>
+              <a:rPr lang="en-US" sz="1600" dirty="0" err="1">
+                <a:latin typeface="Tw Cen MT" panose="020B0602020104020603" pitchFamily="34" charset="0"/>
+              </a:rPr>
+              <a:t>Vivado</a:t>
+            </a:r>
+            <a:r>
+              <a:rPr lang="en-US" sz="1600" dirty="0">
+                <a:latin typeface="Tw Cen MT" panose="020B0602020104020603" pitchFamily="34" charset="0"/>
+              </a:rPr>
+              <a:t>, IP Integrator, and RTL simulation.</a:t>
+            </a:r>
+          </a:p>
+        </p:txBody>
+      </p:sp>
+      <p:sp>
+        <p:nvSpPr>
+          <p:cNvPr id="18" name="Shape 16">
+            <a:extLst>
+              <a:ext uri="{FF2B5EF4-FFF2-40B4-BE49-F238E27FC236}">
+                <a16:creationId xmlns:a16="http://schemas.microsoft.com/office/drawing/2014/main" id="{03473B57-5CFB-17E1-976B-250F4C17FC89}"/>
+              </a:ext>
+            </a:extLst>
+          </p:cNvPr>
+          <p:cNvSpPr/>
+          <p:nvPr/>
+        </p:nvSpPr>
+        <p:spPr>
+          <a:xfrm>
+            <a:off x="0" y="6382512"/>
+            <a:ext cx="475488" cy="475488"/>
+          </a:xfrm>
+          <a:prstGeom prst="rect">
+            <a:avLst/>
+          </a:prstGeom>
+          <a:solidFill>
+            <a:srgbClr val="9E1B32"/>
+          </a:solidFill>
+          <a:ln/>
+        </p:spPr>
+        <p:txBody>
+          <a:bodyPr/>
+          <a:lstStyle/>
+          <a:p>
+            <a:endParaRPr lang="en-US"/>
+          </a:p>
+        </p:txBody>
+      </p:sp>
+      <p:sp>
+        <p:nvSpPr>
+          <p:cNvPr id="19" name="Text 17">
+            <a:extLst>
+              <a:ext uri="{FF2B5EF4-FFF2-40B4-BE49-F238E27FC236}">
+                <a16:creationId xmlns:a16="http://schemas.microsoft.com/office/drawing/2014/main" id="{CDCE57CA-3602-4AF5-8ECF-3654312756F1}"/>
+              </a:ext>
+            </a:extLst>
+          </p:cNvPr>
+          <p:cNvSpPr/>
+          <p:nvPr/>
+        </p:nvSpPr>
+        <p:spPr>
+          <a:xfrm>
+            <a:off x="0" y="6382512"/>
+            <a:ext cx="475488" cy="475488"/>
+          </a:xfrm>
+          <a:prstGeom prst="rect">
+            <a:avLst/>
+          </a:prstGeom>
+          <a:noFill/>
+          <a:ln/>
+        </p:spPr>
+        <p:txBody>
+          <a:bodyPr wrap="square" rtlCol="0" anchor="ctr"/>
+          <a:lstStyle/>
+          <a:p>
+            <a:pPr marL="0" indent="0" algn="ctr">
+              <a:buNone/>
+            </a:pPr>
+            <a:r>
+              <a:rPr lang="en-US" sz="2200" b="1" dirty="0">
+                <a:solidFill>
+                  <a:srgbClr val="FFFFFF"/>
+                </a:solidFill>
+                <a:latin typeface="Tw Cen MT Condensed Extra Bold" pitchFamily="34" charset="0"/>
+                <a:ea typeface="Tw Cen MT Condensed Extra Bold" pitchFamily="34" charset="-122"/>
+                <a:cs typeface="Tw Cen MT Condensed Extra Bold" pitchFamily="34" charset="-120"/>
+              </a:rPr>
+              <a:t>D</a:t>
+            </a:r>
+            <a:endParaRPr lang="en-US" sz="2200" dirty="0"/>
+          </a:p>
+        </p:txBody>
+      </p:sp>
+      <p:sp>
+        <p:nvSpPr>
+          <p:cNvPr id="20" name="Text 18">
+            <a:extLst>
+              <a:ext uri="{FF2B5EF4-FFF2-40B4-BE49-F238E27FC236}">
+                <a16:creationId xmlns:a16="http://schemas.microsoft.com/office/drawing/2014/main" id="{2B1DC159-EE5D-FE75-02EB-952BD487E02E}"/>
+              </a:ext>
+            </a:extLst>
+          </p:cNvPr>
+          <p:cNvSpPr/>
+          <p:nvPr/>
+        </p:nvSpPr>
+        <p:spPr>
+          <a:xfrm>
+            <a:off x="11368735" y="6400800"/>
+            <a:ext cx="502920" cy="274320"/>
+          </a:xfrm>
+          <a:prstGeom prst="rect">
+            <a:avLst/>
+          </a:prstGeom>
+          <a:noFill/>
+          <a:ln/>
+        </p:spPr>
+        <p:txBody>
+          <a:bodyPr wrap="square" rtlCol="0" anchor="ctr"/>
+          <a:lstStyle/>
+          <a:p>
+            <a:pPr marL="0" indent="0" algn="r">
+              <a:buNone/>
+            </a:pPr>
+            <a:r>
+              <a:rPr lang="en-US" sz="1200" dirty="0">
+                <a:solidFill>
+                  <a:srgbClr val="9AA0A6"/>
+                </a:solidFill>
+                <a:latin typeface="Tw Cen MT" pitchFamily="34" charset="0"/>
+                <a:ea typeface="Tw Cen MT" pitchFamily="34" charset="-122"/>
+                <a:cs typeface="Tw Cen MT" pitchFamily="34" charset="-120"/>
+              </a:rPr>
+              <a:t>10</a:t>
+            </a:r>
+            <a:endParaRPr lang="en-US" sz="1200" dirty="0"/>
+          </a:p>
+        </p:txBody>
+      </p:sp>
+      <p:sp>
+        <p:nvSpPr>
+          <p:cNvPr id="5" name="TextBox 4">
+            <a:extLst>
+              <a:ext uri="{FF2B5EF4-FFF2-40B4-BE49-F238E27FC236}">
+                <a16:creationId xmlns:a16="http://schemas.microsoft.com/office/drawing/2014/main" id="{B4BC32CD-74E7-6F1A-C189-E9B511A9173C}"/>
+              </a:ext>
+            </a:extLst>
+          </p:cNvPr>
+          <p:cNvSpPr txBox="1"/>
+          <p:nvPr/>
+        </p:nvSpPr>
+        <p:spPr>
+          <a:xfrm>
+            <a:off x="566928" y="1891005"/>
+            <a:ext cx="5268791" cy="4431983"/>
+          </a:xfrm>
+          <a:prstGeom prst="rect">
+            <a:avLst/>
+          </a:prstGeom>
+          <a:solidFill>
+            <a:srgbClr val="F8E8EC"/>
+          </a:solidFill>
+        </p:spPr>
+        <p:txBody>
+          <a:bodyPr wrap="square" rtlCol="0">
+            <a:spAutoFit/>
+          </a:bodyPr>
+          <a:lstStyle/>
+          <a:p>
+            <a:pPr rtl="0">
+              <a:buNone/>
+            </a:pPr>
+            <a:r>
+              <a:rPr lang="en-US" sz="1600" b="1" dirty="0">
+                <a:latin typeface="Tw Cen MT" panose="020B0602020104020603" pitchFamily="34" charset="0"/>
+              </a:rPr>
+              <a:t>RISC-V Processor Design &amp; FPGA Implementation</a:t>
+            </a:r>
+            <a:endParaRPr lang="en-US" sz="1600" dirty="0">
+              <a:latin typeface="Tw Cen MT" panose="020B0602020104020603" pitchFamily="34" charset="0"/>
+            </a:endParaRPr>
+          </a:p>
+          <a:p>
+            <a:pPr marL="342900" lvl="0" indent="-342900" rtl="0">
+              <a:buFont typeface="Arial" panose="020B0604020202020204" pitchFamily="34" charset="0"/>
+              <a:buChar char="•"/>
+            </a:pPr>
+            <a:r>
+              <a:rPr lang="en-US" sz="1400" dirty="0">
+                <a:latin typeface="Tw Cen MT" panose="020B0602020104020603" pitchFamily="34" charset="0"/>
+              </a:rPr>
+              <a:t>Designed and built a working single-cycle RISC-V (RV32I) processor from the ground up in Verilog, progressing from combinational logic to a complete stored-program computer, and deployed it to a Xilinx Artix-7 FPGA (</a:t>
+            </a:r>
+            <a:r>
+              <a:rPr lang="en-US" sz="1400" dirty="0" err="1">
+                <a:latin typeface="Tw Cen MT" panose="020B0602020104020603" pitchFamily="34" charset="0"/>
+              </a:rPr>
+              <a:t>Digilent</a:t>
+            </a:r>
+            <a:r>
+              <a:rPr lang="en-US" sz="1400" dirty="0">
+                <a:latin typeface="Tw Cen MT" panose="020B0602020104020603" pitchFamily="34" charset="0"/>
+              </a:rPr>
+              <a:t> </a:t>
+            </a:r>
+            <a:r>
+              <a:rPr lang="en-US" sz="1400" dirty="0" err="1">
+                <a:latin typeface="Tw Cen MT" panose="020B0602020104020603" pitchFamily="34" charset="0"/>
+              </a:rPr>
+              <a:t>Basys</a:t>
+            </a:r>
+            <a:r>
+              <a:rPr lang="en-US" sz="1400" dirty="0">
+                <a:latin typeface="Tw Cen MT" panose="020B0602020104020603" pitchFamily="34" charset="0"/>
+              </a:rPr>
+              <a:t> 3).</a:t>
+            </a:r>
+          </a:p>
+          <a:p>
+            <a:pPr marL="342900" lvl="0" indent="-342900" rtl="0">
+              <a:buFont typeface="Arial" panose="020B0604020202020204" pitchFamily="34" charset="0"/>
+              <a:buChar char="•"/>
+            </a:pPr>
+            <a:r>
+              <a:rPr lang="en-US" sz="1400" dirty="0">
+                <a:latin typeface="Tw Cen MT" panose="020B0602020104020603" pitchFamily="34" charset="0"/>
+              </a:rPr>
+              <a:t>Constructed the full </a:t>
+            </a:r>
+            <a:r>
+              <a:rPr lang="en-US" sz="1400" dirty="0" err="1">
+                <a:latin typeface="Tw Cen MT" panose="020B0602020104020603" pitchFamily="34" charset="0"/>
+              </a:rPr>
+              <a:t>datapath</a:t>
+            </a:r>
+            <a:r>
+              <a:rPr lang="en-US" sz="1400" dirty="0">
+                <a:latin typeface="Tw Cen MT" panose="020B0602020104020603" pitchFamily="34" charset="0"/>
+              </a:rPr>
+              <a:t> block-by-block in </a:t>
+            </a:r>
+            <a:r>
+              <a:rPr lang="en-US" sz="1400" dirty="0" err="1">
+                <a:latin typeface="Tw Cen MT" panose="020B0602020104020603" pitchFamily="34" charset="0"/>
+              </a:rPr>
+              <a:t>Vivado</a:t>
+            </a:r>
+            <a:r>
+              <a:rPr lang="en-US" sz="1400" dirty="0">
+                <a:latin typeface="Tw Cen MT" panose="020B0602020104020603" pitchFamily="34" charset="0"/>
+              </a:rPr>
+              <a:t> IP Integrator — ALU, register file, program counter, instruction decoder, and write-back logic — validating each stage in simulation and on hardware.</a:t>
+            </a:r>
+          </a:p>
+          <a:p>
+            <a:pPr marL="342900" lvl="0" indent="-342900" rtl="0">
+              <a:buFont typeface="Arial" panose="020B0604020202020204" pitchFamily="34" charset="0"/>
+              <a:buChar char="•"/>
+            </a:pPr>
+            <a:r>
+              <a:rPr lang="en-US" sz="1400" dirty="0">
+                <a:latin typeface="Tw Cen MT" panose="020B0602020104020603" pitchFamily="34" charset="0"/>
+              </a:rPr>
+              <a:t>Extended the processor incrementally: added new ALU operations and a custom instruction (decode → ALU-control → </a:t>
+            </a:r>
+            <a:r>
+              <a:rPr lang="en-US" sz="1400" dirty="0" err="1">
+                <a:latin typeface="Tw Cen MT" panose="020B0602020104020603" pitchFamily="34" charset="0"/>
+              </a:rPr>
+              <a:t>datapath</a:t>
+            </a:r>
+            <a:r>
+              <a:rPr lang="en-US" sz="1400" dirty="0">
+                <a:latin typeface="Tw Cen MT" panose="020B0602020104020603" pitchFamily="34" charset="0"/>
+              </a:rPr>
+              <a:t>), an RV32M multiply/divide unit, a 5-stage pipeline with hazard detection and forwarding, and a data cache.*</a:t>
+            </a:r>
+          </a:p>
+          <a:p>
+            <a:pPr marL="342900" lvl="0" indent="-342900" rtl="0">
+              <a:buFont typeface="Arial" panose="020B0604020202020204" pitchFamily="34" charset="0"/>
+              <a:buChar char="•"/>
+            </a:pPr>
+            <a:r>
+              <a:rPr lang="en-US" sz="1400" dirty="0">
+                <a:latin typeface="Tw Cen MT" panose="020B0602020104020603" pitchFamily="34" charset="0"/>
+              </a:rPr>
+              <a:t>Verified designs with Verilog testbenches (Icarus Verilog/</a:t>
+            </a:r>
+            <a:r>
+              <a:rPr lang="en-US" sz="1400" dirty="0" err="1">
+                <a:latin typeface="Tw Cen MT" panose="020B0602020104020603" pitchFamily="34" charset="0"/>
+              </a:rPr>
+              <a:t>Vivado</a:t>
+            </a:r>
+            <a:r>
+              <a:rPr lang="en-US" sz="1400" dirty="0">
+                <a:latin typeface="Tw Cen MT" panose="020B0602020104020603" pitchFamily="34" charset="0"/>
+              </a:rPr>
+              <a:t> </a:t>
+            </a:r>
+            <a:r>
+              <a:rPr lang="en-US" sz="1400" dirty="0" err="1">
+                <a:latin typeface="Tw Cen MT" panose="020B0602020104020603" pitchFamily="34" charset="0"/>
+              </a:rPr>
+              <a:t>XSim</a:t>
+            </a:r>
+            <a:r>
+              <a:rPr lang="en-US" sz="1400" dirty="0">
+                <a:latin typeface="Tw Cen MT" panose="020B0602020104020603" pitchFamily="34" charset="0"/>
+              </a:rPr>
+              <a:t>); closed timing at 100 MHz and analyzed LUT/FF/DSP utilization and Fmax against the iron law of performance (IC × CPI × T).</a:t>
+            </a:r>
+          </a:p>
+          <a:p>
+            <a:pPr marL="342900" lvl="0" indent="-342900" rtl="0">
+              <a:buFont typeface="Arial" panose="020B0604020202020204" pitchFamily="34" charset="0"/>
+              <a:buChar char="•"/>
+            </a:pPr>
+            <a:r>
+              <a:rPr lang="en-US" sz="1400" dirty="0">
+                <a:latin typeface="Tw Cen MT" panose="020B0602020104020603" pitchFamily="34" charset="0"/>
+              </a:rPr>
+              <a:t>Contrasted CISC vs. RISC by microcoding an instruction on a Mic-1/IJVM model, then implementing the same operation as hardwired RISC logic.</a:t>
+            </a:r>
+          </a:p>
+        </p:txBody>
+      </p:sp>
+      <p:sp>
+        <p:nvSpPr>
+          <p:cNvPr id="7" name="TextBox 6">
+            <a:extLst>
+              <a:ext uri="{FF2B5EF4-FFF2-40B4-BE49-F238E27FC236}">
+                <a16:creationId xmlns:a16="http://schemas.microsoft.com/office/drawing/2014/main" id="{31084DCF-6423-AB6E-4C25-DF5DFC66DDC6}"/>
+              </a:ext>
+            </a:extLst>
+          </p:cNvPr>
+          <p:cNvSpPr txBox="1"/>
+          <p:nvPr/>
+        </p:nvSpPr>
+        <p:spPr>
+          <a:xfrm>
+            <a:off x="6082607" y="1898785"/>
+            <a:ext cx="5383252" cy="2492990"/>
+          </a:xfrm>
+          <a:prstGeom prst="rect">
+            <a:avLst/>
+          </a:prstGeom>
+          <a:solidFill>
+            <a:srgbClr val="F8E8EC"/>
+          </a:solidFill>
+        </p:spPr>
+        <p:txBody>
+          <a:bodyPr wrap="square" rtlCol="0">
+            <a:spAutoFit/>
+          </a:bodyPr>
+          <a:lstStyle/>
+          <a:p>
+            <a:pPr rtl="0">
+              <a:buNone/>
+            </a:pPr>
+            <a:r>
+              <a:rPr lang="en-US" sz="1600" b="1" dirty="0">
+                <a:latin typeface="Tw Cen MT" panose="020B0602020104020603" pitchFamily="34" charset="0"/>
+              </a:rPr>
+              <a:t>Skills</a:t>
+            </a:r>
+            <a:endParaRPr lang="en-US" sz="1600" dirty="0">
+              <a:latin typeface="Tw Cen MT" panose="020B0602020104020603" pitchFamily="34" charset="0"/>
+            </a:endParaRPr>
+          </a:p>
+          <a:p>
+            <a:pPr marL="342900" lvl="0" indent="-342900">
+              <a:buFont typeface="Arial" panose="020B0604020202020204" pitchFamily="34" charset="0"/>
+              <a:buChar char="•"/>
+            </a:pPr>
+            <a:r>
+              <a:rPr lang="en-US" sz="1400" b="1" dirty="0">
+                <a:latin typeface="Tw Cen MT" panose="020B0602020104020603" pitchFamily="34" charset="0"/>
+              </a:rPr>
+              <a:t>Hardware / FPGA:</a:t>
+            </a:r>
+            <a:r>
+              <a:rPr lang="en-US" sz="1400" dirty="0">
+                <a:latin typeface="Tw Cen MT" panose="020B0602020104020603" pitchFamily="34" charset="0"/>
+              </a:rPr>
+              <a:t> Verilog RTL, </a:t>
+            </a:r>
+            <a:r>
+              <a:rPr lang="en-US" sz="1400" dirty="0" err="1">
+                <a:latin typeface="Tw Cen MT" panose="020B0602020104020603" pitchFamily="34" charset="0"/>
+              </a:rPr>
+              <a:t>Vivado</a:t>
+            </a:r>
+            <a:r>
+              <a:rPr lang="en-US" sz="1400" dirty="0">
+                <a:latin typeface="Tw Cen MT" panose="020B0602020104020603" pitchFamily="34" charset="0"/>
+              </a:rPr>
+              <a:t> Design Suite, IP Integrator (block design), Xilinx Artix-7 / </a:t>
+            </a:r>
+            <a:r>
+              <a:rPr lang="en-US" sz="1400" dirty="0" err="1">
+                <a:latin typeface="Tw Cen MT" panose="020B0602020104020603" pitchFamily="34" charset="0"/>
+              </a:rPr>
+              <a:t>Basys</a:t>
+            </a:r>
+            <a:r>
+              <a:rPr lang="en-US" sz="1400" dirty="0">
+                <a:latin typeface="Tw Cen MT" panose="020B0602020104020603" pitchFamily="34" charset="0"/>
+              </a:rPr>
+              <a:t> 3, XDC timing &amp; pin constraints, RTL simulation (</a:t>
+            </a:r>
+            <a:r>
+              <a:rPr lang="en-US" sz="1400" dirty="0" err="1">
+                <a:latin typeface="Tw Cen MT" panose="020B0602020104020603" pitchFamily="34" charset="0"/>
+              </a:rPr>
+              <a:t>XSim</a:t>
+            </a:r>
+            <a:r>
+              <a:rPr lang="en-US" sz="1400" dirty="0">
+                <a:latin typeface="Tw Cen MT" panose="020B0602020104020603" pitchFamily="34" charset="0"/>
+              </a:rPr>
+              <a:t>/Icarus), timing closure, synthesis &amp; utilization analysis</a:t>
+            </a:r>
+            <a:br>
+              <a:rPr lang="en-US" sz="1400" dirty="0">
+                <a:latin typeface="Tw Cen MT" panose="020B0602020104020603" pitchFamily="34" charset="0"/>
+              </a:rPr>
+            </a:br>
+            <a:r>
+              <a:rPr lang="en-US" sz="1400" b="1" dirty="0">
+                <a:latin typeface="Tw Cen MT" panose="020B0602020104020603" pitchFamily="34" charset="0"/>
+              </a:rPr>
+              <a:t>Computer Architecture:</a:t>
+            </a:r>
+            <a:r>
+              <a:rPr lang="en-US" sz="1400" dirty="0">
+                <a:latin typeface="Tw Cen MT" panose="020B0602020104020603" pitchFamily="34" charset="0"/>
+              </a:rPr>
+              <a:t> RISC-V (RV32I/RV32M), single-cycle &amp; pipelined </a:t>
+            </a:r>
+            <a:r>
+              <a:rPr lang="en-US" sz="1400" dirty="0" err="1">
+                <a:latin typeface="Tw Cen MT" panose="020B0602020104020603" pitchFamily="34" charset="0"/>
+              </a:rPr>
+              <a:t>datapath</a:t>
+            </a:r>
+            <a:r>
+              <a:rPr lang="en-US" sz="1400" dirty="0">
+                <a:latin typeface="Tw Cen MT" panose="020B0602020104020603" pitchFamily="34" charset="0"/>
+              </a:rPr>
+              <a:t> design, hazard/forwarding, instruction decode &amp; control, ALU design, register files, memory hierarchy/caches, CISC microcode (Mic-1/IJVM)</a:t>
+            </a:r>
+            <a:br>
+              <a:rPr lang="en-US" sz="1400" dirty="0">
+                <a:latin typeface="Tw Cen MT" panose="020B0602020104020603" pitchFamily="34" charset="0"/>
+              </a:rPr>
+            </a:br>
+            <a:r>
+              <a:rPr lang="en-US" sz="1400" b="1" dirty="0">
+                <a:latin typeface="Tw Cen MT" panose="020B0602020104020603" pitchFamily="34" charset="0"/>
+              </a:rPr>
+              <a:t>Concepts:</a:t>
+            </a:r>
+            <a:r>
+              <a:rPr lang="en-US" sz="1400" dirty="0">
+                <a:latin typeface="Tw Cen MT" panose="020B0602020104020603" pitchFamily="34" charset="0"/>
+              </a:rPr>
+              <a:t> digital logic design, combinational vs. sequential logic, clocking &amp; FSMs, performance analysis (CPI, Fmax, AMAT)</a:t>
+            </a:r>
+          </a:p>
+        </p:txBody>
+      </p:sp>
+    </p:spTree>
+    <p:extLst>
+      <p:ext uri="{BB962C8B-B14F-4D97-AF65-F5344CB8AC3E}">
+        <p14:creationId xmlns:p14="http://schemas.microsoft.com/office/powerpoint/2010/main" val="91186954"/>
+      </p:ext>
+    </p:extLst>
   </p:cSld>
   <p:clrMapOvr>
     <a:masterClrMapping/>
